--- a/decks/ci-pipeline/ci-pipeline.pptx
+++ b/decks/ci-pipeline/ci-pipeline.pptx
@@ -1299,6 +1299,13 @@
 <file path=ppt/slides/slide1.xml><?xml version="1.0" encoding="utf-8"?>
 <p:sld xmlns:a="http://schemas.openxmlformats.org/drawingml/2006/main" xmlns:r="http://schemas.openxmlformats.org/officeDocument/2006/relationships" xmlns:p="http://schemas.openxmlformats.org/presentationml/2006/main">
   <p:cSld name="Slide 1">
+    <p:bg>
+      <p:bgPr>
+        <a:solidFill>
+          <a:srgbClr val="FFFFFF"/>
+        </a:solidFill>
+      </p:bgPr>
+    </p:bg>
     <p:spTree>
       <p:nvGrpSpPr>
         <p:cNvPr id="1" name=""/>
@@ -1313,30 +1320,462 @@
           <a:chExt cx="0" cy="0"/>
         </a:xfrm>
       </p:grpSpPr>
-      <p:pic>
-        <p:nvPicPr>
-          <p:cNvPr id="2" name="Image 0" descr="/tmp/slide-1787840599125-ajknxt15sps.png">    </p:cNvPr>
-          <p:cNvPicPr>
-            <a:picLocks noChangeAspect="1"/>
-          </p:cNvPicPr>
-          <p:nvPr/>
-        </p:nvPicPr>
-        <p:blipFill>
-          <a:blip r:embed="rId1"/>
-          <a:stretch>
-            <a:fillRect/>
-          </a:stretch>
-        </p:blipFill>
-        <p:spPr>
-          <a:xfrm>
-            <a:off x="0" y="0"/>
-            <a:ext cx="12188952" cy="6858000"/>
-          </a:xfrm>
-          <a:prstGeom prst="rect">
-            <a:avLst/>
-          </a:prstGeom>
-        </p:spPr>
-      </p:pic>
+      <p:sp>
+        <p:nvSpPr>
+          <p:cNvPr id="2" name="Text 0"/>
+          <p:cNvSpPr/>
+          <p:nvPr/>
+        </p:nvSpPr>
+        <p:spPr>
+          <a:xfrm>
+            <a:off x="677098" y="541734"/>
+            <a:ext cx="812597" cy="50800"/>
+          </a:xfrm>
+          <a:prstGeom prst="rect">
+            <a:avLst/>
+          </a:prstGeom>
+          <a:solidFill>
+            <a:srgbClr val="5A55E0"/>
+          </a:solidFill>
+          <a:ln/>
+        </p:spPr>
+        <p:txBody>
+          <a:bodyPr wrap="square" rtlCol="0" anchor="ctr"/>
+          <a:lstStyle/>
+          <a:p>
+            <a:pPr indent="0" marL="0">
+              <a:buNone/>
+            </a:pPr>
+            <a:endParaRPr lang="en-US" dirty="0"/>
+          </a:p>
+        </p:txBody>
+      </p:sp>
+      <p:sp>
+        <p:nvSpPr>
+          <p:cNvPr id="3" name="Text 1"/>
+          <p:cNvSpPr/>
+          <p:nvPr/>
+        </p:nvSpPr>
+        <p:spPr>
+          <a:xfrm>
+            <a:off x="677098" y="829469"/>
+            <a:ext cx="11051451" cy="236934"/>
+          </a:xfrm>
+          <a:prstGeom prst="rect">
+            <a:avLst/>
+          </a:prstGeom>
+          <a:noFill/>
+          <a:ln/>
+        </p:spPr>
+        <p:txBody>
+          <a:bodyPr wrap="square" lIns="0" tIns="0" rIns="0" bIns="0" rtlCol="0" anchor="t"/>
+          <a:lstStyle/>
+          <a:p>
+            <a:pPr algn="l" indent="0" marL="0">
+              <a:lnSpc>
+                <a:spcPts val="1866"/>
+              </a:lnSpc>
+              <a:buNone/>
+            </a:pPr>
+            <a:r>
+              <a:rPr lang="en-US" sz="1333" b="1" dirty="0">
+                <a:solidFill>
+                  <a:srgbClr val="5C6B7E"/>
+                </a:solidFill>
+                <a:latin typeface="Inter" pitchFamily="34" charset="0"/>
+                <a:ea typeface="Inter" pitchFamily="34" charset="-122"/>
+                <a:cs typeface="Inter" pitchFamily="34" charset="-120"/>
+              </a:rPr>
+              <a:t>ENGINEERING PRACTICE · CONTINUOUS INTEGRATION</a:t>
+            </a:r>
+            <a:endParaRPr lang="en-US" sz="1333" dirty="0"/>
+          </a:p>
+        </p:txBody>
+      </p:sp>
+      <p:sp>
+        <p:nvSpPr>
+          <p:cNvPr id="4" name="Text 2"/>
+          <p:cNvSpPr/>
+          <p:nvPr/>
+        </p:nvSpPr>
+        <p:spPr>
+          <a:xfrm>
+            <a:off x="677098" y="1269603"/>
+            <a:ext cx="10360609" cy="1625203"/>
+          </a:xfrm>
+          <a:prstGeom prst="rect">
+            <a:avLst/>
+          </a:prstGeom>
+          <a:noFill/>
+          <a:ln/>
+        </p:spPr>
+        <p:txBody>
+          <a:bodyPr wrap="square" lIns="0" tIns="0" rIns="0" bIns="0" rtlCol="0" anchor="t"/>
+          <a:lstStyle/>
+          <a:p>
+            <a:pPr algn="l" indent="0" marL="0">
+              <a:lnSpc>
+                <a:spcPts val="6399"/>
+              </a:lnSpc>
+              <a:spcBef>
+                <a:spcPts val="1600"/>
+              </a:spcBef>
+              <a:buNone/>
+            </a:pPr>
+            <a:r>
+              <a:rPr lang="en-US" sz="5333" dirty="0">
+                <a:solidFill>
+                  <a:srgbClr val="0A2540"/>
+                </a:solidFill>
+                <a:latin typeface="Inter" pitchFamily="34" charset="0"/>
+                <a:ea typeface="Inter" pitchFamily="34" charset="-122"/>
+                <a:cs typeface="Inter" pitchFamily="34" charset="-120"/>
+              </a:rPr>
+              <a:t>CI pipeline: what belongs</a:t>
+            </a:r>
+            <a:endParaRPr lang="en-US" sz="5333" dirty="0"/>
+          </a:p>
+          <a:p>
+            <a:pPr algn="l" indent="0" marL="0">
+              <a:lnSpc>
+                <a:spcPts val="6399"/>
+              </a:lnSpc>
+              <a:spcBef>
+                <a:spcPts val="1600"/>
+              </a:spcBef>
+              <a:buNone/>
+            </a:pPr>
+            <a:r>
+              <a:rPr lang="en-US" sz="5333" dirty="0">
+                <a:solidFill>
+                  <a:srgbClr val="0A2540"/>
+                </a:solidFill>
+                <a:latin typeface="Inter" pitchFamily="34" charset="0"/>
+                <a:ea typeface="Inter" pitchFamily="34" charset="-122"/>
+                <a:cs typeface="Inter" pitchFamily="34" charset="-120"/>
+              </a:rPr>
+              <a:t>in it, and what does not</a:t>
+            </a:r>
+            <a:endParaRPr lang="en-US" sz="5333" dirty="0"/>
+          </a:p>
+        </p:txBody>
+      </p:sp>
+      <p:sp>
+        <p:nvSpPr>
+          <p:cNvPr id="5" name="Text 3"/>
+          <p:cNvSpPr/>
+          <p:nvPr/>
+        </p:nvSpPr>
+        <p:spPr>
+          <a:xfrm>
+            <a:off x="677098" y="3233341"/>
+            <a:ext cx="9151737" cy="785416"/>
+          </a:xfrm>
+          <a:prstGeom prst="rect">
+            <a:avLst/>
+          </a:prstGeom>
+          <a:noFill/>
+          <a:ln/>
+        </p:spPr>
+        <p:txBody>
+          <a:bodyPr wrap="square" lIns="0" tIns="0" rIns="0" bIns="0" rtlCol="0" anchor="t"/>
+          <a:lstStyle/>
+          <a:p>
+            <a:pPr algn="l" indent="0" marL="0">
+              <a:lnSpc>
+                <a:spcPts val="3093"/>
+              </a:lnSpc>
+              <a:spcBef>
+                <a:spcPts val="2666"/>
+              </a:spcBef>
+              <a:buNone/>
+            </a:pPr>
+            <a:r>
+              <a:rPr lang="en-US" sz="2133" dirty="0">
+                <a:solidFill>
+                  <a:srgbClr val="5C6B7E"/>
+                </a:solidFill>
+                <a:latin typeface="Inter" pitchFamily="34" charset="0"/>
+                <a:ea typeface="Inter" pitchFamily="34" charset="-122"/>
+                <a:cs typeface="Inter" pitchFamily="34" charset="-120"/>
+              </a:rPr>
+              <a:t>A pipeline does not get slow because there are too many tests.</a:t>
+            </a:r>
+            <a:endParaRPr lang="en-US" sz="2133" dirty="0"/>
+          </a:p>
+          <a:p>
+            <a:pPr algn="l" indent="0" marL="0">
+              <a:lnSpc>
+                <a:spcPts val="3093"/>
+              </a:lnSpc>
+              <a:spcBef>
+                <a:spcPts val="2666"/>
+              </a:spcBef>
+              <a:buNone/>
+            </a:pPr>
+            <a:r>
+              <a:rPr lang="en-US" sz="2133" dirty="0">
+                <a:solidFill>
+                  <a:srgbClr val="5C6B7E"/>
+                </a:solidFill>
+                <a:latin typeface="Inter" pitchFamily="34" charset="0"/>
+                <a:ea typeface="Inter" pitchFamily="34" charset="-122"/>
+                <a:cs typeface="Inter" pitchFamily="34" charset="-120"/>
+              </a:rPr>
+              <a:t>It gets slow because nothing defines what belongs in it.</a:t>
+            </a:r>
+            <a:endParaRPr lang="en-US" sz="2133" dirty="0"/>
+          </a:p>
+        </p:txBody>
+      </p:sp>
+      <p:sp>
+        <p:nvSpPr>
+          <p:cNvPr id="6" name="Text 4"/>
+          <p:cNvSpPr/>
+          <p:nvPr/>
+        </p:nvSpPr>
+        <p:spPr>
+          <a:xfrm>
+            <a:off x="677098" y="4783733"/>
+            <a:ext cx="10834756" cy="1092398"/>
+          </a:xfrm>
+          <a:prstGeom prst="roundRect">
+            <a:avLst>
+              <a:gd name="adj" fmla="val 9299"/>
+            </a:avLst>
+          </a:prstGeom>
+          <a:solidFill>
+            <a:srgbClr val="F6F9FC"/>
+          </a:solidFill>
+          <a:ln/>
+        </p:spPr>
+        <p:txBody>
+          <a:bodyPr wrap="square" rtlCol="0" anchor="ctr"/>
+          <a:lstStyle/>
+          <a:p>
+            <a:pPr indent="0" marL="0">
+              <a:buNone/>
+            </a:pPr>
+            <a:endParaRPr lang="en-US" dirty="0"/>
+          </a:p>
+        </p:txBody>
+      </p:sp>
+      <p:sp>
+        <p:nvSpPr>
+          <p:cNvPr id="7" name="Text 5"/>
+          <p:cNvSpPr/>
+          <p:nvPr/>
+        </p:nvSpPr>
+        <p:spPr>
+          <a:xfrm>
+            <a:off x="981822" y="5020667"/>
+            <a:ext cx="2098023" cy="236934"/>
+          </a:xfrm>
+          <a:prstGeom prst="rect">
+            <a:avLst/>
+          </a:prstGeom>
+          <a:noFill/>
+          <a:ln/>
+        </p:spPr>
+        <p:txBody>
+          <a:bodyPr wrap="square" lIns="0" tIns="0" rIns="0" bIns="0" rtlCol="0" anchor="t"/>
+          <a:lstStyle/>
+          <a:p>
+            <a:pPr algn="l" indent="0" marL="0">
+              <a:lnSpc>
+                <a:spcPts val="1866"/>
+              </a:lnSpc>
+              <a:spcAft>
+                <a:spcPts val="667"/>
+              </a:spcAft>
+              <a:buNone/>
+            </a:pPr>
+            <a:r>
+              <a:rPr lang="en-US" sz="1333" b="1" dirty="0">
+                <a:solidFill>
+                  <a:srgbClr val="5C6B7E"/>
+                </a:solidFill>
+                <a:latin typeface="Inter" pitchFamily="34" charset="0"/>
+                <a:ea typeface="Inter" pitchFamily="34" charset="-122"/>
+                <a:cs typeface="Inter" pitchFamily="34" charset="-120"/>
+              </a:rPr>
+              <a:t>PRESENTED BY</a:t>
+            </a:r>
+            <a:endParaRPr lang="en-US" sz="1333" dirty="0"/>
+          </a:p>
+        </p:txBody>
+      </p:sp>
+      <p:sp>
+        <p:nvSpPr>
+          <p:cNvPr id="8" name="Text 6"/>
+          <p:cNvSpPr/>
+          <p:nvPr/>
+        </p:nvSpPr>
+        <p:spPr>
+          <a:xfrm>
+            <a:off x="981822" y="5342136"/>
+            <a:ext cx="2098023" cy="297061"/>
+          </a:xfrm>
+          <a:prstGeom prst="rect">
+            <a:avLst/>
+          </a:prstGeom>
+          <a:noFill/>
+          <a:ln/>
+        </p:spPr>
+        <p:txBody>
+          <a:bodyPr wrap="square" lIns="0" tIns="0" rIns="0" bIns="0" rtlCol="0" anchor="t"/>
+          <a:lstStyle/>
+          <a:p>
+            <a:pPr algn="l" indent="0" marL="0">
+              <a:lnSpc>
+                <a:spcPts val="2340"/>
+              </a:lnSpc>
+              <a:buNone/>
+            </a:pPr>
+            <a:r>
+              <a:rPr lang="en-US" sz="1733" b="1" dirty="0">
+                <a:solidFill>
+                  <a:srgbClr val="0A2540"/>
+                </a:solidFill>
+                <a:latin typeface="Inter" pitchFamily="34" charset="0"/>
+                <a:ea typeface="Inter" pitchFamily="34" charset="-122"/>
+                <a:cs typeface="Inter" pitchFamily="34" charset="-120"/>
+              </a:rPr>
+              <a:t>PRESENTER · TEAM</a:t>
+            </a:r>
+            <a:endParaRPr lang="en-US" sz="1733" dirty="0"/>
+          </a:p>
+        </p:txBody>
+      </p:sp>
+      <p:sp>
+        <p:nvSpPr>
+          <p:cNvPr id="9" name="Text 7"/>
+          <p:cNvSpPr/>
+          <p:nvPr/>
+        </p:nvSpPr>
+        <p:spPr>
+          <a:xfrm>
+            <a:off x="3986605" y="5020667"/>
+            <a:ext cx="2357039" cy="236934"/>
+          </a:xfrm>
+          <a:prstGeom prst="rect">
+            <a:avLst/>
+          </a:prstGeom>
+          <a:noFill/>
+          <a:ln/>
+        </p:spPr>
+        <p:txBody>
+          <a:bodyPr wrap="square" lIns="0" tIns="0" rIns="0" bIns="0" rtlCol="0" anchor="t"/>
+          <a:lstStyle/>
+          <a:p>
+            <a:pPr algn="l" indent="0" marL="0">
+              <a:lnSpc>
+                <a:spcPts val="1866"/>
+              </a:lnSpc>
+              <a:spcAft>
+                <a:spcPts val="667"/>
+              </a:spcAft>
+              <a:buNone/>
+            </a:pPr>
+            <a:r>
+              <a:rPr lang="en-US" sz="1333" b="1" dirty="0">
+                <a:solidFill>
+                  <a:srgbClr val="5C6B7E"/>
+                </a:solidFill>
+                <a:latin typeface="Inter" pitchFamily="34" charset="0"/>
+                <a:ea typeface="Inter" pitchFamily="34" charset="-122"/>
+                <a:cs typeface="Inter" pitchFamily="34" charset="-120"/>
+              </a:rPr>
+              <a:t>SCOPE</a:t>
+            </a:r>
+            <a:endParaRPr lang="en-US" sz="1333" dirty="0"/>
+          </a:p>
+        </p:txBody>
+      </p:sp>
+      <p:sp>
+        <p:nvSpPr>
+          <p:cNvPr id="10" name="Text 8"/>
+          <p:cNvSpPr/>
+          <p:nvPr/>
+        </p:nvSpPr>
+        <p:spPr>
+          <a:xfrm>
+            <a:off x="3986605" y="5342136"/>
+            <a:ext cx="2357039" cy="297061"/>
+          </a:xfrm>
+          <a:prstGeom prst="rect">
+            <a:avLst/>
+          </a:prstGeom>
+          <a:noFill/>
+          <a:ln/>
+        </p:spPr>
+        <p:txBody>
+          <a:bodyPr wrap="square" lIns="0" tIns="0" rIns="0" bIns="0" rtlCol="0" anchor="t"/>
+          <a:lstStyle/>
+          <a:p>
+            <a:pPr algn="l" indent="0" marL="0">
+              <a:lnSpc>
+                <a:spcPts val="2340"/>
+              </a:lnSpc>
+              <a:buNone/>
+            </a:pPr>
+            <a:r>
+              <a:rPr lang="en-US" sz="1733" b="1" dirty="0">
+                <a:solidFill>
+                  <a:srgbClr val="0A2540"/>
+                </a:solidFill>
+                <a:latin typeface="Inter" pitchFamily="34" charset="0"/>
+                <a:ea typeface="Inter" pitchFamily="34" charset="-122"/>
+                <a:cs typeface="Inter" pitchFamily="34" charset="-120"/>
+              </a:rPr>
+              <a:t>Every commit to main</a:t>
+            </a:r>
+            <a:endParaRPr lang="en-US" sz="1733" dirty="0"/>
+          </a:p>
+        </p:txBody>
+      </p:sp>
+      <p:sp>
+        <p:nvSpPr>
+          <p:cNvPr id="11" name="Text 9"/>
+          <p:cNvSpPr/>
+          <p:nvPr/>
+        </p:nvSpPr>
+        <p:spPr>
+          <a:xfrm>
+            <a:off x="6015716" y="6113066"/>
+            <a:ext cx="5606061" cy="236934"/>
+          </a:xfrm>
+          <a:prstGeom prst="rect">
+            <a:avLst/>
+          </a:prstGeom>
+          <a:noFill/>
+          <a:ln/>
+        </p:spPr>
+        <p:txBody>
+          <a:bodyPr wrap="square" lIns="0" tIns="0" rIns="0" bIns="0" rtlCol="0" anchor="t"/>
+          <a:lstStyle/>
+          <a:p>
+            <a:pPr algn="l" indent="0" marL="0">
+              <a:lnSpc>
+                <a:spcPts val="1866"/>
+              </a:lnSpc>
+              <a:buNone/>
+            </a:pPr>
+            <a:r>
+              <a:rPr lang="en-US" sz="1333" dirty="0">
+                <a:solidFill>
+                  <a:srgbClr val="5C6B7E"/>
+                </a:solidFill>
+                <a:latin typeface="Inter" pitchFamily="34" charset="0"/>
+                <a:ea typeface="Inter" pitchFamily="34" charset="-122"/>
+                <a:cs typeface="Inter" pitchFamily="34" charset="-120"/>
+              </a:rPr>
+              <a:t>CI PIPELINE · SHEET 01 / 06 · NO CHART, NO EXTERNAL DATA</a:t>
+            </a:r>
+            <a:endParaRPr lang="en-US" sz="1333" dirty="0"/>
+          </a:p>
+        </p:txBody>
+      </p:sp>
     </p:spTree>
   </p:cSld>
   <p:clrMapOvr>
@@ -1348,6 +1787,13 @@
 <file path=ppt/slides/slide2.xml><?xml version="1.0" encoding="utf-8"?>
 <p:sld xmlns:a="http://schemas.openxmlformats.org/drawingml/2006/main" xmlns:r="http://schemas.openxmlformats.org/officeDocument/2006/relationships" xmlns:p="http://schemas.openxmlformats.org/presentationml/2006/main">
   <p:cSld name="Slide 2">
+    <p:bg>
+      <p:bgPr>
+        <a:solidFill>
+          <a:srgbClr val="FFFFFF"/>
+        </a:solidFill>
+      </p:bgPr>
+    </p:bg>
     <p:spTree>
       <p:nvGrpSpPr>
         <p:cNvPr id="1" name=""/>
@@ -1362,30 +1808,701 @@
           <a:chExt cx="0" cy="0"/>
         </a:xfrm>
       </p:grpSpPr>
-      <p:pic>
-        <p:nvPicPr>
-          <p:cNvPr id="2" name="Image 0" descr="/tmp/slide-1787840599415-thqmotsg3hc.png">    </p:cNvPr>
-          <p:cNvPicPr>
-            <a:picLocks noChangeAspect="1"/>
-          </p:cNvPicPr>
-          <p:nvPr/>
-        </p:nvPicPr>
-        <p:blipFill>
-          <a:blip r:embed="rId1"/>
-          <a:stretch>
-            <a:fillRect/>
-          </a:stretch>
-        </p:blipFill>
-        <p:spPr>
-          <a:xfrm>
-            <a:off x="0" y="0"/>
-            <a:ext cx="12188952" cy="6858000"/>
-          </a:xfrm>
-          <a:prstGeom prst="rect">
-            <a:avLst/>
-          </a:prstGeom>
-        </p:spPr>
-      </p:pic>
+      <p:sp>
+        <p:nvSpPr>
+          <p:cNvPr id="2" name="Text 0"/>
+          <p:cNvSpPr/>
+          <p:nvPr/>
+        </p:nvSpPr>
+        <p:spPr>
+          <a:xfrm>
+            <a:off x="677098" y="541734"/>
+            <a:ext cx="11051451" cy="236934"/>
+          </a:xfrm>
+          <a:prstGeom prst="rect">
+            <a:avLst/>
+          </a:prstGeom>
+          <a:noFill/>
+          <a:ln/>
+        </p:spPr>
+        <p:txBody>
+          <a:bodyPr wrap="square" lIns="0" tIns="0" rIns="0" bIns="0" rtlCol="0" anchor="t"/>
+          <a:lstStyle/>
+          <a:p>
+            <a:pPr algn="l" indent="0" marL="0">
+              <a:lnSpc>
+                <a:spcPts val="1866"/>
+              </a:lnSpc>
+              <a:buNone/>
+            </a:pPr>
+            <a:r>
+              <a:rPr lang="en-US" sz="1333" b="1" dirty="0">
+                <a:solidFill>
+                  <a:srgbClr val="5C6B7E"/>
+                </a:solidFill>
+                <a:latin typeface="Inter" pitchFamily="34" charset="0"/>
+                <a:ea typeface="Inter" pitchFamily="34" charset="-122"/>
+                <a:cs typeface="Inter" pitchFamily="34" charset="-120"/>
+              </a:rPr>
+              <a:t>THE QUESTION</a:t>
+            </a:r>
+            <a:endParaRPr lang="en-US" sz="1333" dirty="0"/>
+          </a:p>
+        </p:txBody>
+      </p:sp>
+      <p:sp>
+        <p:nvSpPr>
+          <p:cNvPr id="3" name="Text 1"/>
+          <p:cNvSpPr/>
+          <p:nvPr/>
+        </p:nvSpPr>
+        <p:spPr>
+          <a:xfrm>
+            <a:off x="677098" y="863203"/>
+            <a:ext cx="9669767" cy="487561"/>
+          </a:xfrm>
+          <a:prstGeom prst="rect">
+            <a:avLst/>
+          </a:prstGeom>
+          <a:noFill/>
+          <a:ln/>
+        </p:spPr>
+        <p:txBody>
+          <a:bodyPr wrap="square" lIns="0" tIns="0" rIns="0" bIns="0" rtlCol="0" anchor="t"/>
+          <a:lstStyle/>
+          <a:p>
+            <a:pPr algn="l" indent="0" marL="0">
+              <a:lnSpc>
+                <a:spcPts val="3840"/>
+              </a:lnSpc>
+              <a:spcBef>
+                <a:spcPts val="667"/>
+              </a:spcBef>
+              <a:buNone/>
+            </a:pPr>
+            <a:r>
+              <a:rPr lang="en-US" sz="3200" b="1" dirty="0">
+                <a:solidFill>
+                  <a:srgbClr val="0A2540"/>
+                </a:solidFill>
+                <a:latin typeface="Inter" pitchFamily="34" charset="0"/>
+                <a:ea typeface="Inter" pitchFamily="34" charset="-122"/>
+                <a:cs typeface="Inter" pitchFamily="34" charset="-120"/>
+              </a:rPr>
+              <a:t>What CI answers on every commit</a:t>
+            </a:r>
+            <a:endParaRPr lang="en-US" sz="3200" dirty="0"/>
+          </a:p>
+        </p:txBody>
+      </p:sp>
+      <p:sp>
+        <p:nvSpPr>
+          <p:cNvPr id="4" name="Text 2"/>
+          <p:cNvSpPr/>
+          <p:nvPr/>
+        </p:nvSpPr>
+        <p:spPr>
+          <a:xfrm>
+            <a:off x="677098" y="1621631"/>
+            <a:ext cx="50787" cy="4254500"/>
+          </a:xfrm>
+          <a:prstGeom prst="roundRect">
+            <a:avLst>
+              <a:gd name="adj" fmla="val 50007"/>
+            </a:avLst>
+          </a:prstGeom>
+          <a:solidFill>
+            <a:srgbClr val="5A55E0"/>
+          </a:solidFill>
+          <a:ln/>
+        </p:spPr>
+        <p:txBody>
+          <a:bodyPr wrap="square" rtlCol="0" anchor="ctr"/>
+          <a:lstStyle/>
+          <a:p>
+            <a:pPr indent="0" marL="0">
+              <a:buNone/>
+            </a:pPr>
+            <a:endParaRPr lang="en-US" dirty="0"/>
+          </a:p>
+        </p:txBody>
+      </p:sp>
+      <p:sp>
+        <p:nvSpPr>
+          <p:cNvPr id="5" name="Text 3"/>
+          <p:cNvSpPr/>
+          <p:nvPr/>
+        </p:nvSpPr>
+        <p:spPr>
+          <a:xfrm>
+            <a:off x="964760" y="1621631"/>
+            <a:ext cx="5951887" cy="846534"/>
+          </a:xfrm>
+          <a:prstGeom prst="rect">
+            <a:avLst/>
+          </a:prstGeom>
+          <a:noFill/>
+          <a:ln/>
+        </p:spPr>
+        <p:txBody>
+          <a:bodyPr wrap="square" lIns="0" tIns="0" rIns="0" bIns="0" rtlCol="0" anchor="t"/>
+          <a:lstStyle/>
+          <a:p>
+            <a:pPr algn="l" indent="0" marL="0">
+              <a:lnSpc>
+                <a:spcPts val="3333"/>
+              </a:lnSpc>
+              <a:buNone/>
+            </a:pPr>
+            <a:r>
+              <a:rPr lang="en-US" sz="2666" b="1" dirty="0">
+                <a:solidFill>
+                  <a:srgbClr val="0A2540"/>
+                </a:solidFill>
+                <a:latin typeface="Inter" pitchFamily="34" charset="0"/>
+                <a:ea typeface="Inter" pitchFamily="34" charset="-122"/>
+                <a:cs typeface="Inter" pitchFamily="34" charset="-120"/>
+              </a:rPr>
+              <a:t>Can main be released with this commit in it?</a:t>
+            </a:r>
+            <a:endParaRPr lang="en-US" sz="2666" dirty="0"/>
+          </a:p>
+        </p:txBody>
+      </p:sp>
+      <p:sp>
+        <p:nvSpPr>
+          <p:cNvPr id="6" name="Text 4"/>
+          <p:cNvSpPr/>
+          <p:nvPr/>
+        </p:nvSpPr>
+        <p:spPr>
+          <a:xfrm>
+            <a:off x="964760" y="2739033"/>
+            <a:ext cx="5951887" cy="1374775"/>
+          </a:xfrm>
+          <a:prstGeom prst="rect">
+            <a:avLst/>
+          </a:prstGeom>
+          <a:noFill/>
+          <a:ln/>
+        </p:spPr>
+        <p:txBody>
+          <a:bodyPr wrap="square" lIns="0" tIns="0" rIns="0" bIns="0" rtlCol="0" anchor="t"/>
+          <a:lstStyle/>
+          <a:p>
+            <a:pPr algn="l" indent="0" marL="0">
+              <a:lnSpc>
+                <a:spcPts val="2706"/>
+              </a:lnSpc>
+              <a:spcBef>
+                <a:spcPts val="2133"/>
+              </a:spcBef>
+              <a:buNone/>
+            </a:pPr>
+            <a:r>
+              <a:rPr lang="en-US" sz="1866" dirty="0">
+                <a:solidFill>
+                  <a:srgbClr val="5C6B7E"/>
+                </a:solidFill>
+                <a:latin typeface="Inter" pitchFamily="34" charset="0"/>
+                <a:ea typeface="Inter" pitchFamily="34" charset="-122"/>
+                <a:cs typeface="Inter" pitchFamily="34" charset="-120"/>
+              </a:rPr>
+              <a:t>CI is not a place to run tests. It is that one question, answered on every commit — and the answer is only worth having while a red build means exactly one thing.</a:t>
+            </a:r>
+            <a:endParaRPr lang="en-US" sz="1866" dirty="0"/>
+          </a:p>
+        </p:txBody>
+      </p:sp>
+      <p:sp>
+        <p:nvSpPr>
+          <p:cNvPr id="7" name="Text 5"/>
+          <p:cNvSpPr/>
+          <p:nvPr/>
+        </p:nvSpPr>
+        <p:spPr>
+          <a:xfrm>
+            <a:off x="964760" y="4384675"/>
+            <a:ext cx="5951887" cy="687388"/>
+          </a:xfrm>
+          <a:prstGeom prst="rect">
+            <a:avLst/>
+          </a:prstGeom>
+          <a:noFill/>
+          <a:ln/>
+        </p:spPr>
+        <p:txBody>
+          <a:bodyPr wrap="square" lIns="0" tIns="0" rIns="0" bIns="0" rtlCol="0" anchor="t"/>
+          <a:lstStyle/>
+          <a:p>
+            <a:pPr algn="l" indent="0" marL="0">
+              <a:lnSpc>
+                <a:spcPts val="2706"/>
+              </a:lnSpc>
+              <a:spcBef>
+                <a:spcPts val="2133"/>
+              </a:spcBef>
+              <a:buNone/>
+            </a:pPr>
+            <a:r>
+              <a:rPr lang="en-US" sz="1866" b="1" dirty="0">
+                <a:solidFill>
+                  <a:srgbClr val="0A2540"/>
+                </a:solidFill>
+                <a:latin typeface="Inter" pitchFamily="34" charset="0"/>
+                <a:ea typeface="Inter" pitchFamily="34" charset="-122"/>
+                <a:cs typeface="Inter" pitchFamily="34" charset="-120"/>
+              </a:rPr>
+              <a:t>Every stage that answers something else makes a red build mean a little less.</a:t>
+            </a:r>
+            <a:endParaRPr lang="en-US" sz="1866" dirty="0"/>
+          </a:p>
+        </p:txBody>
+      </p:sp>
+      <p:sp>
+        <p:nvSpPr>
+          <p:cNvPr id="8" name="Text 6"/>
+          <p:cNvSpPr/>
+          <p:nvPr/>
+        </p:nvSpPr>
+        <p:spPr>
+          <a:xfrm>
+            <a:off x="7138393" y="1621631"/>
+            <a:ext cx="4460930" cy="236934"/>
+          </a:xfrm>
+          <a:prstGeom prst="rect">
+            <a:avLst/>
+          </a:prstGeom>
+          <a:noFill/>
+          <a:ln/>
+        </p:spPr>
+        <p:txBody>
+          <a:bodyPr wrap="square" lIns="0" tIns="0" rIns="0" bIns="0" rtlCol="0" anchor="t"/>
+          <a:lstStyle/>
+          <a:p>
+            <a:pPr algn="l" indent="0" marL="0">
+              <a:lnSpc>
+                <a:spcPts val="1866"/>
+              </a:lnSpc>
+              <a:spcAft>
+                <a:spcPts val="1067"/>
+              </a:spcAft>
+              <a:buNone/>
+            </a:pPr>
+            <a:r>
+              <a:rPr lang="en-US" sz="1333" b="1" dirty="0">
+                <a:solidFill>
+                  <a:srgbClr val="5C6B7E"/>
+                </a:solidFill>
+                <a:latin typeface="Inter" pitchFamily="34" charset="0"/>
+                <a:ea typeface="Inter" pitchFamily="34" charset="-122"/>
+                <a:cs typeface="Inter" pitchFamily="34" charset="-120"/>
+              </a:rPr>
+              <a:t>THREE WAYS IT GETS DILUTED</a:t>
+            </a:r>
+            <a:endParaRPr lang="en-US" sz="1333" dirty="0"/>
+          </a:p>
+        </p:txBody>
+      </p:sp>
+      <p:sp>
+        <p:nvSpPr>
+          <p:cNvPr id="9" name="Text 7"/>
+          <p:cNvSpPr/>
+          <p:nvPr/>
+        </p:nvSpPr>
+        <p:spPr>
+          <a:xfrm>
+            <a:off x="7138393" y="1993900"/>
+            <a:ext cx="4373461" cy="1181298"/>
+          </a:xfrm>
+          <a:prstGeom prst="roundRect">
+            <a:avLst>
+              <a:gd name="adj" fmla="val 8600"/>
+            </a:avLst>
+          </a:prstGeom>
+          <a:solidFill>
+            <a:srgbClr val="F6F9FC"/>
+          </a:solidFill>
+          <a:ln/>
+        </p:spPr>
+        <p:txBody>
+          <a:bodyPr wrap="square" rtlCol="0" anchor="ctr"/>
+          <a:lstStyle/>
+          <a:p>
+            <a:pPr indent="0" marL="0">
+              <a:buNone/>
+            </a:pPr>
+            <a:endParaRPr lang="en-US" dirty="0"/>
+          </a:p>
+        </p:txBody>
+      </p:sp>
+      <p:sp>
+        <p:nvSpPr>
+          <p:cNvPr id="10" name="Text 8"/>
+          <p:cNvSpPr/>
+          <p:nvPr/>
+        </p:nvSpPr>
+        <p:spPr>
+          <a:xfrm>
+            <a:off x="7358405" y="2282825"/>
+            <a:ext cx="4012105" cy="251420"/>
+          </a:xfrm>
+          <a:prstGeom prst="rect">
+            <a:avLst/>
+          </a:prstGeom>
+          <a:noFill/>
+          <a:ln/>
+        </p:spPr>
+        <p:txBody>
+          <a:bodyPr wrap="square" lIns="0" tIns="0" rIns="0" bIns="0" rtlCol="0" anchor="t"/>
+          <a:lstStyle/>
+          <a:p>
+            <a:pPr algn="l" indent="0" marL="0">
+              <a:lnSpc>
+                <a:spcPts val="1980"/>
+              </a:lnSpc>
+              <a:buNone/>
+            </a:pPr>
+            <a:r>
+              <a:rPr lang="en-US" sz="1466" b="1" dirty="0">
+                <a:solidFill>
+                  <a:srgbClr val="0A2540"/>
+                </a:solidFill>
+                <a:latin typeface="Inter" pitchFamily="34" charset="0"/>
+                <a:ea typeface="Inter" pitchFamily="34" charset="-122"/>
+                <a:cs typeface="Inter" pitchFamily="34" charset="-120"/>
+              </a:rPr>
+              <a:t>Work that answers a different question</a:t>
+            </a:r>
+            <a:endParaRPr lang="en-US" sz="1466" dirty="0"/>
+          </a:p>
+        </p:txBody>
+      </p:sp>
+      <p:sp>
+        <p:nvSpPr>
+          <p:cNvPr id="11" name="Text 9"/>
+          <p:cNvSpPr/>
+          <p:nvPr/>
+        </p:nvSpPr>
+        <p:spPr>
+          <a:xfrm>
+            <a:off x="7358405" y="2601913"/>
+            <a:ext cx="4012105" cy="284361"/>
+          </a:xfrm>
+          <a:prstGeom prst="rect">
+            <a:avLst/>
+          </a:prstGeom>
+          <a:noFill/>
+          <a:ln/>
+        </p:spPr>
+        <p:txBody>
+          <a:bodyPr wrap="square" lIns="0" tIns="0" rIns="0" bIns="0" rtlCol="0" anchor="t"/>
+          <a:lstStyle/>
+          <a:p>
+            <a:pPr algn="l" indent="0" marL="0">
+              <a:lnSpc>
+                <a:spcPts val="2240"/>
+              </a:lnSpc>
+              <a:spcBef>
+                <a:spcPts val="533"/>
+              </a:spcBef>
+              <a:buNone/>
+            </a:pPr>
+            <a:r>
+              <a:rPr lang="en-US" sz="1600" dirty="0">
+                <a:solidFill>
+                  <a:srgbClr val="5C6B7E"/>
+                </a:solidFill>
+                <a:latin typeface="Inter" pitchFamily="34" charset="0"/>
+                <a:ea typeface="Inter" pitchFamily="34" charset="-122"/>
+                <a:cs typeface="Inter" pitchFamily="34" charset="-120"/>
+              </a:rPr>
+              <a:t>Nightly soak runs, full browser matrices</a:t>
+            </a:r>
+            <a:endParaRPr lang="en-US" sz="1600" dirty="0"/>
+          </a:p>
+        </p:txBody>
+      </p:sp>
+      <p:sp>
+        <p:nvSpPr>
+          <p:cNvPr id="12" name="Text 10"/>
+          <p:cNvSpPr/>
+          <p:nvPr/>
+        </p:nvSpPr>
+        <p:spPr>
+          <a:xfrm>
+            <a:off x="7138393" y="3344466"/>
+            <a:ext cx="4373461" cy="1181298"/>
+          </a:xfrm>
+          <a:prstGeom prst="roundRect">
+            <a:avLst>
+              <a:gd name="adj" fmla="val 8600"/>
+            </a:avLst>
+          </a:prstGeom>
+          <a:solidFill>
+            <a:srgbClr val="F6F9FC"/>
+          </a:solidFill>
+          <a:ln/>
+        </p:spPr>
+        <p:txBody>
+          <a:bodyPr wrap="square" rtlCol="0" anchor="ctr"/>
+          <a:lstStyle/>
+          <a:p>
+            <a:pPr indent="0" marL="0">
+              <a:buNone/>
+            </a:pPr>
+            <a:endParaRPr lang="en-US" dirty="0"/>
+          </a:p>
+        </p:txBody>
+      </p:sp>
+      <p:sp>
+        <p:nvSpPr>
+          <p:cNvPr id="13" name="Text 11"/>
+          <p:cNvSpPr/>
+          <p:nvPr/>
+        </p:nvSpPr>
+        <p:spPr>
+          <a:xfrm>
+            <a:off x="7358405" y="3491309"/>
+            <a:ext cx="4012105" cy="251420"/>
+          </a:xfrm>
+          <a:prstGeom prst="rect">
+            <a:avLst/>
+          </a:prstGeom>
+          <a:noFill/>
+          <a:ln/>
+        </p:spPr>
+        <p:txBody>
+          <a:bodyPr wrap="square" lIns="0" tIns="0" rIns="0" bIns="0" rtlCol="0" anchor="t"/>
+          <a:lstStyle/>
+          <a:p>
+            <a:pPr algn="l" indent="0" marL="0">
+              <a:lnSpc>
+                <a:spcPts val="1980"/>
+              </a:lnSpc>
+              <a:buNone/>
+            </a:pPr>
+            <a:r>
+              <a:rPr lang="en-US" sz="1466" b="1" dirty="0">
+                <a:solidFill>
+                  <a:srgbClr val="0A2540"/>
+                </a:solidFill>
+                <a:latin typeface="Inter" pitchFamily="34" charset="0"/>
+                <a:ea typeface="Inter" pitchFamily="34" charset="-122"/>
+                <a:cs typeface="Inter" pitchFamily="34" charset="-120"/>
+              </a:rPr>
+              <a:t>Work nobody reads the answer to</a:t>
+            </a:r>
+            <a:endParaRPr lang="en-US" sz="1466" dirty="0"/>
+          </a:p>
+        </p:txBody>
+      </p:sp>
+      <p:sp>
+        <p:nvSpPr>
+          <p:cNvPr id="14" name="Text 12"/>
+          <p:cNvSpPr/>
+          <p:nvPr/>
+        </p:nvSpPr>
+        <p:spPr>
+          <a:xfrm>
+            <a:off x="7358405" y="3810397"/>
+            <a:ext cx="4012105" cy="568722"/>
+          </a:xfrm>
+          <a:prstGeom prst="rect">
+            <a:avLst/>
+          </a:prstGeom>
+          <a:noFill/>
+          <a:ln/>
+        </p:spPr>
+        <p:txBody>
+          <a:bodyPr wrap="square" lIns="0" tIns="0" rIns="0" bIns="0" rtlCol="0" anchor="t"/>
+          <a:lstStyle/>
+          <a:p>
+            <a:pPr algn="l" indent="0" marL="0">
+              <a:lnSpc>
+                <a:spcPts val="2240"/>
+              </a:lnSpc>
+              <a:spcBef>
+                <a:spcPts val="533"/>
+              </a:spcBef>
+              <a:buNone/>
+            </a:pPr>
+            <a:r>
+              <a:rPr lang="en-US" sz="1600" dirty="0">
+                <a:solidFill>
+                  <a:srgbClr val="5C6B7E"/>
+                </a:solidFill>
+                <a:latin typeface="Inter" pitchFamily="34" charset="0"/>
+                <a:ea typeface="Inter" pitchFamily="34" charset="-122"/>
+                <a:cs typeface="Inter" pitchFamily="34" charset="-120"/>
+              </a:rPr>
+              <a:t>Reports produced, archived, never opened</a:t>
+            </a:r>
+            <a:endParaRPr lang="en-US" sz="1600" dirty="0"/>
+          </a:p>
+        </p:txBody>
+      </p:sp>
+      <p:sp>
+        <p:nvSpPr>
+          <p:cNvPr id="15" name="Text 13"/>
+          <p:cNvSpPr/>
+          <p:nvPr/>
+        </p:nvSpPr>
+        <p:spPr>
+          <a:xfrm>
+            <a:off x="7138393" y="4695031"/>
+            <a:ext cx="4373461" cy="1181298"/>
+          </a:xfrm>
+          <a:prstGeom prst="roundRect">
+            <a:avLst>
+              <a:gd name="adj" fmla="val 8600"/>
+            </a:avLst>
+          </a:prstGeom>
+          <a:solidFill>
+            <a:srgbClr val="F6F9FC"/>
+          </a:solidFill>
+          <a:ln/>
+        </p:spPr>
+        <p:txBody>
+          <a:bodyPr wrap="square" rtlCol="0" anchor="ctr"/>
+          <a:lstStyle/>
+          <a:p>
+            <a:pPr indent="0" marL="0">
+              <a:buNone/>
+            </a:pPr>
+            <a:endParaRPr lang="en-US" dirty="0"/>
+          </a:p>
+        </p:txBody>
+      </p:sp>
+      <p:sp>
+        <p:nvSpPr>
+          <p:cNvPr id="16" name="Text 14"/>
+          <p:cNvSpPr/>
+          <p:nvPr/>
+        </p:nvSpPr>
+        <p:spPr>
+          <a:xfrm>
+            <a:off x="7358405" y="4983956"/>
+            <a:ext cx="4012105" cy="251420"/>
+          </a:xfrm>
+          <a:prstGeom prst="rect">
+            <a:avLst/>
+          </a:prstGeom>
+          <a:noFill/>
+          <a:ln/>
+        </p:spPr>
+        <p:txBody>
+          <a:bodyPr wrap="square" lIns="0" tIns="0" rIns="0" bIns="0" rtlCol="0" anchor="t"/>
+          <a:lstStyle/>
+          <a:p>
+            <a:pPr algn="l" indent="0" marL="0">
+              <a:lnSpc>
+                <a:spcPts val="1980"/>
+              </a:lnSpc>
+              <a:buNone/>
+            </a:pPr>
+            <a:r>
+              <a:rPr lang="en-US" sz="1466" b="1" dirty="0">
+                <a:solidFill>
+                  <a:srgbClr val="0A2540"/>
+                </a:solidFill>
+                <a:latin typeface="Inter" pitchFamily="34" charset="0"/>
+                <a:ea typeface="Inter" pitchFamily="34" charset="-122"/>
+                <a:cs typeface="Inter" pitchFamily="34" charset="-120"/>
+              </a:rPr>
+              <a:t>Work that answers nothing</a:t>
+            </a:r>
+            <a:endParaRPr lang="en-US" sz="1466" dirty="0"/>
+          </a:p>
+        </p:txBody>
+      </p:sp>
+      <p:sp>
+        <p:nvSpPr>
+          <p:cNvPr id="17" name="Text 15"/>
+          <p:cNvSpPr/>
+          <p:nvPr/>
+        </p:nvSpPr>
+        <p:spPr>
+          <a:xfrm>
+            <a:off x="7358405" y="5303044"/>
+            <a:ext cx="4012105" cy="284361"/>
+          </a:xfrm>
+          <a:prstGeom prst="rect">
+            <a:avLst/>
+          </a:prstGeom>
+          <a:noFill/>
+          <a:ln/>
+        </p:spPr>
+        <p:txBody>
+          <a:bodyPr wrap="square" lIns="0" tIns="0" rIns="0" bIns="0" rtlCol="0" anchor="t"/>
+          <a:lstStyle/>
+          <a:p>
+            <a:pPr algn="l" indent="0" marL="0">
+              <a:lnSpc>
+                <a:spcPts val="2240"/>
+              </a:lnSpc>
+              <a:spcBef>
+                <a:spcPts val="533"/>
+              </a:spcBef>
+              <a:buNone/>
+            </a:pPr>
+            <a:r>
+              <a:rPr lang="en-US" sz="1600" dirty="0">
+                <a:solidFill>
+                  <a:srgbClr val="5C6B7E"/>
+                </a:solidFill>
+                <a:latin typeface="Inter" pitchFamily="34" charset="0"/>
+                <a:ea typeface="Inter" pitchFamily="34" charset="-122"/>
+                <a:cs typeface="Inter" pitchFamily="34" charset="-120"/>
+              </a:rPr>
+              <a:t>A suite retried until it happens to pass</a:t>
+            </a:r>
+            <a:endParaRPr lang="en-US" sz="1600" dirty="0"/>
+          </a:p>
+        </p:txBody>
+      </p:sp>
+      <p:sp>
+        <p:nvSpPr>
+          <p:cNvPr id="18" name="Text 16"/>
+          <p:cNvSpPr/>
+          <p:nvPr/>
+        </p:nvSpPr>
+        <p:spPr>
+          <a:xfrm>
+            <a:off x="5977626" y="6113066"/>
+            <a:ext cx="5644913" cy="236934"/>
+          </a:xfrm>
+          <a:prstGeom prst="rect">
+            <a:avLst/>
+          </a:prstGeom>
+          <a:noFill/>
+          <a:ln/>
+        </p:spPr>
+        <p:txBody>
+          <a:bodyPr wrap="square" lIns="0" tIns="0" rIns="0" bIns="0" rtlCol="0" anchor="t"/>
+          <a:lstStyle/>
+          <a:p>
+            <a:pPr algn="l" indent="0" marL="0">
+              <a:lnSpc>
+                <a:spcPts val="1866"/>
+              </a:lnSpc>
+              <a:buNone/>
+            </a:pPr>
+            <a:r>
+              <a:rPr lang="en-US" sz="1333" dirty="0">
+                <a:solidFill>
+                  <a:srgbClr val="5C6B7E"/>
+                </a:solidFill>
+                <a:latin typeface="Inter" pitchFamily="34" charset="0"/>
+                <a:ea typeface="Inter" pitchFamily="34" charset="-122"/>
+                <a:cs typeface="Inter" pitchFamily="34" charset="-120"/>
+              </a:rPr>
+              <a:t>CI PIPELINE · SHEET 02 / 06 · NO CHART, NO EXTERNAL DATA</a:t>
+            </a:r>
+            <a:endParaRPr lang="en-US" sz="1333" dirty="0"/>
+          </a:p>
+        </p:txBody>
+      </p:sp>
     </p:spTree>
   </p:cSld>
   <p:clrMapOvr>
@@ -1397,6 +2514,13 @@
 <file path=ppt/slides/slide3.xml><?xml version="1.0" encoding="utf-8"?>
 <p:sld xmlns:a="http://schemas.openxmlformats.org/drawingml/2006/main" xmlns:r="http://schemas.openxmlformats.org/officeDocument/2006/relationships" xmlns:p="http://schemas.openxmlformats.org/presentationml/2006/main">
   <p:cSld name="Slide 3">
+    <p:bg>
+      <p:bgPr>
+        <a:solidFill>
+          <a:srgbClr val="FFFFFF"/>
+        </a:solidFill>
+      </p:bgPr>
+    </p:bg>
     <p:spTree>
       <p:nvGrpSpPr>
         <p:cNvPr id="1" name=""/>
@@ -1411,30 +2535,928 @@
           <a:chExt cx="0" cy="0"/>
         </a:xfrm>
       </p:grpSpPr>
-      <p:pic>
-        <p:nvPicPr>
-          <p:cNvPr id="2" name="Image 0" descr="/tmp/slide-1787840599769-su2hn4tjmw.png">    </p:cNvPr>
-          <p:cNvPicPr>
-            <a:picLocks noChangeAspect="1"/>
-          </p:cNvPicPr>
-          <p:nvPr/>
-        </p:nvPicPr>
-        <p:blipFill>
-          <a:blip r:embed="rId1"/>
-          <a:stretch>
-            <a:fillRect/>
-          </a:stretch>
-        </p:blipFill>
-        <p:spPr>
-          <a:xfrm>
-            <a:off x="0" y="0"/>
-            <a:ext cx="12188952" cy="6858000"/>
-          </a:xfrm>
-          <a:prstGeom prst="rect">
-            <a:avLst/>
-          </a:prstGeom>
-        </p:spPr>
-      </p:pic>
+      <p:sp>
+        <p:nvSpPr>
+          <p:cNvPr id="2" name="Text 0"/>
+          <p:cNvSpPr/>
+          <p:nvPr/>
+        </p:nvSpPr>
+        <p:spPr>
+          <a:xfrm>
+            <a:off x="677098" y="541734"/>
+            <a:ext cx="11051451" cy="236934"/>
+          </a:xfrm>
+          <a:prstGeom prst="rect">
+            <a:avLst/>
+          </a:prstGeom>
+          <a:noFill/>
+          <a:ln/>
+        </p:spPr>
+        <p:txBody>
+          <a:bodyPr wrap="square" lIns="0" tIns="0" rIns="0" bIns="0" rtlCol="0" anchor="t"/>
+          <a:lstStyle/>
+          <a:p>
+            <a:pPr algn="l" indent="0" marL="0">
+              <a:lnSpc>
+                <a:spcPts val="1866"/>
+              </a:lnSpc>
+              <a:buNone/>
+            </a:pPr>
+            <a:r>
+              <a:rPr lang="en-US" sz="1333" b="1" dirty="0">
+                <a:solidFill>
+                  <a:srgbClr val="5C6B7E"/>
+                </a:solidFill>
+                <a:latin typeface="Inter" pitchFamily="34" charset="0"/>
+                <a:ea typeface="Inter" pitchFamily="34" charset="-122"/>
+                <a:cs typeface="Inter" pitchFamily="34" charset="-120"/>
+              </a:rPr>
+              <a:t>THE BOUNDARY</a:t>
+            </a:r>
+            <a:endParaRPr lang="en-US" sz="1333" dirty="0"/>
+          </a:p>
+        </p:txBody>
+      </p:sp>
+      <p:sp>
+        <p:nvSpPr>
+          <p:cNvPr id="3" name="Text 1"/>
+          <p:cNvSpPr/>
+          <p:nvPr/>
+        </p:nvSpPr>
+        <p:spPr>
+          <a:xfrm>
+            <a:off x="677098" y="863203"/>
+            <a:ext cx="9669767" cy="487561"/>
+          </a:xfrm>
+          <a:prstGeom prst="rect">
+            <a:avLst/>
+          </a:prstGeom>
+          <a:noFill/>
+          <a:ln/>
+        </p:spPr>
+        <p:txBody>
+          <a:bodyPr wrap="square" lIns="0" tIns="0" rIns="0" bIns="0" rtlCol="0" anchor="t"/>
+          <a:lstStyle/>
+          <a:p>
+            <a:pPr algn="l" indent="0" marL="0">
+              <a:lnSpc>
+                <a:spcPts val="3840"/>
+              </a:lnSpc>
+              <a:spcBef>
+                <a:spcPts val="667"/>
+              </a:spcBef>
+              <a:buNone/>
+            </a:pPr>
+            <a:r>
+              <a:rPr lang="en-US" sz="3200" b="1" dirty="0">
+                <a:solidFill>
+                  <a:srgbClr val="0A2540"/>
+                </a:solidFill>
+                <a:latin typeface="Inter" pitchFamily="34" charset="0"/>
+                <a:ea typeface="Inter" pitchFamily="34" charset="-122"/>
+                <a:cs typeface="Inter" pitchFamily="34" charset="-120"/>
+              </a:rPr>
+              <a:t>The boundary: CI, post-merge, scheduled</a:t>
+            </a:r>
+            <a:endParaRPr lang="en-US" sz="3200" dirty="0"/>
+          </a:p>
+        </p:txBody>
+      </p:sp>
+      <p:sp>
+        <p:nvSpPr>
+          <p:cNvPr id="4" name="Text 2"/>
+          <p:cNvSpPr/>
+          <p:nvPr/>
+        </p:nvSpPr>
+        <p:spPr>
+          <a:xfrm>
+            <a:off x="677098" y="1621631"/>
+            <a:ext cx="3453735" cy="565547"/>
+          </a:xfrm>
+          <a:prstGeom prst="rect">
+            <a:avLst/>
+          </a:prstGeom>
+          <a:solidFill>
+            <a:srgbClr val="5A55E0"/>
+          </a:solidFill>
+          <a:ln/>
+        </p:spPr>
+        <p:txBody>
+          <a:bodyPr wrap="square" rtlCol="0" anchor="ctr"/>
+          <a:lstStyle/>
+          <a:p>
+            <a:pPr indent="0" marL="0">
+              <a:buNone/>
+            </a:pPr>
+            <a:endParaRPr lang="en-US" dirty="0"/>
+          </a:p>
+        </p:txBody>
+      </p:sp>
+      <p:sp>
+        <p:nvSpPr>
+          <p:cNvPr id="5" name="Text 3"/>
+          <p:cNvSpPr/>
+          <p:nvPr/>
+        </p:nvSpPr>
+        <p:spPr>
+          <a:xfrm>
+            <a:off x="913973" y="1774031"/>
+            <a:ext cx="3039584" cy="260747"/>
+          </a:xfrm>
+          <a:prstGeom prst="rect">
+            <a:avLst/>
+          </a:prstGeom>
+          <a:noFill/>
+          <a:ln/>
+        </p:spPr>
+        <p:txBody>
+          <a:bodyPr wrap="square" lIns="0" tIns="0" rIns="0" bIns="0" rtlCol="0" anchor="t"/>
+          <a:lstStyle/>
+          <a:p>
+            <a:pPr algn="l" indent="0" marL="0">
+              <a:lnSpc>
+                <a:spcPts val="2053"/>
+              </a:lnSpc>
+              <a:buNone/>
+            </a:pPr>
+            <a:r>
+              <a:rPr lang="en-US" sz="1466" b="1" dirty="0">
+                <a:solidFill>
+                  <a:srgbClr val="FFFFFF"/>
+                </a:solidFill>
+                <a:latin typeface="Inter" pitchFamily="34" charset="0"/>
+                <a:ea typeface="Inter" pitchFamily="34" charset="-122"/>
+                <a:cs typeface="Inter" pitchFamily="34" charset="-120"/>
+              </a:rPr>
+              <a:t>IN CI</a:t>
+            </a:r>
+            <a:endParaRPr lang="en-US" sz="1466" dirty="0"/>
+          </a:p>
+        </p:txBody>
+      </p:sp>
+      <p:sp>
+        <p:nvSpPr>
+          <p:cNvPr id="6" name="Text 4"/>
+          <p:cNvSpPr/>
+          <p:nvPr/>
+        </p:nvSpPr>
+        <p:spPr>
+          <a:xfrm>
+            <a:off x="677098" y="2187178"/>
+            <a:ext cx="3453735" cy="2407444"/>
+          </a:xfrm>
+          <a:prstGeom prst="rect">
+            <a:avLst/>
+          </a:prstGeom>
+          <a:solidFill>
+            <a:srgbClr val="F6F9FC"/>
+          </a:solidFill>
+          <a:ln/>
+        </p:spPr>
+        <p:txBody>
+          <a:bodyPr wrap="square" rtlCol="0" anchor="ctr"/>
+          <a:lstStyle/>
+          <a:p>
+            <a:pPr indent="0" marL="0">
+              <a:buNone/>
+            </a:pPr>
+            <a:endParaRPr lang="en-US" dirty="0"/>
+          </a:p>
+        </p:txBody>
+      </p:sp>
+      <p:sp>
+        <p:nvSpPr>
+          <p:cNvPr id="7" name="Text 5"/>
+          <p:cNvSpPr/>
+          <p:nvPr/>
+        </p:nvSpPr>
+        <p:spPr>
+          <a:xfrm>
+            <a:off x="913973" y="2424113"/>
+            <a:ext cx="3039584" cy="588963"/>
+          </a:xfrm>
+          <a:prstGeom prst="rect">
+            <a:avLst/>
+          </a:prstGeom>
+          <a:noFill/>
+          <a:ln/>
+        </p:spPr>
+        <p:txBody>
+          <a:bodyPr wrap="square" lIns="0" tIns="0" rIns="0" bIns="0" rtlCol="0" anchor="t"/>
+          <a:lstStyle/>
+          <a:p>
+            <a:pPr algn="l" indent="0" marL="0">
+              <a:lnSpc>
+                <a:spcPts val="2320"/>
+              </a:lnSpc>
+              <a:buNone/>
+            </a:pPr>
+            <a:r>
+              <a:rPr lang="en-US" sz="1600" b="1" dirty="0">
+                <a:solidFill>
+                  <a:srgbClr val="0A2540"/>
+                </a:solidFill>
+                <a:latin typeface="Inter" pitchFamily="34" charset="0"/>
+                <a:ea typeface="Inter" pitchFamily="34" charset="-122"/>
+                <a:cs typeface="Inter" pitchFamily="34" charset="-120"/>
+              </a:rPr>
+              <a:t>Failure means: this commit must not merge.</a:t>
+            </a:r>
+            <a:endParaRPr lang="en-US" sz="1600" dirty="0"/>
+          </a:p>
+        </p:txBody>
+      </p:sp>
+      <p:sp>
+        <p:nvSpPr>
+          <p:cNvPr id="8" name="Text 6"/>
+          <p:cNvSpPr/>
+          <p:nvPr/>
+        </p:nvSpPr>
+        <p:spPr>
+          <a:xfrm>
+            <a:off x="913973" y="3199209"/>
+            <a:ext cx="2979985" cy="1056283"/>
+          </a:xfrm>
+          <a:prstGeom prst="rect">
+            <a:avLst/>
+          </a:prstGeom>
+          <a:noFill/>
+          <a:ln/>
+        </p:spPr>
+        <p:txBody>
+          <a:bodyPr wrap="square" lIns="0" tIns="0" rIns="0" bIns="0" rtlCol="0" anchor="t"/>
+          <a:lstStyle/>
+          <a:p>
+            <a:pPr algn="l" marL="342900" indent="-342900">
+              <a:lnSpc>
+                <a:spcPts val="2240"/>
+              </a:lnSpc>
+              <a:buSzPct val="100000"/>
+              <a:buChar char="•"/>
+            </a:pPr>
+            <a:r>
+              <a:rPr lang="en-US" sz="1600" dirty="0">
+                <a:solidFill>
+                  <a:srgbClr val="5C6B7E"/>
+                </a:solidFill>
+                <a:latin typeface="Inter" pitchFamily="34" charset="0"/>
+                <a:ea typeface="Inter" pitchFamily="34" charset="-122"/>
+                <a:cs typeface="Inter" pitchFamily="34" charset="-120"/>
+              </a:rPr>
+              <a:t>Build and compile</a:t>
+            </a:r>
+            <a:endParaRPr lang="en-US" sz="1600" dirty="0"/>
+          </a:p>
+          <a:p>
+            <a:pPr algn="l" marL="342900" indent="-342900">
+              <a:lnSpc>
+                <a:spcPts val="2240"/>
+              </a:lnSpc>
+              <a:buSzPct val="100000"/>
+              <a:buChar char="•"/>
+            </a:pPr>
+            <a:r>
+              <a:rPr lang="en-US" sz="1600" dirty="0">
+                <a:solidFill>
+                  <a:srgbClr val="5C6B7E"/>
+                </a:solidFill>
+                <a:latin typeface="Inter" pitchFamily="34" charset="0"/>
+                <a:ea typeface="Inter" pitchFamily="34" charset="-122"/>
+                <a:cs typeface="Inter" pitchFamily="34" charset="-120"/>
+              </a:rPr>
+              <a:t>Unit and fast integration</a:t>
+            </a:r>
+            <a:endParaRPr lang="en-US" sz="1600" dirty="0"/>
+          </a:p>
+          <a:p>
+            <a:pPr algn="l" marL="342900" indent="-342900">
+              <a:lnSpc>
+                <a:spcPts val="2240"/>
+              </a:lnSpc>
+              <a:buSzPct val="100000"/>
+              <a:buChar char="•"/>
+            </a:pPr>
+            <a:r>
+              <a:rPr lang="en-US" sz="1600" dirty="0">
+                <a:solidFill>
+                  <a:srgbClr val="5C6B7E"/>
+                </a:solidFill>
+                <a:latin typeface="Inter" pitchFamily="34" charset="0"/>
+                <a:ea typeface="Inter" pitchFamily="34" charset="-122"/>
+                <a:cs typeface="Inter" pitchFamily="34" charset="-120"/>
+              </a:rPr>
+              <a:t>Lint and type checks</a:t>
+            </a:r>
+            <a:endParaRPr lang="en-US" sz="1600" dirty="0"/>
+          </a:p>
+        </p:txBody>
+      </p:sp>
+      <p:sp>
+        <p:nvSpPr>
+          <p:cNvPr id="9" name="Text 7"/>
+          <p:cNvSpPr/>
+          <p:nvPr/>
+        </p:nvSpPr>
+        <p:spPr>
+          <a:xfrm>
+            <a:off x="4367708" y="1621631"/>
+            <a:ext cx="3453735" cy="565547"/>
+          </a:xfrm>
+          <a:prstGeom prst="rect">
+            <a:avLst/>
+          </a:prstGeom>
+          <a:solidFill>
+            <a:srgbClr val="EBF0F6"/>
+          </a:solidFill>
+          <a:ln/>
+        </p:spPr>
+        <p:txBody>
+          <a:bodyPr wrap="square" rtlCol="0" anchor="ctr"/>
+          <a:lstStyle/>
+          <a:p>
+            <a:pPr indent="0" marL="0">
+              <a:buNone/>
+            </a:pPr>
+            <a:endParaRPr lang="en-US" dirty="0"/>
+          </a:p>
+        </p:txBody>
+      </p:sp>
+      <p:sp>
+        <p:nvSpPr>
+          <p:cNvPr id="10" name="Text 8"/>
+          <p:cNvSpPr/>
+          <p:nvPr/>
+        </p:nvSpPr>
+        <p:spPr>
+          <a:xfrm>
+            <a:off x="4604583" y="1774031"/>
+            <a:ext cx="3039584" cy="260747"/>
+          </a:xfrm>
+          <a:prstGeom prst="rect">
+            <a:avLst/>
+          </a:prstGeom>
+          <a:noFill/>
+          <a:ln/>
+        </p:spPr>
+        <p:txBody>
+          <a:bodyPr wrap="square" lIns="0" tIns="0" rIns="0" bIns="0" rtlCol="0" anchor="t"/>
+          <a:lstStyle/>
+          <a:p>
+            <a:pPr algn="l" indent="0" marL="0">
+              <a:lnSpc>
+                <a:spcPts val="2053"/>
+              </a:lnSpc>
+              <a:buNone/>
+            </a:pPr>
+            <a:r>
+              <a:rPr lang="en-US" sz="1466" b="1" dirty="0">
+                <a:solidFill>
+                  <a:srgbClr val="0A2540"/>
+                </a:solidFill>
+                <a:latin typeface="Inter" pitchFamily="34" charset="0"/>
+                <a:ea typeface="Inter" pitchFamily="34" charset="-122"/>
+                <a:cs typeface="Inter" pitchFamily="34" charset="-120"/>
+              </a:rPr>
+              <a:t>AFTER THE MERGE</a:t>
+            </a:r>
+            <a:endParaRPr lang="en-US" sz="1466" dirty="0"/>
+          </a:p>
+        </p:txBody>
+      </p:sp>
+      <p:sp>
+        <p:nvSpPr>
+          <p:cNvPr id="11" name="Text 9"/>
+          <p:cNvSpPr/>
+          <p:nvPr/>
+        </p:nvSpPr>
+        <p:spPr>
+          <a:xfrm>
+            <a:off x="4367708" y="2187178"/>
+            <a:ext cx="3453735" cy="2407444"/>
+          </a:xfrm>
+          <a:prstGeom prst="rect">
+            <a:avLst/>
+          </a:prstGeom>
+          <a:solidFill>
+            <a:srgbClr val="F6F9FC"/>
+          </a:solidFill>
+          <a:ln/>
+        </p:spPr>
+        <p:txBody>
+          <a:bodyPr wrap="square" rtlCol="0" anchor="ctr"/>
+          <a:lstStyle/>
+          <a:p>
+            <a:pPr indent="0" marL="0">
+              <a:buNone/>
+            </a:pPr>
+            <a:endParaRPr lang="en-US" dirty="0"/>
+          </a:p>
+        </p:txBody>
+      </p:sp>
+      <p:sp>
+        <p:nvSpPr>
+          <p:cNvPr id="12" name="Text 10"/>
+          <p:cNvSpPr/>
+          <p:nvPr/>
+        </p:nvSpPr>
+        <p:spPr>
+          <a:xfrm>
+            <a:off x="4604583" y="2424113"/>
+            <a:ext cx="3039584" cy="588963"/>
+          </a:xfrm>
+          <a:prstGeom prst="rect">
+            <a:avLst/>
+          </a:prstGeom>
+          <a:noFill/>
+          <a:ln/>
+        </p:spPr>
+        <p:txBody>
+          <a:bodyPr wrap="square" lIns="0" tIns="0" rIns="0" bIns="0" rtlCol="0" anchor="t"/>
+          <a:lstStyle/>
+          <a:p>
+            <a:pPr algn="l" indent="0" marL="0">
+              <a:lnSpc>
+                <a:spcPts val="2320"/>
+              </a:lnSpc>
+              <a:buNone/>
+            </a:pPr>
+            <a:r>
+              <a:rPr lang="en-US" sz="1600" b="1" dirty="0">
+                <a:solidFill>
+                  <a:srgbClr val="0A2540"/>
+                </a:solidFill>
+                <a:latin typeface="Inter" pitchFamily="34" charset="0"/>
+                <a:ea typeface="Inter" pitchFamily="34" charset="-122"/>
+                <a:cs typeface="Inter" pitchFamily="34" charset="-120"/>
+              </a:rPr>
+              <a:t>Only answerable once the merged result exists.</a:t>
+            </a:r>
+            <a:endParaRPr lang="en-US" sz="1600" dirty="0"/>
+          </a:p>
+        </p:txBody>
+      </p:sp>
+      <p:sp>
+        <p:nvSpPr>
+          <p:cNvPr id="13" name="Text 11"/>
+          <p:cNvSpPr/>
+          <p:nvPr/>
+        </p:nvSpPr>
+        <p:spPr>
+          <a:xfrm>
+            <a:off x="4604583" y="3199209"/>
+            <a:ext cx="2979985" cy="1056283"/>
+          </a:xfrm>
+          <a:prstGeom prst="rect">
+            <a:avLst/>
+          </a:prstGeom>
+          <a:noFill/>
+          <a:ln/>
+        </p:spPr>
+        <p:txBody>
+          <a:bodyPr wrap="square" lIns="0" tIns="0" rIns="0" bIns="0" rtlCol="0" anchor="t"/>
+          <a:lstStyle/>
+          <a:p>
+            <a:pPr algn="l" marL="342900" indent="-342900">
+              <a:lnSpc>
+                <a:spcPts val="2240"/>
+              </a:lnSpc>
+              <a:buSzPct val="100000"/>
+              <a:buChar char="•"/>
+            </a:pPr>
+            <a:r>
+              <a:rPr lang="en-US" sz="1600" dirty="0">
+                <a:solidFill>
+                  <a:srgbClr val="5C6B7E"/>
+                </a:solidFill>
+                <a:latin typeface="Inter" pitchFamily="34" charset="0"/>
+                <a:ea typeface="Inter" pitchFamily="34" charset="-122"/>
+                <a:cs typeface="Inter" pitchFamily="34" charset="-120"/>
+              </a:rPr>
+              <a:t>Deploy to staging</a:t>
+            </a:r>
+            <a:endParaRPr lang="en-US" sz="1600" dirty="0"/>
+          </a:p>
+          <a:p>
+            <a:pPr algn="l" marL="342900" indent="-342900">
+              <a:lnSpc>
+                <a:spcPts val="2240"/>
+              </a:lnSpc>
+              <a:buSzPct val="100000"/>
+              <a:buChar char="•"/>
+            </a:pPr>
+            <a:r>
+              <a:rPr lang="en-US" sz="1600" dirty="0">
+                <a:solidFill>
+                  <a:srgbClr val="5C6B7E"/>
+                </a:solidFill>
+                <a:latin typeface="Inter" pitchFamily="34" charset="0"/>
+                <a:ea typeface="Inter" pitchFamily="34" charset="-122"/>
+                <a:cs typeface="Inter" pitchFamily="34" charset="-120"/>
+              </a:rPr>
+              <a:t>End-to-end on a real env</a:t>
+            </a:r>
+            <a:endParaRPr lang="en-US" sz="1600" dirty="0"/>
+          </a:p>
+          <a:p>
+            <a:pPr algn="l" marL="342900" indent="-342900">
+              <a:lnSpc>
+                <a:spcPts val="2240"/>
+              </a:lnSpc>
+              <a:buSzPct val="100000"/>
+              <a:buChar char="•"/>
+            </a:pPr>
+            <a:r>
+              <a:rPr lang="en-US" sz="1600" dirty="0">
+                <a:solidFill>
+                  <a:srgbClr val="5C6B7E"/>
+                </a:solidFill>
+                <a:latin typeface="Inter" pitchFamily="34" charset="0"/>
+                <a:ea typeface="Inter" pitchFamily="34" charset="-122"/>
+                <a:cs typeface="Inter" pitchFamily="34" charset="-120"/>
+              </a:rPr>
+              <a:t>Post-deploy smoke tests</a:t>
+            </a:r>
+            <a:endParaRPr lang="en-US" sz="1600" dirty="0"/>
+          </a:p>
+        </p:txBody>
+      </p:sp>
+      <p:sp>
+        <p:nvSpPr>
+          <p:cNvPr id="14" name="Text 12"/>
+          <p:cNvSpPr/>
+          <p:nvPr/>
+        </p:nvSpPr>
+        <p:spPr>
+          <a:xfrm>
+            <a:off x="8058318" y="1621631"/>
+            <a:ext cx="3453735" cy="565547"/>
+          </a:xfrm>
+          <a:prstGeom prst="rect">
+            <a:avLst/>
+          </a:prstGeom>
+          <a:solidFill>
+            <a:srgbClr val="EBF0F6"/>
+          </a:solidFill>
+          <a:ln/>
+        </p:spPr>
+        <p:txBody>
+          <a:bodyPr wrap="square" rtlCol="0" anchor="ctr"/>
+          <a:lstStyle/>
+          <a:p>
+            <a:pPr indent="0" marL="0">
+              <a:buNone/>
+            </a:pPr>
+            <a:endParaRPr lang="en-US" dirty="0"/>
+          </a:p>
+        </p:txBody>
+      </p:sp>
+      <p:sp>
+        <p:nvSpPr>
+          <p:cNvPr id="15" name="Text 13"/>
+          <p:cNvSpPr/>
+          <p:nvPr/>
+        </p:nvSpPr>
+        <p:spPr>
+          <a:xfrm>
+            <a:off x="8295193" y="1774031"/>
+            <a:ext cx="3039584" cy="260747"/>
+          </a:xfrm>
+          <a:prstGeom prst="rect">
+            <a:avLst/>
+          </a:prstGeom>
+          <a:noFill/>
+          <a:ln/>
+        </p:spPr>
+        <p:txBody>
+          <a:bodyPr wrap="square" lIns="0" tIns="0" rIns="0" bIns="0" rtlCol="0" anchor="t"/>
+          <a:lstStyle/>
+          <a:p>
+            <a:pPr algn="l" indent="0" marL="0">
+              <a:lnSpc>
+                <a:spcPts val="2053"/>
+              </a:lnSpc>
+              <a:buNone/>
+            </a:pPr>
+            <a:r>
+              <a:rPr lang="en-US" sz="1466" b="1" dirty="0">
+                <a:solidFill>
+                  <a:srgbClr val="0A2540"/>
+                </a:solidFill>
+                <a:latin typeface="Inter" pitchFamily="34" charset="0"/>
+                <a:ea typeface="Inter" pitchFamily="34" charset="-122"/>
+                <a:cs typeface="Inter" pitchFamily="34" charset="-120"/>
+              </a:rPr>
+              <a:t>ON A SCHEDULE</a:t>
+            </a:r>
+            <a:endParaRPr lang="en-US" sz="1466" dirty="0"/>
+          </a:p>
+        </p:txBody>
+      </p:sp>
+      <p:sp>
+        <p:nvSpPr>
+          <p:cNvPr id="16" name="Text 14"/>
+          <p:cNvSpPr/>
+          <p:nvPr/>
+        </p:nvSpPr>
+        <p:spPr>
+          <a:xfrm>
+            <a:off x="8058318" y="2187178"/>
+            <a:ext cx="3453735" cy="2407444"/>
+          </a:xfrm>
+          <a:prstGeom prst="rect">
+            <a:avLst/>
+          </a:prstGeom>
+          <a:solidFill>
+            <a:srgbClr val="F6F9FC"/>
+          </a:solidFill>
+          <a:ln/>
+        </p:spPr>
+        <p:txBody>
+          <a:bodyPr wrap="square" rtlCol="0" anchor="ctr"/>
+          <a:lstStyle/>
+          <a:p>
+            <a:pPr indent="0" marL="0">
+              <a:buNone/>
+            </a:pPr>
+            <a:endParaRPr lang="en-US" dirty="0"/>
+          </a:p>
+        </p:txBody>
+      </p:sp>
+      <p:sp>
+        <p:nvSpPr>
+          <p:cNvPr id="17" name="Text 15"/>
+          <p:cNvSpPr/>
+          <p:nvPr/>
+        </p:nvSpPr>
+        <p:spPr>
+          <a:xfrm>
+            <a:off x="8295193" y="2424113"/>
+            <a:ext cx="3039584" cy="588963"/>
+          </a:xfrm>
+          <a:prstGeom prst="rect">
+            <a:avLst/>
+          </a:prstGeom>
+          <a:noFill/>
+          <a:ln/>
+        </p:spPr>
+        <p:txBody>
+          <a:bodyPr wrap="square" lIns="0" tIns="0" rIns="0" bIns="0" rtlCol="0" anchor="t"/>
+          <a:lstStyle/>
+          <a:p>
+            <a:pPr algn="l" indent="0" marL="0">
+              <a:lnSpc>
+                <a:spcPts val="2320"/>
+              </a:lnSpc>
+              <a:buNone/>
+            </a:pPr>
+            <a:r>
+              <a:rPr lang="en-US" sz="1600" b="1" dirty="0">
+                <a:solidFill>
+                  <a:srgbClr val="0A2540"/>
+                </a:solidFill>
+                <a:latin typeface="Inter" pitchFamily="34" charset="0"/>
+                <a:ea typeface="Inter" pitchFamily="34" charset="-122"/>
+                <a:cs typeface="Inter" pitchFamily="34" charset="-120"/>
+              </a:rPr>
+              <a:t>The answer does not change commit to commit.</a:t>
+            </a:r>
+            <a:endParaRPr lang="en-US" sz="1600" dirty="0"/>
+          </a:p>
+        </p:txBody>
+      </p:sp>
+      <p:sp>
+        <p:nvSpPr>
+          <p:cNvPr id="18" name="Text 16"/>
+          <p:cNvSpPr/>
+          <p:nvPr/>
+        </p:nvSpPr>
+        <p:spPr>
+          <a:xfrm>
+            <a:off x="8295193" y="3199209"/>
+            <a:ext cx="2979985" cy="1056283"/>
+          </a:xfrm>
+          <a:prstGeom prst="rect">
+            <a:avLst/>
+          </a:prstGeom>
+          <a:noFill/>
+          <a:ln/>
+        </p:spPr>
+        <p:txBody>
+          <a:bodyPr wrap="square" lIns="0" tIns="0" rIns="0" bIns="0" rtlCol="0" anchor="t"/>
+          <a:lstStyle/>
+          <a:p>
+            <a:pPr algn="l" marL="342900" indent="-342900">
+              <a:lnSpc>
+                <a:spcPts val="2240"/>
+              </a:lnSpc>
+              <a:buSzPct val="100000"/>
+              <a:buChar char="•"/>
+            </a:pPr>
+            <a:r>
+              <a:rPr lang="en-US" sz="1600" dirty="0">
+                <a:solidFill>
+                  <a:srgbClr val="5C6B7E"/>
+                </a:solidFill>
+                <a:latin typeface="Inter" pitchFamily="34" charset="0"/>
+                <a:ea typeface="Inter" pitchFamily="34" charset="-122"/>
+                <a:cs typeface="Inter" pitchFamily="34" charset="-120"/>
+              </a:rPr>
+              <a:t>Full OS and browser matrix</a:t>
+            </a:r>
+            <a:endParaRPr lang="en-US" sz="1600" dirty="0"/>
+          </a:p>
+          <a:p>
+            <a:pPr algn="l" marL="342900" indent="-342900">
+              <a:lnSpc>
+                <a:spcPts val="2240"/>
+              </a:lnSpc>
+              <a:buSzPct val="100000"/>
+              <a:buChar char="•"/>
+            </a:pPr>
+            <a:r>
+              <a:rPr lang="en-US" sz="1600" dirty="0">
+                <a:solidFill>
+                  <a:srgbClr val="5C6B7E"/>
+                </a:solidFill>
+                <a:latin typeface="Inter" pitchFamily="34" charset="0"/>
+                <a:ea typeface="Inter" pitchFamily="34" charset="-122"/>
+                <a:cs typeface="Inter" pitchFamily="34" charset="-120"/>
+              </a:rPr>
+              <a:t>Licence and CVE audits</a:t>
+            </a:r>
+            <a:endParaRPr lang="en-US" sz="1600" dirty="0"/>
+          </a:p>
+          <a:p>
+            <a:pPr algn="l" marL="342900" indent="-342900">
+              <a:lnSpc>
+                <a:spcPts val="2240"/>
+              </a:lnSpc>
+              <a:buSzPct val="100000"/>
+              <a:buChar char="•"/>
+            </a:pPr>
+            <a:r>
+              <a:rPr lang="en-US" sz="1600" dirty="0">
+                <a:solidFill>
+                  <a:srgbClr val="5C6B7E"/>
+                </a:solidFill>
+                <a:latin typeface="Inter" pitchFamily="34" charset="0"/>
+                <a:ea typeface="Inter" pitchFamily="34" charset="-122"/>
+                <a:cs typeface="Inter" pitchFamily="34" charset="-120"/>
+              </a:rPr>
+              <a:t>Long soak and fuzz runs</a:t>
+            </a:r>
+            <a:endParaRPr lang="en-US" sz="1600" dirty="0"/>
+          </a:p>
+        </p:txBody>
+      </p:sp>
+      <p:sp>
+        <p:nvSpPr>
+          <p:cNvPr id="19" name="Text 17"/>
+          <p:cNvSpPr/>
+          <p:nvPr/>
+        </p:nvSpPr>
+        <p:spPr>
+          <a:xfrm>
+            <a:off x="677098" y="4831556"/>
+            <a:ext cx="10834756" cy="1044575"/>
+          </a:xfrm>
+          <a:prstGeom prst="roundRect">
+            <a:avLst>
+              <a:gd name="adj" fmla="val 9725"/>
+            </a:avLst>
+          </a:prstGeom>
+          <a:solidFill>
+            <a:srgbClr val="EBF0F6"/>
+          </a:solidFill>
+          <a:ln/>
+        </p:spPr>
+        <p:txBody>
+          <a:bodyPr wrap="square" rtlCol="0" anchor="ctr"/>
+          <a:lstStyle/>
+          <a:p>
+            <a:pPr indent="0" marL="0">
+              <a:buNone/>
+            </a:pPr>
+            <a:endParaRPr lang="en-US" dirty="0"/>
+          </a:p>
+        </p:txBody>
+      </p:sp>
+      <p:sp>
+        <p:nvSpPr>
+          <p:cNvPr id="20" name="Text 18"/>
+          <p:cNvSpPr/>
+          <p:nvPr/>
+        </p:nvSpPr>
+        <p:spPr>
+          <a:xfrm>
+            <a:off x="947897" y="5034756"/>
+            <a:ext cx="50787" cy="638175"/>
+          </a:xfrm>
+          <a:prstGeom prst="roundRect">
+            <a:avLst>
+              <a:gd name="adj" fmla="val 50007"/>
+            </a:avLst>
+          </a:prstGeom>
+          <a:solidFill>
+            <a:srgbClr val="5A55E0"/>
+          </a:solidFill>
+          <a:ln/>
+        </p:spPr>
+        <p:txBody>
+          <a:bodyPr wrap="square" rtlCol="0" anchor="ctr"/>
+          <a:lstStyle/>
+          <a:p>
+            <a:pPr indent="0" marL="0">
+              <a:buNone/>
+            </a:pPr>
+            <a:endParaRPr lang="en-US" dirty="0"/>
+          </a:p>
+        </p:txBody>
+      </p:sp>
+      <p:sp>
+        <p:nvSpPr>
+          <p:cNvPr id="21" name="Text 19"/>
+          <p:cNvSpPr/>
+          <p:nvPr/>
+        </p:nvSpPr>
+        <p:spPr>
+          <a:xfrm>
+            <a:off x="1235560" y="5034756"/>
+            <a:ext cx="10205605" cy="638175"/>
+          </a:xfrm>
+          <a:prstGeom prst="rect">
+            <a:avLst/>
+          </a:prstGeom>
+          <a:noFill/>
+          <a:ln/>
+        </p:spPr>
+        <p:txBody>
+          <a:bodyPr wrap="square" lIns="0" tIns="0" rIns="0" bIns="0" rtlCol="0" anchor="t"/>
+          <a:lstStyle/>
+          <a:p>
+            <a:pPr algn="l" indent="0" marL="0">
+              <a:lnSpc>
+                <a:spcPts val="2513"/>
+              </a:lnSpc>
+              <a:buNone/>
+            </a:pPr>
+            <a:r>
+              <a:rPr lang="en-US" sz="1733" dirty="0">
+                <a:solidFill>
+                  <a:srgbClr val="0A2540"/>
+                </a:solidFill>
+                <a:latin typeface="Inter" pitchFamily="34" charset="0"/>
+                <a:ea typeface="Inter" pitchFamily="34" charset="-122"/>
+                <a:cs typeface="Inter" pitchFamily="34" charset="-120"/>
+              </a:rPr>
+              <a:t>The test: ask what a failure here would mean. If the answer is not “do not merge this commit”, it is not a CI stage.</a:t>
+            </a:r>
+            <a:endParaRPr lang="en-US" sz="1733" dirty="0"/>
+          </a:p>
+        </p:txBody>
+      </p:sp>
+      <p:sp>
+        <p:nvSpPr>
+          <p:cNvPr id="22" name="Text 20"/>
+          <p:cNvSpPr/>
+          <p:nvPr/>
+        </p:nvSpPr>
+        <p:spPr>
+          <a:xfrm>
+            <a:off x="5977626" y="6113066"/>
+            <a:ext cx="5644913" cy="236934"/>
+          </a:xfrm>
+          <a:prstGeom prst="rect">
+            <a:avLst/>
+          </a:prstGeom>
+          <a:noFill/>
+          <a:ln/>
+        </p:spPr>
+        <p:txBody>
+          <a:bodyPr wrap="square" lIns="0" tIns="0" rIns="0" bIns="0" rtlCol="0" anchor="t"/>
+          <a:lstStyle/>
+          <a:p>
+            <a:pPr algn="l" indent="0" marL="0">
+              <a:lnSpc>
+                <a:spcPts val="1866"/>
+              </a:lnSpc>
+              <a:buNone/>
+            </a:pPr>
+            <a:r>
+              <a:rPr lang="en-US" sz="1333" dirty="0">
+                <a:solidFill>
+                  <a:srgbClr val="5C6B7E"/>
+                </a:solidFill>
+                <a:latin typeface="Inter" pitchFamily="34" charset="0"/>
+                <a:ea typeface="Inter" pitchFamily="34" charset="-122"/>
+                <a:cs typeface="Inter" pitchFamily="34" charset="-120"/>
+              </a:rPr>
+              <a:t>CI PIPELINE · SHEET 03 / 06 · NO CHART, NO EXTERNAL DATA</a:t>
+            </a:r>
+            <a:endParaRPr lang="en-US" sz="1333" dirty="0"/>
+          </a:p>
+        </p:txBody>
+      </p:sp>
     </p:spTree>
   </p:cSld>
   <p:clrMapOvr>
@@ -1446,6 +3468,13 @@
 <file path=ppt/slides/slide4.xml><?xml version="1.0" encoding="utf-8"?>
 <p:sld xmlns:a="http://schemas.openxmlformats.org/drawingml/2006/main" xmlns:r="http://schemas.openxmlformats.org/officeDocument/2006/relationships" xmlns:p="http://schemas.openxmlformats.org/presentationml/2006/main">
   <p:cSld name="Slide 4">
+    <p:bg>
+      <p:bgPr>
+        <a:solidFill>
+          <a:srgbClr val="FFFFFF"/>
+        </a:solidFill>
+      </p:bgPr>
+    </p:bg>
     <p:spTree>
       <p:nvGrpSpPr>
         <p:cNvPr id="1" name=""/>
@@ -1460,30 +3489,685 @@
           <a:chExt cx="0" cy="0"/>
         </a:xfrm>
       </p:grpSpPr>
-      <p:pic>
-        <p:nvPicPr>
-          <p:cNvPr id="2" name="Image 0" descr="/tmp/slide-1787840600080-0ft4qemic6h6.png">    </p:cNvPr>
-          <p:cNvPicPr>
-            <a:picLocks noChangeAspect="1"/>
-          </p:cNvPicPr>
-          <p:nvPr/>
-        </p:nvPicPr>
-        <p:blipFill>
-          <a:blip r:embed="rId1"/>
-          <a:stretch>
-            <a:fillRect/>
-          </a:stretch>
-        </p:blipFill>
-        <p:spPr>
-          <a:xfrm>
-            <a:off x="0" y="0"/>
-            <a:ext cx="12188952" cy="6858000"/>
-          </a:xfrm>
-          <a:prstGeom prst="rect">
-            <a:avLst/>
-          </a:prstGeom>
-        </p:spPr>
-      </p:pic>
+      <p:sp>
+        <p:nvSpPr>
+          <p:cNvPr id="2" name="Text 0"/>
+          <p:cNvSpPr/>
+          <p:nvPr/>
+        </p:nvSpPr>
+        <p:spPr>
+          <a:xfrm>
+            <a:off x="677098" y="541734"/>
+            <a:ext cx="11051451" cy="236934"/>
+          </a:xfrm>
+          <a:prstGeom prst="rect">
+            <a:avLst/>
+          </a:prstGeom>
+          <a:noFill/>
+          <a:ln/>
+        </p:spPr>
+        <p:txBody>
+          <a:bodyPr wrap="square" lIns="0" tIns="0" rIns="0" bIns="0" rtlCol="0" anchor="t"/>
+          <a:lstStyle/>
+          <a:p>
+            <a:pPr algn="l" indent="0" marL="0">
+              <a:lnSpc>
+                <a:spcPts val="1866"/>
+              </a:lnSpc>
+              <a:buNone/>
+            </a:pPr>
+            <a:r>
+              <a:rPr lang="en-US" sz="1333" b="1" dirty="0">
+                <a:solidFill>
+                  <a:srgbClr val="5C6B7E"/>
+                </a:solidFill>
+                <a:latin typeface="Inter" pitchFamily="34" charset="0"/>
+                <a:ea typeface="Inter" pitchFamily="34" charset="-122"/>
+                <a:cs typeface="Inter" pitchFamily="34" charset="-120"/>
+              </a:rPr>
+              <a:t>POLICY</a:t>
+            </a:r>
+            <a:endParaRPr lang="en-US" sz="1333" dirty="0"/>
+          </a:p>
+        </p:txBody>
+      </p:sp>
+      <p:sp>
+        <p:nvSpPr>
+          <p:cNvPr id="3" name="Text 1"/>
+          <p:cNvSpPr/>
+          <p:nvPr/>
+        </p:nvSpPr>
+        <p:spPr>
+          <a:xfrm>
+            <a:off x="677098" y="863203"/>
+            <a:ext cx="9669767" cy="487561"/>
+          </a:xfrm>
+          <a:prstGeom prst="rect">
+            <a:avLst/>
+          </a:prstGeom>
+          <a:noFill/>
+          <a:ln/>
+        </p:spPr>
+        <p:txBody>
+          <a:bodyPr wrap="square" lIns="0" tIns="0" rIns="0" bIns="0" rtlCol="0" anchor="t"/>
+          <a:lstStyle/>
+          <a:p>
+            <a:pPr algn="l" indent="0" marL="0">
+              <a:lnSpc>
+                <a:spcPts val="3840"/>
+              </a:lnSpc>
+              <a:spcBef>
+                <a:spcPts val="667"/>
+              </a:spcBef>
+              <a:buNone/>
+            </a:pPr>
+            <a:r>
+              <a:rPr lang="en-US" sz="3200" b="1" dirty="0">
+                <a:solidFill>
+                  <a:srgbClr val="0A2540"/>
+                </a:solidFill>
+                <a:latin typeface="Inter" pitchFamily="34" charset="0"/>
+                <a:ea typeface="Inter" pitchFamily="34" charset="-122"/>
+                <a:cs typeface="Inter" pitchFamily="34" charset="-120"/>
+              </a:rPr>
+              <a:t>Two policies that keep the signal honest</a:t>
+            </a:r>
+            <a:endParaRPr lang="en-US" sz="3200" dirty="0"/>
+          </a:p>
+        </p:txBody>
+      </p:sp>
+      <p:sp>
+        <p:nvSpPr>
+          <p:cNvPr id="4" name="Text 2"/>
+          <p:cNvSpPr/>
+          <p:nvPr/>
+        </p:nvSpPr>
+        <p:spPr>
+          <a:xfrm>
+            <a:off x="677098" y="1621631"/>
+            <a:ext cx="4728972" cy="4254500"/>
+          </a:xfrm>
+          <a:prstGeom prst="roundRect">
+            <a:avLst>
+              <a:gd name="adj" fmla="val 2388"/>
+            </a:avLst>
+          </a:prstGeom>
+          <a:solidFill>
+            <a:srgbClr val="F6F9FC"/>
+          </a:solidFill>
+          <a:ln/>
+        </p:spPr>
+        <p:txBody>
+          <a:bodyPr wrap="square" rtlCol="0" anchor="ctr"/>
+          <a:lstStyle/>
+          <a:p>
+            <a:pPr indent="0" marL="0">
+              <a:buNone/>
+            </a:pPr>
+            <a:endParaRPr lang="en-US" dirty="0"/>
+          </a:p>
+        </p:txBody>
+      </p:sp>
+      <p:sp>
+        <p:nvSpPr>
+          <p:cNvPr id="5" name="Text 3"/>
+          <p:cNvSpPr/>
+          <p:nvPr/>
+        </p:nvSpPr>
+        <p:spPr>
+          <a:xfrm>
+            <a:off x="981822" y="2828131"/>
+            <a:ext cx="4201915" cy="236934"/>
+          </a:xfrm>
+          <a:prstGeom prst="rect">
+            <a:avLst/>
+          </a:prstGeom>
+          <a:noFill/>
+          <a:ln/>
+        </p:spPr>
+        <p:txBody>
+          <a:bodyPr wrap="square" lIns="0" tIns="0" rIns="0" bIns="0" rtlCol="0" anchor="t"/>
+          <a:lstStyle/>
+          <a:p>
+            <a:pPr algn="l" indent="0" marL="0">
+              <a:lnSpc>
+                <a:spcPts val="1866"/>
+              </a:lnSpc>
+              <a:buNone/>
+            </a:pPr>
+            <a:r>
+              <a:rPr lang="en-US" sz="1333" b="1" dirty="0">
+                <a:solidFill>
+                  <a:srgbClr val="5C6B7E"/>
+                </a:solidFill>
+                <a:latin typeface="Inter" pitchFamily="34" charset="0"/>
+                <a:ea typeface="Inter" pitchFamily="34" charset="-122"/>
+                <a:cs typeface="Inter" pitchFamily="34" charset="-120"/>
+              </a:rPr>
+              <a:t>WHY BOTH EXIST</a:t>
+            </a:r>
+            <a:endParaRPr lang="en-US" sz="1333" dirty="0"/>
+          </a:p>
+        </p:txBody>
+      </p:sp>
+      <p:sp>
+        <p:nvSpPr>
+          <p:cNvPr id="6" name="Text 4"/>
+          <p:cNvSpPr/>
+          <p:nvPr/>
+        </p:nvSpPr>
+        <p:spPr>
+          <a:xfrm>
+            <a:off x="981822" y="3200400"/>
+            <a:ext cx="4201915" cy="731044"/>
+          </a:xfrm>
+          <a:prstGeom prst="rect">
+            <a:avLst/>
+          </a:prstGeom>
+          <a:noFill/>
+          <a:ln/>
+        </p:spPr>
+        <p:txBody>
+          <a:bodyPr wrap="square" lIns="0" tIns="0" rIns="0" bIns="0" rtlCol="0" anchor="t"/>
+          <a:lstStyle/>
+          <a:p>
+            <a:pPr algn="l" indent="0" marL="0">
+              <a:lnSpc>
+                <a:spcPts val="2880"/>
+              </a:lnSpc>
+              <a:spcBef>
+                <a:spcPts val="1067"/>
+              </a:spcBef>
+              <a:buNone/>
+            </a:pPr>
+            <a:r>
+              <a:rPr lang="en-US" sz="2133" b="1" dirty="0">
+                <a:solidFill>
+                  <a:srgbClr val="0A2540"/>
+                </a:solidFill>
+                <a:latin typeface="Inter" pitchFamily="34" charset="0"/>
+                <a:ea typeface="Inter" pitchFamily="34" charset="-122"/>
+                <a:cs typeface="Inter" pitchFamily="34" charset="-120"/>
+              </a:rPr>
+              <a:t>The gate’s only asset is that a red build means something.</a:t>
+            </a:r>
+            <a:endParaRPr lang="en-US" sz="2133" dirty="0"/>
+          </a:p>
+        </p:txBody>
+      </p:sp>
+      <p:sp>
+        <p:nvSpPr>
+          <p:cNvPr id="7" name="Text 5"/>
+          <p:cNvSpPr/>
+          <p:nvPr/>
+        </p:nvSpPr>
+        <p:spPr>
+          <a:xfrm>
+            <a:off x="981822" y="4100711"/>
+            <a:ext cx="4201915" cy="568722"/>
+          </a:xfrm>
+          <a:prstGeom prst="rect">
+            <a:avLst/>
+          </a:prstGeom>
+          <a:noFill/>
+          <a:ln/>
+        </p:spPr>
+        <p:txBody>
+          <a:bodyPr wrap="square" lIns="0" tIns="0" rIns="0" bIns="0" rtlCol="0" anchor="t"/>
+          <a:lstStyle/>
+          <a:p>
+            <a:pPr algn="l" indent="0" marL="0">
+              <a:lnSpc>
+                <a:spcPts val="2240"/>
+              </a:lnSpc>
+              <a:spcBef>
+                <a:spcPts val="1333"/>
+              </a:spcBef>
+              <a:buNone/>
+            </a:pPr>
+            <a:r>
+              <a:rPr lang="en-US" sz="1600" dirty="0">
+                <a:solidFill>
+                  <a:srgbClr val="5C6B7E"/>
+                </a:solidFill>
+                <a:latin typeface="Inter" pitchFamily="34" charset="0"/>
+                <a:ea typeface="Inter" pitchFamily="34" charset="-122"/>
+                <a:cs typeface="Inter" pitchFamily="34" charset="-120"/>
+              </a:rPr>
+              <a:t>Both policies protect that one asset. Neither of them is really about the test.</a:t>
+            </a:r>
+            <a:endParaRPr lang="en-US" sz="1600" dirty="0"/>
+          </a:p>
+        </p:txBody>
+      </p:sp>
+      <p:sp>
+        <p:nvSpPr>
+          <p:cNvPr id="8" name="Text 6"/>
+          <p:cNvSpPr/>
+          <p:nvPr/>
+        </p:nvSpPr>
+        <p:spPr>
+          <a:xfrm>
+            <a:off x="5744520" y="1621631"/>
+            <a:ext cx="5767334" cy="1991916"/>
+          </a:xfrm>
+          <a:prstGeom prst="roundRect">
+            <a:avLst>
+              <a:gd name="adj" fmla="val 5100"/>
+            </a:avLst>
+          </a:prstGeom>
+          <a:solidFill>
+            <a:srgbClr val="F6F9FC"/>
+          </a:solidFill>
+          <a:ln/>
+        </p:spPr>
+        <p:txBody>
+          <a:bodyPr wrap="square" rtlCol="0" anchor="ctr"/>
+          <a:lstStyle/>
+          <a:p>
+            <a:pPr indent="0" marL="0">
+              <a:buNone/>
+            </a:pPr>
+            <a:endParaRPr lang="en-US" dirty="0"/>
+          </a:p>
+        </p:txBody>
+      </p:sp>
+      <p:sp>
+        <p:nvSpPr>
+          <p:cNvPr id="9" name="Text 7"/>
+          <p:cNvSpPr/>
+          <p:nvPr/>
+        </p:nvSpPr>
+        <p:spPr>
+          <a:xfrm>
+            <a:off x="5998456" y="1841698"/>
+            <a:ext cx="338450" cy="338534"/>
+          </a:xfrm>
+          <a:prstGeom prst="roundRect">
+            <a:avLst>
+              <a:gd name="adj" fmla="val 50026"/>
+            </a:avLst>
+          </a:prstGeom>
+          <a:solidFill>
+            <a:srgbClr val="5A55E0"/>
+          </a:solidFill>
+          <a:ln/>
+        </p:spPr>
+        <p:txBody>
+          <a:bodyPr wrap="square" rtlCol="0" anchor="ctr"/>
+          <a:lstStyle/>
+          <a:p>
+            <a:pPr indent="0" marL="0">
+              <a:buNone/>
+            </a:pPr>
+            <a:endParaRPr lang="en-US" dirty="0"/>
+          </a:p>
+        </p:txBody>
+      </p:sp>
+      <p:sp>
+        <p:nvSpPr>
+          <p:cNvPr id="10" name="Text 8"/>
+          <p:cNvSpPr/>
+          <p:nvPr/>
+        </p:nvSpPr>
+        <p:spPr>
+          <a:xfrm>
+            <a:off x="6072455" y="1892498"/>
+            <a:ext cx="194261" cy="236934"/>
+          </a:xfrm>
+          <a:prstGeom prst="rect">
+            <a:avLst/>
+          </a:prstGeom>
+          <a:noFill/>
+          <a:ln/>
+        </p:spPr>
+        <p:txBody>
+          <a:bodyPr wrap="square" lIns="0" tIns="0" rIns="0" bIns="0" rtlCol="0" anchor="t"/>
+          <a:lstStyle/>
+          <a:p>
+            <a:pPr algn="l" indent="0" marL="0">
+              <a:lnSpc>
+                <a:spcPts val="1866"/>
+              </a:lnSpc>
+              <a:buNone/>
+            </a:pPr>
+            <a:r>
+              <a:rPr lang="en-US" sz="1333" b="1" dirty="0">
+                <a:solidFill>
+                  <a:srgbClr val="FFFFFF"/>
+                </a:solidFill>
+                <a:latin typeface="Inter" pitchFamily="34" charset="0"/>
+                <a:ea typeface="Inter" pitchFamily="34" charset="-122"/>
+                <a:cs typeface="Inter" pitchFamily="34" charset="-120"/>
+              </a:rPr>
+              <a:t>01</a:t>
+            </a:r>
+            <a:endParaRPr lang="en-US" sz="1333" dirty="0"/>
+          </a:p>
+        </p:txBody>
+      </p:sp>
+      <p:sp>
+        <p:nvSpPr>
+          <p:cNvPr id="11" name="Text 9"/>
+          <p:cNvSpPr/>
+          <p:nvPr/>
+        </p:nvSpPr>
+        <p:spPr>
+          <a:xfrm>
+            <a:off x="6540055" y="1841698"/>
+            <a:ext cx="4812220" cy="297061"/>
+          </a:xfrm>
+          <a:prstGeom prst="rect">
+            <a:avLst/>
+          </a:prstGeom>
+          <a:noFill/>
+          <a:ln/>
+        </p:spPr>
+        <p:txBody>
+          <a:bodyPr wrap="square" lIns="0" tIns="0" rIns="0" bIns="0" rtlCol="0" anchor="t"/>
+          <a:lstStyle/>
+          <a:p>
+            <a:pPr algn="l" indent="0" marL="0">
+              <a:lnSpc>
+                <a:spcPts val="2340"/>
+              </a:lnSpc>
+              <a:buNone/>
+            </a:pPr>
+            <a:r>
+              <a:rPr lang="en-US" sz="1733" b="1" dirty="0">
+                <a:solidFill>
+                  <a:srgbClr val="0A2540"/>
+                </a:solidFill>
+                <a:latin typeface="Inter" pitchFamily="34" charset="0"/>
+                <a:ea typeface="Inter" pitchFamily="34" charset="-122"/>
+                <a:cs typeface="Inter" pitchFamily="34" charset="-120"/>
+              </a:rPr>
+              <a:t>A flaky test is a broken test.</a:t>
+            </a:r>
+            <a:endParaRPr lang="en-US" sz="1733" dirty="0"/>
+          </a:p>
+        </p:txBody>
+      </p:sp>
+      <p:sp>
+        <p:nvSpPr>
+          <p:cNvPr id="12" name="Text 10"/>
+          <p:cNvSpPr/>
+          <p:nvPr/>
+        </p:nvSpPr>
+        <p:spPr>
+          <a:xfrm>
+            <a:off x="6540055" y="2240359"/>
+            <a:ext cx="4812220" cy="1137444"/>
+          </a:xfrm>
+          <a:prstGeom prst="rect">
+            <a:avLst/>
+          </a:prstGeom>
+          <a:noFill/>
+          <a:ln/>
+        </p:spPr>
+        <p:txBody>
+          <a:bodyPr wrap="square" lIns="0" tIns="0" rIns="0" bIns="0" rtlCol="0" anchor="t"/>
+          <a:lstStyle/>
+          <a:p>
+            <a:pPr algn="l" indent="0" marL="0">
+              <a:lnSpc>
+                <a:spcPts val="2240"/>
+              </a:lnSpc>
+              <a:spcBef>
+                <a:spcPts val="800"/>
+              </a:spcBef>
+              <a:buNone/>
+            </a:pPr>
+            <a:r>
+              <a:rPr lang="en-US" sz="1600" dirty="0">
+                <a:solidFill>
+                  <a:srgbClr val="5C6B7E"/>
+                </a:solidFill>
+                <a:latin typeface="Inter" pitchFamily="34" charset="0"/>
+                <a:ea typeface="Inter" pitchFamily="34" charset="-122"/>
+                <a:cs typeface="Inter" pitchFamily="34" charset="-120"/>
+              </a:rPr>
+              <a:t>A test that fails without a cause teaches the team to read failures as noise. Quarantine it the day it flakes, then fix it or delete it — a retry is not a fix.</a:t>
+            </a:r>
+            <a:endParaRPr lang="en-US" sz="1600" dirty="0"/>
+          </a:p>
+        </p:txBody>
+      </p:sp>
+      <p:sp>
+        <p:nvSpPr>
+          <p:cNvPr id="13" name="Text 11"/>
+          <p:cNvSpPr/>
+          <p:nvPr/>
+        </p:nvSpPr>
+        <p:spPr>
+          <a:xfrm>
+            <a:off x="5744520" y="3884414"/>
+            <a:ext cx="5767334" cy="1991916"/>
+          </a:xfrm>
+          <a:prstGeom prst="roundRect">
+            <a:avLst>
+              <a:gd name="adj" fmla="val 5100"/>
+            </a:avLst>
+          </a:prstGeom>
+          <a:solidFill>
+            <a:srgbClr val="F6F9FC"/>
+          </a:solidFill>
+          <a:ln/>
+        </p:spPr>
+        <p:txBody>
+          <a:bodyPr wrap="square" rtlCol="0" anchor="ctr"/>
+          <a:lstStyle/>
+          <a:p>
+            <a:pPr indent="0" marL="0">
+              <a:buNone/>
+            </a:pPr>
+            <a:endParaRPr lang="en-US" dirty="0"/>
+          </a:p>
+        </p:txBody>
+      </p:sp>
+      <p:sp>
+        <p:nvSpPr>
+          <p:cNvPr id="14" name="Text 12"/>
+          <p:cNvSpPr/>
+          <p:nvPr/>
+        </p:nvSpPr>
+        <p:spPr>
+          <a:xfrm>
+            <a:off x="5998456" y="4104481"/>
+            <a:ext cx="338450" cy="338534"/>
+          </a:xfrm>
+          <a:prstGeom prst="roundRect">
+            <a:avLst>
+              <a:gd name="adj" fmla="val 50026"/>
+            </a:avLst>
+          </a:prstGeom>
+          <a:solidFill>
+            <a:srgbClr val="5A55E0"/>
+          </a:solidFill>
+          <a:ln/>
+        </p:spPr>
+        <p:txBody>
+          <a:bodyPr wrap="square" rtlCol="0" anchor="ctr"/>
+          <a:lstStyle/>
+          <a:p>
+            <a:pPr indent="0" marL="0">
+              <a:buNone/>
+            </a:pPr>
+            <a:endParaRPr lang="en-US" dirty="0"/>
+          </a:p>
+        </p:txBody>
+      </p:sp>
+      <p:sp>
+        <p:nvSpPr>
+          <p:cNvPr id="15" name="Text 13"/>
+          <p:cNvSpPr/>
+          <p:nvPr/>
+        </p:nvSpPr>
+        <p:spPr>
+          <a:xfrm>
+            <a:off x="6059758" y="4155281"/>
+            <a:ext cx="220163" cy="236934"/>
+          </a:xfrm>
+          <a:prstGeom prst="rect">
+            <a:avLst/>
+          </a:prstGeom>
+          <a:noFill/>
+          <a:ln/>
+        </p:spPr>
+        <p:txBody>
+          <a:bodyPr wrap="square" lIns="0" tIns="0" rIns="0" bIns="0" rtlCol="0" anchor="t"/>
+          <a:lstStyle/>
+          <a:p>
+            <a:pPr algn="l" indent="0" marL="0">
+              <a:lnSpc>
+                <a:spcPts val="1866"/>
+              </a:lnSpc>
+              <a:buNone/>
+            </a:pPr>
+            <a:r>
+              <a:rPr lang="en-US" sz="1333" b="1" dirty="0">
+                <a:solidFill>
+                  <a:srgbClr val="FFFFFF"/>
+                </a:solidFill>
+                <a:latin typeface="Inter" pitchFamily="34" charset="0"/>
+                <a:ea typeface="Inter" pitchFamily="34" charset="-122"/>
+                <a:cs typeface="Inter" pitchFamily="34" charset="-120"/>
+              </a:rPr>
+              <a:t>02</a:t>
+            </a:r>
+            <a:endParaRPr lang="en-US" sz="1333" dirty="0"/>
+          </a:p>
+        </p:txBody>
+      </p:sp>
+      <p:sp>
+        <p:nvSpPr>
+          <p:cNvPr id="16" name="Text 14"/>
+          <p:cNvSpPr/>
+          <p:nvPr/>
+        </p:nvSpPr>
+        <p:spPr>
+          <a:xfrm>
+            <a:off x="6540055" y="4104481"/>
+            <a:ext cx="4812220" cy="297061"/>
+          </a:xfrm>
+          <a:prstGeom prst="rect">
+            <a:avLst/>
+          </a:prstGeom>
+          <a:noFill/>
+          <a:ln/>
+        </p:spPr>
+        <p:txBody>
+          <a:bodyPr wrap="square" lIns="0" tIns="0" rIns="0" bIns="0" rtlCol="0" anchor="t"/>
+          <a:lstStyle/>
+          <a:p>
+            <a:pPr algn="l" indent="0" marL="0">
+              <a:lnSpc>
+                <a:spcPts val="2340"/>
+              </a:lnSpc>
+              <a:buNone/>
+            </a:pPr>
+            <a:r>
+              <a:rPr lang="en-US" sz="1733" b="1" dirty="0">
+                <a:solidFill>
+                  <a:srgbClr val="0A2540"/>
+                </a:solidFill>
+                <a:latin typeface="Inter" pitchFamily="34" charset="0"/>
+                <a:ea typeface="Inter" pitchFamily="34" charset="-122"/>
+                <a:cs typeface="Inter" pitchFamily="34" charset="-120"/>
+              </a:rPr>
+              <a:t>A pipeline nobody trusts gets bypassed.</a:t>
+            </a:r>
+            <a:endParaRPr lang="en-US" sz="1733" dirty="0"/>
+          </a:p>
+        </p:txBody>
+      </p:sp>
+      <p:sp>
+        <p:nvSpPr>
+          <p:cNvPr id="17" name="Text 15"/>
+          <p:cNvSpPr/>
+          <p:nvPr/>
+        </p:nvSpPr>
+        <p:spPr>
+          <a:xfrm>
+            <a:off x="6540055" y="4503142"/>
+            <a:ext cx="4812220" cy="1137444"/>
+          </a:xfrm>
+          <a:prstGeom prst="rect">
+            <a:avLst/>
+          </a:prstGeom>
+          <a:noFill/>
+          <a:ln/>
+        </p:spPr>
+        <p:txBody>
+          <a:bodyPr wrap="square" lIns="0" tIns="0" rIns="0" bIns="0" rtlCol="0" anchor="t"/>
+          <a:lstStyle/>
+          <a:p>
+            <a:pPr algn="l" indent="0" marL="0">
+              <a:lnSpc>
+                <a:spcPts val="2240"/>
+              </a:lnSpc>
+              <a:spcBef>
+                <a:spcPts val="800"/>
+              </a:spcBef>
+              <a:buNone/>
+            </a:pPr>
+            <a:r>
+              <a:rPr lang="en-US" sz="1600" dirty="0">
+                <a:solidFill>
+                  <a:srgbClr val="5C6B7E"/>
+                </a:solidFill>
+                <a:latin typeface="Inter" pitchFamily="34" charset="0"/>
+                <a:ea typeface="Inter" pitchFamily="34" charset="-122"/>
+                <a:cs typeface="Inter" pitchFamily="34" charset="-120"/>
+              </a:rPr>
+              <a:t>Not by rebellion — by batching commits, merging on “probably green”, and handing out overrides. The gate holds only what people will actually wait for.</a:t>
+            </a:r>
+            <a:endParaRPr lang="en-US" sz="1600" dirty="0"/>
+          </a:p>
+        </p:txBody>
+      </p:sp>
+      <p:sp>
+        <p:nvSpPr>
+          <p:cNvPr id="18" name="Text 16"/>
+          <p:cNvSpPr/>
+          <p:nvPr/>
+        </p:nvSpPr>
+        <p:spPr>
+          <a:xfrm>
+            <a:off x="5964929" y="6113066"/>
+            <a:ext cx="5657864" cy="236934"/>
+          </a:xfrm>
+          <a:prstGeom prst="rect">
+            <a:avLst/>
+          </a:prstGeom>
+          <a:noFill/>
+          <a:ln/>
+        </p:spPr>
+        <p:txBody>
+          <a:bodyPr wrap="square" lIns="0" tIns="0" rIns="0" bIns="0" rtlCol="0" anchor="t"/>
+          <a:lstStyle/>
+          <a:p>
+            <a:pPr algn="l" indent="0" marL="0">
+              <a:lnSpc>
+                <a:spcPts val="1866"/>
+              </a:lnSpc>
+              <a:buNone/>
+            </a:pPr>
+            <a:r>
+              <a:rPr lang="en-US" sz="1333" dirty="0">
+                <a:solidFill>
+                  <a:srgbClr val="5C6B7E"/>
+                </a:solidFill>
+                <a:latin typeface="Inter" pitchFamily="34" charset="0"/>
+                <a:ea typeface="Inter" pitchFamily="34" charset="-122"/>
+                <a:cs typeface="Inter" pitchFamily="34" charset="-120"/>
+              </a:rPr>
+              <a:t>CI PIPELINE · SHEET 04 / 06 · NO CHART, NO EXTERNAL DATA</a:t>
+            </a:r>
+            <a:endParaRPr lang="en-US" sz="1333" dirty="0"/>
+          </a:p>
+        </p:txBody>
+      </p:sp>
     </p:spTree>
   </p:cSld>
   <p:clrMapOvr>
@@ -1495,6 +4179,13 @@
 <file path=ppt/slides/slide5.xml><?xml version="1.0" encoding="utf-8"?>
 <p:sld xmlns:a="http://schemas.openxmlformats.org/drawingml/2006/main" xmlns:r="http://schemas.openxmlformats.org/officeDocument/2006/relationships" xmlns:p="http://schemas.openxmlformats.org/presentationml/2006/main">
   <p:cSld name="Slide 5">
+    <p:bg>
+      <p:bgPr>
+        <a:solidFill>
+          <a:srgbClr val="FFFFFF"/>
+        </a:solidFill>
+      </p:bgPr>
+    </p:bg>
     <p:spTree>
       <p:nvGrpSpPr>
         <p:cNvPr id="1" name=""/>
@@ -1509,30 +4200,1145 @@
           <a:chExt cx="0" cy="0"/>
         </a:xfrm>
       </p:grpSpPr>
+      <p:sp>
+        <p:nvSpPr>
+          <p:cNvPr id="2" name="Text 0"/>
+          <p:cNvSpPr/>
+          <p:nvPr/>
+        </p:nvSpPr>
+        <p:spPr>
+          <a:xfrm>
+            <a:off x="677098" y="541734"/>
+            <a:ext cx="11051451" cy="236934"/>
+          </a:xfrm>
+          <a:prstGeom prst="rect">
+            <a:avLst/>
+          </a:prstGeom>
+          <a:noFill/>
+          <a:ln/>
+        </p:spPr>
+        <p:txBody>
+          <a:bodyPr wrap="square" lIns="0" tIns="0" rIns="0" bIns="0" rtlCol="0" anchor="t"/>
+          <a:lstStyle/>
+          <a:p>
+            <a:pPr algn="l" indent="0" marL="0">
+              <a:lnSpc>
+                <a:spcPts val="1866"/>
+              </a:lnSpc>
+              <a:buNone/>
+            </a:pPr>
+            <a:r>
+              <a:rPr lang="en-US" sz="1333" b="1" dirty="0">
+                <a:solidFill>
+                  <a:srgbClr val="5C6B7E"/>
+                </a:solidFill>
+                <a:latin typeface="Inter" pitchFamily="34" charset="0"/>
+                <a:ea typeface="Inter" pitchFamily="34" charset="-122"/>
+                <a:cs typeface="Inter" pitchFamily="34" charset="-120"/>
+              </a:rPr>
+              <a:t>WHEN IT IS ALREADY SLOW</a:t>
+            </a:r>
+            <a:endParaRPr lang="en-US" sz="1333" dirty="0"/>
+          </a:p>
+        </p:txBody>
+      </p:sp>
+      <p:sp>
+        <p:nvSpPr>
+          <p:cNvPr id="3" name="Text 1"/>
+          <p:cNvSpPr/>
+          <p:nvPr/>
+        </p:nvSpPr>
+        <p:spPr>
+          <a:xfrm>
+            <a:off x="677098" y="863203"/>
+            <a:ext cx="9669767" cy="487561"/>
+          </a:xfrm>
+          <a:prstGeom prst="rect">
+            <a:avLst/>
+          </a:prstGeom>
+          <a:noFill/>
+          <a:ln/>
+        </p:spPr>
+        <p:txBody>
+          <a:bodyPr wrap="square" lIns="0" tIns="0" rIns="0" bIns="0" rtlCol="0" anchor="t"/>
+          <a:lstStyle/>
+          <a:p>
+            <a:pPr algn="l" indent="0" marL="0">
+              <a:lnSpc>
+                <a:spcPts val="3840"/>
+              </a:lnSpc>
+              <a:spcBef>
+                <a:spcPts val="667"/>
+              </a:spcBef>
+              <a:buNone/>
+            </a:pPr>
+            <a:r>
+              <a:rPr lang="en-US" sz="3200" b="1" dirty="0">
+                <a:solidFill>
+                  <a:srgbClr val="0A2540"/>
+                </a:solidFill>
+                <a:latin typeface="Inter" pitchFamily="34" charset="0"/>
+                <a:ea typeface="Inter" pitchFamily="34" charset="-122"/>
+                <a:cs typeface="Inter" pitchFamily="34" charset="-120"/>
+              </a:rPr>
+              <a:t>When the pipeline is already slow</a:t>
+            </a:r>
+            <a:endParaRPr lang="en-US" sz="3200" dirty="0"/>
+          </a:p>
+        </p:txBody>
+      </p:sp>
+      <p:sp>
+        <p:nvSpPr>
+          <p:cNvPr id="4" name="Text 2"/>
+          <p:cNvSpPr/>
+          <p:nvPr/>
+        </p:nvSpPr>
+        <p:spPr>
+          <a:xfrm>
+            <a:off x="677098" y="1621631"/>
+            <a:ext cx="11051451" cy="343694"/>
+          </a:xfrm>
+          <a:prstGeom prst="rect">
+            <a:avLst/>
+          </a:prstGeom>
+          <a:noFill/>
+          <a:ln/>
+        </p:spPr>
+        <p:txBody>
+          <a:bodyPr wrap="square" lIns="0" tIns="0" rIns="0" bIns="0" rtlCol="0" anchor="t"/>
+          <a:lstStyle/>
+          <a:p>
+            <a:pPr algn="l" indent="0" marL="0">
+              <a:lnSpc>
+                <a:spcPts val="2706"/>
+              </a:lnSpc>
+              <a:buNone/>
+            </a:pPr>
+            <a:r>
+              <a:rPr lang="en-US" sz="1866" dirty="0">
+                <a:solidFill>
+                  <a:srgbClr val="5C6B7E"/>
+                </a:solidFill>
+                <a:latin typeface="Inter" pitchFamily="34" charset="0"/>
+                <a:ea typeface="Inter" pitchFamily="34" charset="-122"/>
+                <a:cs typeface="Inter" pitchFamily="34" charset="-120"/>
+              </a:rPr>
+              <a:t>A slow pipeline is a scope problem before it is a speed problem.</a:t>
+            </a:r>
+            <a:endParaRPr lang="en-US" sz="1866" dirty="0"/>
+          </a:p>
+        </p:txBody>
+      </p:sp>
+      <p:sp>
+        <p:nvSpPr>
+          <p:cNvPr id="5" name="Text 3"/>
+          <p:cNvSpPr/>
+          <p:nvPr/>
+        </p:nvSpPr>
+        <p:spPr>
+          <a:xfrm>
+            <a:off x="677098" y="2236192"/>
+            <a:ext cx="2353476" cy="2488009"/>
+          </a:xfrm>
+          <a:prstGeom prst="roundRect">
+            <a:avLst>
+              <a:gd name="adj" fmla="val 4316"/>
+            </a:avLst>
+          </a:prstGeom>
+          <a:solidFill>
+            <a:srgbClr val="F6F9FC"/>
+          </a:solidFill>
+          <a:ln/>
+        </p:spPr>
+        <p:txBody>
+          <a:bodyPr wrap="square" rtlCol="0" anchor="ctr"/>
+          <a:lstStyle/>
+          <a:p>
+            <a:pPr indent="0" marL="0">
+              <a:buNone/>
+            </a:pPr>
+            <a:endParaRPr lang="en-US" dirty="0"/>
+          </a:p>
+        </p:txBody>
+      </p:sp>
+      <p:sp>
+        <p:nvSpPr>
+          <p:cNvPr id="6" name="Text 4"/>
+          <p:cNvSpPr/>
+          <p:nvPr/>
+        </p:nvSpPr>
+        <p:spPr>
+          <a:xfrm>
+            <a:off x="913973" y="2473127"/>
+            <a:ext cx="338450" cy="338534"/>
+          </a:xfrm>
+          <a:prstGeom prst="roundRect">
+            <a:avLst>
+              <a:gd name="adj" fmla="val 50026"/>
+            </a:avLst>
+          </a:prstGeom>
+          <a:solidFill>
+            <a:srgbClr val="5A55E0"/>
+          </a:solidFill>
+          <a:ln/>
+        </p:spPr>
+        <p:txBody>
+          <a:bodyPr wrap="square" rtlCol="0" anchor="ctr"/>
+          <a:lstStyle/>
+          <a:p>
+            <a:pPr indent="0" marL="0">
+              <a:buNone/>
+            </a:pPr>
+            <a:endParaRPr lang="en-US" dirty="0"/>
+          </a:p>
+        </p:txBody>
+      </p:sp>
+      <p:sp>
+        <p:nvSpPr>
+          <p:cNvPr id="7" name="Text 5"/>
+          <p:cNvSpPr/>
+          <p:nvPr/>
+        </p:nvSpPr>
+        <p:spPr>
+          <a:xfrm>
+            <a:off x="987972" y="2523927"/>
+            <a:ext cx="194261" cy="236934"/>
+          </a:xfrm>
+          <a:prstGeom prst="rect">
+            <a:avLst/>
+          </a:prstGeom>
+          <a:noFill/>
+          <a:ln/>
+        </p:spPr>
+        <p:txBody>
+          <a:bodyPr wrap="square" lIns="0" tIns="0" rIns="0" bIns="0" rtlCol="0" anchor="t"/>
+          <a:lstStyle/>
+          <a:p>
+            <a:pPr algn="l" indent="0" marL="0">
+              <a:lnSpc>
+                <a:spcPts val="1866"/>
+              </a:lnSpc>
+              <a:buNone/>
+            </a:pPr>
+            <a:r>
+              <a:rPr lang="en-US" sz="1333" b="1" dirty="0">
+                <a:solidFill>
+                  <a:srgbClr val="FFFFFF"/>
+                </a:solidFill>
+                <a:latin typeface="Inter" pitchFamily="34" charset="0"/>
+                <a:ea typeface="Inter" pitchFamily="34" charset="-122"/>
+                <a:cs typeface="Inter" pitchFamily="34" charset="-120"/>
+              </a:rPr>
+              <a:t>01</a:t>
+            </a:r>
+            <a:endParaRPr lang="en-US" sz="1333" dirty="0"/>
+          </a:p>
+        </p:txBody>
+      </p:sp>
+      <p:sp>
+        <p:nvSpPr>
+          <p:cNvPr id="8" name="Text 6"/>
+          <p:cNvSpPr/>
+          <p:nvPr/>
+        </p:nvSpPr>
+        <p:spPr>
+          <a:xfrm>
+            <a:off x="913973" y="2946995"/>
+            <a:ext cx="1917320" cy="508000"/>
+          </a:xfrm>
+          <a:prstGeom prst="rect">
+            <a:avLst/>
+          </a:prstGeom>
+          <a:noFill/>
+          <a:ln/>
+        </p:spPr>
+        <p:txBody>
+          <a:bodyPr wrap="square" lIns="0" tIns="0" rIns="0" bIns="0" rtlCol="0" anchor="t"/>
+          <a:lstStyle/>
+          <a:p>
+            <a:pPr algn="l" indent="0" marL="0">
+              <a:lnSpc>
+                <a:spcPts val="1980"/>
+              </a:lnSpc>
+              <a:buNone/>
+            </a:pPr>
+            <a:r>
+              <a:rPr lang="en-US" sz="1466" b="1" dirty="0">
+                <a:solidFill>
+                  <a:srgbClr val="0A2540"/>
+                </a:solidFill>
+                <a:latin typeface="Inter" pitchFamily="34" charset="0"/>
+                <a:ea typeface="Inter" pitchFamily="34" charset="-122"/>
+                <a:cs typeface="Inter" pitchFamily="34" charset="-120"/>
+              </a:rPr>
+              <a:t>Attribute the time</a:t>
+            </a:r>
+            <a:endParaRPr lang="en-US" sz="1466" dirty="0"/>
+          </a:p>
+        </p:txBody>
+      </p:sp>
+      <p:sp>
+        <p:nvSpPr>
+          <p:cNvPr id="9" name="Text 7"/>
+          <p:cNvSpPr/>
+          <p:nvPr/>
+        </p:nvSpPr>
+        <p:spPr>
+          <a:xfrm>
+            <a:off x="913973" y="3539530"/>
+            <a:ext cx="1917320" cy="710803"/>
+          </a:xfrm>
+          <a:prstGeom prst="rect">
+            <a:avLst/>
+          </a:prstGeom>
+          <a:noFill/>
+          <a:ln/>
+        </p:spPr>
+        <p:txBody>
+          <a:bodyPr wrap="square" lIns="0" tIns="0" rIns="0" bIns="0" rtlCol="0" anchor="t"/>
+          <a:lstStyle/>
+          <a:p>
+            <a:pPr algn="l" indent="0" marL="0">
+              <a:lnSpc>
+                <a:spcPts val="1866"/>
+              </a:lnSpc>
+              <a:spcBef>
+                <a:spcPts val="667"/>
+              </a:spcBef>
+              <a:buNone/>
+            </a:pPr>
+            <a:r>
+              <a:rPr lang="en-US" sz="1333" dirty="0">
+                <a:solidFill>
+                  <a:srgbClr val="5C6B7E"/>
+                </a:solidFill>
+                <a:latin typeface="Inter" pitchFamily="34" charset="0"/>
+                <a:ea typeface="Inter" pitchFamily="34" charset="-122"/>
+                <a:cs typeface="Inter" pitchFamily="34" charset="-120"/>
+              </a:rPr>
+              <a:t>Per stage, not per pipeline. A total gives you nothing to act on.</a:t>
+            </a:r>
+            <a:endParaRPr lang="en-US" sz="1333" dirty="0"/>
+          </a:p>
+        </p:txBody>
+      </p:sp>
       <p:pic>
         <p:nvPicPr>
-          <p:cNvPr id="2" name="Image 0" descr="/tmp/slide-1787840600376-7wki5lt3m8.png">    </p:cNvPr>
+          <p:cNvPr id="10" name="Image 0" descr="preencoded.png">    </p:cNvPr>
           <p:cNvPicPr>
             <a:picLocks noChangeAspect="1"/>
           </p:cNvPicPr>
           <p:nvPr/>
         </p:nvPicPr>
         <p:blipFill>
-          <a:blip r:embed="rId1"/>
+          <a:blip r:embed="rId1">
+            <a:extLst>
+              <a:ext uri="{96DAC541-7B7A-43D3-8B79-37D633B846F1}">
+                <asvg:svgBlip xmlns:asvg="http://schemas.microsoft.com/office/drawing/2016/SVG/main" r:embed="rId2"/>
+              </a:ext>
+            </a:extLst>
+          </a:blip>
           <a:stretch>
             <a:fillRect/>
           </a:stretch>
         </p:blipFill>
         <p:spPr>
           <a:xfrm>
-            <a:off x="0" y="0"/>
-            <a:ext cx="12188952" cy="6858000"/>
+            <a:off x="3115087" y="3378597"/>
+            <a:ext cx="304724" cy="203200"/>
           </a:xfrm>
           <a:prstGeom prst="rect">
             <a:avLst/>
           </a:prstGeom>
         </p:spPr>
       </p:pic>
+      <p:sp>
+        <p:nvSpPr>
+          <p:cNvPr id="11" name="Text 8"/>
+          <p:cNvSpPr/>
+          <p:nvPr/>
+        </p:nvSpPr>
+        <p:spPr>
+          <a:xfrm>
+            <a:off x="3504324" y="2236192"/>
+            <a:ext cx="2353476" cy="2488009"/>
+          </a:xfrm>
+          <a:prstGeom prst="roundRect">
+            <a:avLst>
+              <a:gd name="adj" fmla="val 4316"/>
+            </a:avLst>
+          </a:prstGeom>
+          <a:solidFill>
+            <a:srgbClr val="5A55E0"/>
+          </a:solidFill>
+          <a:ln/>
+        </p:spPr>
+        <p:txBody>
+          <a:bodyPr wrap="square" rtlCol="0" anchor="ctr"/>
+          <a:lstStyle/>
+          <a:p>
+            <a:pPr indent="0" marL="0">
+              <a:buNone/>
+            </a:pPr>
+            <a:endParaRPr lang="en-US" dirty="0"/>
+          </a:p>
+        </p:txBody>
+      </p:sp>
+      <p:sp>
+        <p:nvSpPr>
+          <p:cNvPr id="12" name="Text 9"/>
+          <p:cNvSpPr/>
+          <p:nvPr/>
+        </p:nvSpPr>
+        <p:spPr>
+          <a:xfrm>
+            <a:off x="3741199" y="2473127"/>
+            <a:ext cx="338450" cy="338534"/>
+          </a:xfrm>
+          <a:prstGeom prst="roundRect">
+            <a:avLst>
+              <a:gd name="adj" fmla="val 50026"/>
+            </a:avLst>
+          </a:prstGeom>
+          <a:solidFill>
+            <a:srgbClr val="FFFFFF"/>
+          </a:solidFill>
+          <a:ln/>
+        </p:spPr>
+        <p:txBody>
+          <a:bodyPr wrap="square" rtlCol="0" anchor="ctr"/>
+          <a:lstStyle/>
+          <a:p>
+            <a:pPr indent="0" marL="0">
+              <a:buNone/>
+            </a:pPr>
+            <a:endParaRPr lang="en-US" dirty="0"/>
+          </a:p>
+        </p:txBody>
+      </p:sp>
+      <p:sp>
+        <p:nvSpPr>
+          <p:cNvPr id="13" name="Text 10"/>
+          <p:cNvSpPr/>
+          <p:nvPr/>
+        </p:nvSpPr>
+        <p:spPr>
+          <a:xfrm>
+            <a:off x="3802501" y="2523927"/>
+            <a:ext cx="220163" cy="236934"/>
+          </a:xfrm>
+          <a:prstGeom prst="rect">
+            <a:avLst/>
+          </a:prstGeom>
+          <a:noFill/>
+          <a:ln/>
+        </p:spPr>
+        <p:txBody>
+          <a:bodyPr wrap="square" lIns="0" tIns="0" rIns="0" bIns="0" rtlCol="0" anchor="t"/>
+          <a:lstStyle/>
+          <a:p>
+            <a:pPr algn="l" indent="0" marL="0">
+              <a:lnSpc>
+                <a:spcPts val="1866"/>
+              </a:lnSpc>
+              <a:buNone/>
+            </a:pPr>
+            <a:r>
+              <a:rPr lang="en-US" sz="1333" b="1" dirty="0">
+                <a:solidFill>
+                  <a:srgbClr val="5A55E0"/>
+                </a:solidFill>
+                <a:latin typeface="Inter" pitchFamily="34" charset="0"/>
+                <a:ea typeface="Inter" pitchFamily="34" charset="-122"/>
+                <a:cs typeface="Inter" pitchFamily="34" charset="-120"/>
+              </a:rPr>
+              <a:t>02</a:t>
+            </a:r>
+            <a:endParaRPr lang="en-US" sz="1333" dirty="0"/>
+          </a:p>
+        </p:txBody>
+      </p:sp>
+      <p:sp>
+        <p:nvSpPr>
+          <p:cNvPr id="14" name="Text 11"/>
+          <p:cNvSpPr/>
+          <p:nvPr/>
+        </p:nvSpPr>
+        <p:spPr>
+          <a:xfrm>
+            <a:off x="3741199" y="2946995"/>
+            <a:ext cx="1917320" cy="508000"/>
+          </a:xfrm>
+          <a:prstGeom prst="rect">
+            <a:avLst/>
+          </a:prstGeom>
+          <a:noFill/>
+          <a:ln/>
+        </p:spPr>
+        <p:txBody>
+          <a:bodyPr wrap="square" lIns="0" tIns="0" rIns="0" bIns="0" rtlCol="0" anchor="t"/>
+          <a:lstStyle/>
+          <a:p>
+            <a:pPr algn="l" indent="0" marL="0">
+              <a:lnSpc>
+                <a:spcPts val="1980"/>
+              </a:lnSpc>
+              <a:buNone/>
+            </a:pPr>
+            <a:r>
+              <a:rPr lang="en-US" sz="1466" b="1" dirty="0">
+                <a:solidFill>
+                  <a:srgbClr val="FFFFFF"/>
+                </a:solidFill>
+                <a:latin typeface="Inter" pitchFamily="34" charset="0"/>
+                <a:ea typeface="Inter" pitchFamily="34" charset="-122"/>
+                <a:cs typeface="Inter" pitchFamily="34" charset="-120"/>
+              </a:rPr>
+              <a:t>Ask what the stage is for</a:t>
+            </a:r>
+            <a:endParaRPr lang="en-US" sz="1466" dirty="0"/>
+          </a:p>
+        </p:txBody>
+      </p:sp>
+      <p:sp>
+        <p:nvSpPr>
+          <p:cNvPr id="15" name="Text 12"/>
+          <p:cNvSpPr/>
+          <p:nvPr/>
+        </p:nvSpPr>
+        <p:spPr>
+          <a:xfrm>
+            <a:off x="3741199" y="3539530"/>
+            <a:ext cx="1917320" cy="947737"/>
+          </a:xfrm>
+          <a:prstGeom prst="rect">
+            <a:avLst/>
+          </a:prstGeom>
+          <a:noFill/>
+          <a:ln/>
+        </p:spPr>
+        <p:txBody>
+          <a:bodyPr wrap="square" lIns="0" tIns="0" rIns="0" bIns="0" rtlCol="0" anchor="t"/>
+          <a:lstStyle/>
+          <a:p>
+            <a:pPr algn="l" indent="0" marL="0">
+              <a:lnSpc>
+                <a:spcPts val="1866"/>
+              </a:lnSpc>
+              <a:spcBef>
+                <a:spcPts val="667"/>
+              </a:spcBef>
+              <a:buNone/>
+            </a:pPr>
+            <a:r>
+              <a:rPr lang="en-US" sz="1333" dirty="0">
+                <a:solidFill>
+                  <a:srgbClr val="EBF0F6"/>
+                </a:solidFill>
+                <a:latin typeface="Inter" pitchFamily="34" charset="0"/>
+                <a:ea typeface="Inter" pitchFamily="34" charset="-122"/>
+                <a:cs typeface="Inter" pitchFamily="34" charset="-120"/>
+              </a:rPr>
+              <a:t>Which question does its failure answer? If none, nothing else matters.</a:t>
+            </a:r>
+            <a:endParaRPr lang="en-US" sz="1333" dirty="0"/>
+          </a:p>
+        </p:txBody>
+      </p:sp>
+      <p:pic>
+        <p:nvPicPr>
+          <p:cNvPr id="16" name="Image 1" descr="preencoded.png">    </p:cNvPr>
+          <p:cNvPicPr>
+            <a:picLocks noChangeAspect="1"/>
+          </p:cNvPicPr>
+          <p:nvPr/>
+        </p:nvPicPr>
+        <p:blipFill>
+          <a:blip r:embed="rId3">
+            <a:extLst>
+              <a:ext uri="{96DAC541-7B7A-43D3-8B79-37D633B846F1}">
+                <asvg:svgBlip xmlns:asvg="http://schemas.microsoft.com/office/drawing/2016/SVG/main" r:embed="rId4"/>
+              </a:ext>
+            </a:extLst>
+          </a:blip>
+          <a:stretch>
+            <a:fillRect/>
+          </a:stretch>
+        </p:blipFill>
+        <p:spPr>
+          <a:xfrm>
+            <a:off x="5942312" y="3378597"/>
+            <a:ext cx="304724" cy="203200"/>
+          </a:xfrm>
+          <a:prstGeom prst="rect">
+            <a:avLst/>
+          </a:prstGeom>
+        </p:spPr>
+      </p:pic>
+      <p:sp>
+        <p:nvSpPr>
+          <p:cNvPr id="17" name="Text 13"/>
+          <p:cNvSpPr/>
+          <p:nvPr/>
+        </p:nvSpPr>
+        <p:spPr>
+          <a:xfrm>
+            <a:off x="6331550" y="2236192"/>
+            <a:ext cx="2353476" cy="2488009"/>
+          </a:xfrm>
+          <a:prstGeom prst="roundRect">
+            <a:avLst>
+              <a:gd name="adj" fmla="val 4316"/>
+            </a:avLst>
+          </a:prstGeom>
+          <a:solidFill>
+            <a:srgbClr val="F6F9FC"/>
+          </a:solidFill>
+          <a:ln/>
+        </p:spPr>
+        <p:txBody>
+          <a:bodyPr wrap="square" rtlCol="0" anchor="ctr"/>
+          <a:lstStyle/>
+          <a:p>
+            <a:pPr indent="0" marL="0">
+              <a:buNone/>
+            </a:pPr>
+            <a:endParaRPr lang="en-US" dirty="0"/>
+          </a:p>
+        </p:txBody>
+      </p:sp>
+      <p:sp>
+        <p:nvSpPr>
+          <p:cNvPr id="18" name="Text 14"/>
+          <p:cNvSpPr/>
+          <p:nvPr/>
+        </p:nvSpPr>
+        <p:spPr>
+          <a:xfrm>
+            <a:off x="6568425" y="2473127"/>
+            <a:ext cx="338450" cy="338534"/>
+          </a:xfrm>
+          <a:prstGeom prst="roundRect">
+            <a:avLst>
+              <a:gd name="adj" fmla="val 50026"/>
+            </a:avLst>
+          </a:prstGeom>
+          <a:solidFill>
+            <a:srgbClr val="5A55E0"/>
+          </a:solidFill>
+          <a:ln/>
+        </p:spPr>
+        <p:txBody>
+          <a:bodyPr wrap="square" rtlCol="0" anchor="ctr"/>
+          <a:lstStyle/>
+          <a:p>
+            <a:pPr indent="0" marL="0">
+              <a:buNone/>
+            </a:pPr>
+            <a:endParaRPr lang="en-US" dirty="0"/>
+          </a:p>
+        </p:txBody>
+      </p:sp>
+      <p:sp>
+        <p:nvSpPr>
+          <p:cNvPr id="19" name="Text 15"/>
+          <p:cNvSpPr/>
+          <p:nvPr/>
+        </p:nvSpPr>
+        <p:spPr>
+          <a:xfrm>
+            <a:off x="6629727" y="2523927"/>
+            <a:ext cx="220163" cy="236934"/>
+          </a:xfrm>
+          <a:prstGeom prst="rect">
+            <a:avLst/>
+          </a:prstGeom>
+          <a:noFill/>
+          <a:ln/>
+        </p:spPr>
+        <p:txBody>
+          <a:bodyPr wrap="square" lIns="0" tIns="0" rIns="0" bIns="0" rtlCol="0" anchor="t"/>
+          <a:lstStyle/>
+          <a:p>
+            <a:pPr algn="l" indent="0" marL="0">
+              <a:lnSpc>
+                <a:spcPts val="1866"/>
+              </a:lnSpc>
+              <a:buNone/>
+            </a:pPr>
+            <a:r>
+              <a:rPr lang="en-US" sz="1333" b="1" dirty="0">
+                <a:solidFill>
+                  <a:srgbClr val="FFFFFF"/>
+                </a:solidFill>
+                <a:latin typeface="Inter" pitchFamily="34" charset="0"/>
+                <a:ea typeface="Inter" pitchFamily="34" charset="-122"/>
+                <a:cs typeface="Inter" pitchFamily="34" charset="-120"/>
+              </a:rPr>
+              <a:t>03</a:t>
+            </a:r>
+            <a:endParaRPr lang="en-US" sz="1333" dirty="0"/>
+          </a:p>
+        </p:txBody>
+      </p:sp>
+      <p:sp>
+        <p:nvSpPr>
+          <p:cNvPr id="20" name="Text 16"/>
+          <p:cNvSpPr/>
+          <p:nvPr/>
+        </p:nvSpPr>
+        <p:spPr>
+          <a:xfrm>
+            <a:off x="6568425" y="2946995"/>
+            <a:ext cx="1917320" cy="508000"/>
+          </a:xfrm>
+          <a:prstGeom prst="rect">
+            <a:avLst/>
+          </a:prstGeom>
+          <a:noFill/>
+          <a:ln/>
+        </p:spPr>
+        <p:txBody>
+          <a:bodyPr wrap="square" lIns="0" tIns="0" rIns="0" bIns="0" rtlCol="0" anchor="t"/>
+          <a:lstStyle/>
+          <a:p>
+            <a:pPr algn="l" indent="0" marL="0">
+              <a:lnSpc>
+                <a:spcPts val="1980"/>
+              </a:lnSpc>
+              <a:buNone/>
+            </a:pPr>
+            <a:r>
+              <a:rPr lang="en-US" sz="1466" b="1" dirty="0">
+                <a:solidFill>
+                  <a:srgbClr val="0A2540"/>
+                </a:solidFill>
+                <a:latin typeface="Inter" pitchFamily="34" charset="0"/>
+                <a:ea typeface="Inter" pitchFamily="34" charset="-122"/>
+                <a:cs typeface="Inter" pitchFamily="34" charset="-120"/>
+              </a:rPr>
+              <a:t>Move it or delete it</a:t>
+            </a:r>
+            <a:endParaRPr lang="en-US" sz="1466" dirty="0"/>
+          </a:p>
+        </p:txBody>
+      </p:sp>
+      <p:sp>
+        <p:nvSpPr>
+          <p:cNvPr id="21" name="Text 17"/>
+          <p:cNvSpPr/>
+          <p:nvPr/>
+        </p:nvSpPr>
+        <p:spPr>
+          <a:xfrm>
+            <a:off x="6568425" y="3539530"/>
+            <a:ext cx="1917320" cy="710803"/>
+          </a:xfrm>
+          <a:prstGeom prst="rect">
+            <a:avLst/>
+          </a:prstGeom>
+          <a:noFill/>
+          <a:ln/>
+        </p:spPr>
+        <p:txBody>
+          <a:bodyPr wrap="square" lIns="0" tIns="0" rIns="0" bIns="0" rtlCol="0" anchor="t"/>
+          <a:lstStyle/>
+          <a:p>
+            <a:pPr algn="l" indent="0" marL="0">
+              <a:lnSpc>
+                <a:spcPts val="1866"/>
+              </a:lnSpc>
+              <a:spcBef>
+                <a:spcPts val="667"/>
+              </a:spcBef>
+              <a:buNone/>
+            </a:pPr>
+            <a:r>
+              <a:rPr lang="en-US" sz="1333" dirty="0">
+                <a:solidFill>
+                  <a:srgbClr val="5C6B7E"/>
+                </a:solidFill>
+                <a:latin typeface="Inter" pitchFamily="34" charset="0"/>
+                <a:ea typeface="Inter" pitchFamily="34" charset="-122"/>
+                <a:cs typeface="Inter" pitchFamily="34" charset="-120"/>
+              </a:rPr>
+              <a:t>If a failure does not mean “do not merge”, it leaves the gate.</a:t>
+            </a:r>
+            <a:endParaRPr lang="en-US" sz="1333" dirty="0"/>
+          </a:p>
+        </p:txBody>
+      </p:sp>
+      <p:pic>
+        <p:nvPicPr>
+          <p:cNvPr id="22" name="Image 2" descr="preencoded.png">    </p:cNvPr>
+          <p:cNvPicPr>
+            <a:picLocks noChangeAspect="1"/>
+          </p:cNvPicPr>
+          <p:nvPr/>
+        </p:nvPicPr>
+        <p:blipFill>
+          <a:blip r:embed="rId5">
+            <a:extLst>
+              <a:ext uri="{96DAC541-7B7A-43D3-8B79-37D633B846F1}">
+                <asvg:svgBlip xmlns:asvg="http://schemas.microsoft.com/office/drawing/2016/SVG/main" r:embed="rId6"/>
+              </a:ext>
+            </a:extLst>
+          </a:blip>
+          <a:stretch>
+            <a:fillRect/>
+          </a:stretch>
+        </p:blipFill>
+        <p:spPr>
+          <a:xfrm>
+            <a:off x="8769538" y="3378597"/>
+            <a:ext cx="304724" cy="203200"/>
+          </a:xfrm>
+          <a:prstGeom prst="rect">
+            <a:avLst/>
+          </a:prstGeom>
+        </p:spPr>
+      </p:pic>
+      <p:sp>
+        <p:nvSpPr>
+          <p:cNvPr id="23" name="Text 18"/>
+          <p:cNvSpPr/>
+          <p:nvPr/>
+        </p:nvSpPr>
+        <p:spPr>
+          <a:xfrm>
+            <a:off x="9158775" y="2236192"/>
+            <a:ext cx="2353476" cy="2488009"/>
+          </a:xfrm>
+          <a:prstGeom prst="roundRect">
+            <a:avLst>
+              <a:gd name="adj" fmla="val 4316"/>
+            </a:avLst>
+          </a:prstGeom>
+          <a:solidFill>
+            <a:srgbClr val="F6F9FC"/>
+          </a:solidFill>
+          <a:ln/>
+        </p:spPr>
+        <p:txBody>
+          <a:bodyPr wrap="square" rtlCol="0" anchor="ctr"/>
+          <a:lstStyle/>
+          <a:p>
+            <a:pPr indent="0" marL="0">
+              <a:buNone/>
+            </a:pPr>
+            <a:endParaRPr lang="en-US" dirty="0"/>
+          </a:p>
+        </p:txBody>
+      </p:sp>
+      <p:sp>
+        <p:nvSpPr>
+          <p:cNvPr id="24" name="Text 19"/>
+          <p:cNvSpPr/>
+          <p:nvPr/>
+        </p:nvSpPr>
+        <p:spPr>
+          <a:xfrm>
+            <a:off x="9395651" y="2473127"/>
+            <a:ext cx="338450" cy="338534"/>
+          </a:xfrm>
+          <a:prstGeom prst="roundRect">
+            <a:avLst>
+              <a:gd name="adj" fmla="val 50026"/>
+            </a:avLst>
+          </a:prstGeom>
+          <a:solidFill>
+            <a:srgbClr val="5A55E0"/>
+          </a:solidFill>
+          <a:ln/>
+        </p:spPr>
+        <p:txBody>
+          <a:bodyPr wrap="square" rtlCol="0" anchor="ctr"/>
+          <a:lstStyle/>
+          <a:p>
+            <a:pPr indent="0" marL="0">
+              <a:buNone/>
+            </a:pPr>
+            <a:endParaRPr lang="en-US" dirty="0"/>
+          </a:p>
+        </p:txBody>
+      </p:sp>
+      <p:sp>
+        <p:nvSpPr>
+          <p:cNvPr id="25" name="Text 20"/>
+          <p:cNvSpPr/>
+          <p:nvPr/>
+        </p:nvSpPr>
+        <p:spPr>
+          <a:xfrm>
+            <a:off x="9450604" y="2523927"/>
+            <a:ext cx="233114" cy="236934"/>
+          </a:xfrm>
+          <a:prstGeom prst="rect">
+            <a:avLst/>
+          </a:prstGeom>
+          <a:noFill/>
+          <a:ln/>
+        </p:spPr>
+        <p:txBody>
+          <a:bodyPr wrap="square" lIns="0" tIns="0" rIns="0" bIns="0" rtlCol="0" anchor="t"/>
+          <a:lstStyle/>
+          <a:p>
+            <a:pPr algn="l" indent="0" marL="0">
+              <a:lnSpc>
+                <a:spcPts val="1866"/>
+              </a:lnSpc>
+              <a:buNone/>
+            </a:pPr>
+            <a:r>
+              <a:rPr lang="en-US" sz="1333" b="1" dirty="0">
+                <a:solidFill>
+                  <a:srgbClr val="FFFFFF"/>
+                </a:solidFill>
+                <a:latin typeface="Inter" pitchFamily="34" charset="0"/>
+                <a:ea typeface="Inter" pitchFamily="34" charset="-122"/>
+                <a:cs typeface="Inter" pitchFamily="34" charset="-120"/>
+              </a:rPr>
+              <a:t>04</a:t>
+            </a:r>
+            <a:endParaRPr lang="en-US" sz="1333" dirty="0"/>
+          </a:p>
+        </p:txBody>
+      </p:sp>
+      <p:sp>
+        <p:nvSpPr>
+          <p:cNvPr id="26" name="Text 21"/>
+          <p:cNvSpPr/>
+          <p:nvPr/>
+        </p:nvSpPr>
+        <p:spPr>
+          <a:xfrm>
+            <a:off x="9395651" y="2946995"/>
+            <a:ext cx="1917320" cy="508000"/>
+          </a:xfrm>
+          <a:prstGeom prst="rect">
+            <a:avLst/>
+          </a:prstGeom>
+          <a:noFill/>
+          <a:ln/>
+        </p:spPr>
+        <p:txBody>
+          <a:bodyPr wrap="square" lIns="0" tIns="0" rIns="0" bIns="0" rtlCol="0" anchor="t"/>
+          <a:lstStyle/>
+          <a:p>
+            <a:pPr algn="l" indent="0" marL="0">
+              <a:lnSpc>
+                <a:spcPts val="1980"/>
+              </a:lnSpc>
+              <a:buNone/>
+            </a:pPr>
+            <a:r>
+              <a:rPr lang="en-US" sz="1466" b="1" dirty="0">
+                <a:solidFill>
+                  <a:srgbClr val="0A2540"/>
+                </a:solidFill>
+                <a:latin typeface="Inter" pitchFamily="34" charset="0"/>
+                <a:ea typeface="Inter" pitchFamily="34" charset="-122"/>
+                <a:cs typeface="Inter" pitchFamily="34" charset="-120"/>
+              </a:rPr>
+              <a:t>Then optimise the rest</a:t>
+            </a:r>
+            <a:endParaRPr lang="en-US" sz="1466" dirty="0"/>
+          </a:p>
+        </p:txBody>
+      </p:sp>
+      <p:sp>
+        <p:nvSpPr>
+          <p:cNvPr id="27" name="Text 22"/>
+          <p:cNvSpPr/>
+          <p:nvPr/>
+        </p:nvSpPr>
+        <p:spPr>
+          <a:xfrm>
+            <a:off x="9395651" y="3539530"/>
+            <a:ext cx="1917320" cy="710803"/>
+          </a:xfrm>
+          <a:prstGeom prst="rect">
+            <a:avLst/>
+          </a:prstGeom>
+          <a:noFill/>
+          <a:ln/>
+        </p:spPr>
+        <p:txBody>
+          <a:bodyPr wrap="square" lIns="0" tIns="0" rIns="0" bIns="0" rtlCol="0" anchor="t"/>
+          <a:lstStyle/>
+          <a:p>
+            <a:pPr algn="l" indent="0" marL="0">
+              <a:lnSpc>
+                <a:spcPts val="1866"/>
+              </a:lnSpc>
+              <a:spcBef>
+                <a:spcPts val="667"/>
+              </a:spcBef>
+              <a:buNone/>
+            </a:pPr>
+            <a:r>
+              <a:rPr lang="en-US" sz="1333" dirty="0">
+                <a:solidFill>
+                  <a:srgbClr val="5C6B7E"/>
+                </a:solidFill>
+                <a:latin typeface="Inter" pitchFamily="34" charset="0"/>
+                <a:ea typeface="Inter" pitchFamily="34" charset="-122"/>
+                <a:cs typeface="Inter" pitchFamily="34" charset="-120"/>
+              </a:rPr>
+              <a:t>Cache and shard what genuinely has to be there.</a:t>
+            </a:r>
+            <a:endParaRPr lang="en-US" sz="1333" dirty="0"/>
+          </a:p>
+        </p:txBody>
+      </p:sp>
+      <p:sp>
+        <p:nvSpPr>
+          <p:cNvPr id="28" name="Text 23"/>
+          <p:cNvSpPr/>
+          <p:nvPr/>
+        </p:nvSpPr>
+        <p:spPr>
+          <a:xfrm>
+            <a:off x="677098" y="5150644"/>
+            <a:ext cx="10834756" cy="725488"/>
+          </a:xfrm>
+          <a:prstGeom prst="roundRect">
+            <a:avLst>
+              <a:gd name="adj" fmla="val 14003"/>
+            </a:avLst>
+          </a:prstGeom>
+          <a:solidFill>
+            <a:srgbClr val="EBF0F6"/>
+          </a:solidFill>
+          <a:ln/>
+        </p:spPr>
+        <p:txBody>
+          <a:bodyPr wrap="square" rtlCol="0" anchor="ctr"/>
+          <a:lstStyle/>
+          <a:p>
+            <a:pPr indent="0" marL="0">
+              <a:buNone/>
+            </a:pPr>
+            <a:endParaRPr lang="en-US" dirty="0"/>
+          </a:p>
+        </p:txBody>
+      </p:sp>
+      <p:sp>
+        <p:nvSpPr>
+          <p:cNvPr id="29" name="Text 24"/>
+          <p:cNvSpPr/>
+          <p:nvPr/>
+        </p:nvSpPr>
+        <p:spPr>
+          <a:xfrm>
+            <a:off x="947897" y="5353844"/>
+            <a:ext cx="50787" cy="319088"/>
+          </a:xfrm>
+          <a:prstGeom prst="roundRect">
+            <a:avLst>
+              <a:gd name="adj" fmla="val 50007"/>
+            </a:avLst>
+          </a:prstGeom>
+          <a:solidFill>
+            <a:srgbClr val="5A55E0"/>
+          </a:solidFill>
+          <a:ln/>
+        </p:spPr>
+        <p:txBody>
+          <a:bodyPr wrap="square" rtlCol="0" anchor="ctr"/>
+          <a:lstStyle/>
+          <a:p>
+            <a:pPr indent="0" marL="0">
+              <a:buNone/>
+            </a:pPr>
+            <a:endParaRPr lang="en-US" dirty="0"/>
+          </a:p>
+        </p:txBody>
+      </p:sp>
+      <p:sp>
+        <p:nvSpPr>
+          <p:cNvPr id="30" name="Text 25"/>
+          <p:cNvSpPr/>
+          <p:nvPr/>
+        </p:nvSpPr>
+        <p:spPr>
+          <a:xfrm>
+            <a:off x="1235560" y="5353844"/>
+            <a:ext cx="7394885" cy="319088"/>
+          </a:xfrm>
+          <a:prstGeom prst="rect">
+            <a:avLst/>
+          </a:prstGeom>
+          <a:noFill/>
+          <a:ln/>
+        </p:spPr>
+        <p:txBody>
+          <a:bodyPr wrap="square" lIns="0" tIns="0" rIns="0" bIns="0" rtlCol="0" anchor="t"/>
+          <a:lstStyle/>
+          <a:p>
+            <a:pPr algn="l" indent="0" marL="0">
+              <a:lnSpc>
+                <a:spcPts val="2513"/>
+              </a:lnSpc>
+              <a:buNone/>
+            </a:pPr>
+            <a:r>
+              <a:rPr lang="en-US" sz="1733" dirty="0">
+                <a:solidFill>
+                  <a:srgbClr val="0A2540"/>
+                </a:solidFill>
+                <a:latin typeface="Inter" pitchFamily="34" charset="0"/>
+                <a:ea typeface="Inter" pitchFamily="34" charset="-122"/>
+                <a:cs typeface="Inter" pitchFamily="34" charset="-120"/>
+              </a:rPr>
+              <a:t>Optimising first only makes a stage that should not exist finish sooner.</a:t>
+            </a:r>
+            <a:endParaRPr lang="en-US" sz="1733" dirty="0"/>
+          </a:p>
+        </p:txBody>
+      </p:sp>
+      <p:sp>
+        <p:nvSpPr>
+          <p:cNvPr id="31" name="Text 26"/>
+          <p:cNvSpPr/>
+          <p:nvPr/>
+        </p:nvSpPr>
+        <p:spPr>
+          <a:xfrm>
+            <a:off x="5977626" y="6113066"/>
+            <a:ext cx="5644913" cy="236934"/>
+          </a:xfrm>
+          <a:prstGeom prst="rect">
+            <a:avLst/>
+          </a:prstGeom>
+          <a:noFill/>
+          <a:ln/>
+        </p:spPr>
+        <p:txBody>
+          <a:bodyPr wrap="square" lIns="0" tIns="0" rIns="0" bIns="0" rtlCol="0" anchor="t"/>
+          <a:lstStyle/>
+          <a:p>
+            <a:pPr algn="l" indent="0" marL="0">
+              <a:lnSpc>
+                <a:spcPts val="1866"/>
+              </a:lnSpc>
+              <a:buNone/>
+            </a:pPr>
+            <a:r>
+              <a:rPr lang="en-US" sz="1333" dirty="0">
+                <a:solidFill>
+                  <a:srgbClr val="5C6B7E"/>
+                </a:solidFill>
+                <a:latin typeface="Inter" pitchFamily="34" charset="0"/>
+                <a:ea typeface="Inter" pitchFamily="34" charset="-122"/>
+                <a:cs typeface="Inter" pitchFamily="34" charset="-120"/>
+              </a:rPr>
+              <a:t>CI PIPELINE · SHEET 05 / 06 · NO CHART, NO EXTERNAL DATA</a:t>
+            </a:r>
+            <a:endParaRPr lang="en-US" sz="1333" dirty="0"/>
+          </a:p>
+        </p:txBody>
+      </p:sp>
     </p:spTree>
   </p:cSld>
   <p:clrMapOvr>
@@ -1544,6 +5350,13 @@
 <file path=ppt/slides/slide6.xml><?xml version="1.0" encoding="utf-8"?>
 <p:sld xmlns:a="http://schemas.openxmlformats.org/drawingml/2006/main" xmlns:r="http://schemas.openxmlformats.org/officeDocument/2006/relationships" xmlns:p="http://schemas.openxmlformats.org/presentationml/2006/main">
   <p:cSld name="Slide 6">
+    <p:bg>
+      <p:bgPr>
+        <a:solidFill>
+          <a:srgbClr val="FFFFFF"/>
+        </a:solidFill>
+      </p:bgPr>
+    </p:bg>
     <p:spTree>
       <p:nvGrpSpPr>
         <p:cNvPr id="1" name=""/>
@@ -1558,30 +5371,830 @@
           <a:chExt cx="0" cy="0"/>
         </a:xfrm>
       </p:grpSpPr>
-      <p:pic>
-        <p:nvPicPr>
-          <p:cNvPr id="2" name="Image 0" descr="/tmp/slide-1787840600673-miwbmt2ipq.png">    </p:cNvPr>
-          <p:cNvPicPr>
-            <a:picLocks noChangeAspect="1"/>
-          </p:cNvPicPr>
-          <p:nvPr/>
-        </p:nvPicPr>
-        <p:blipFill>
-          <a:blip r:embed="rId1"/>
-          <a:stretch>
-            <a:fillRect/>
-          </a:stretch>
-        </p:blipFill>
-        <p:spPr>
-          <a:xfrm>
-            <a:off x="0" y="0"/>
-            <a:ext cx="12188952" cy="6858000"/>
-          </a:xfrm>
-          <a:prstGeom prst="rect">
-            <a:avLst/>
-          </a:prstGeom>
-        </p:spPr>
-      </p:pic>
+      <p:sp>
+        <p:nvSpPr>
+          <p:cNvPr id="2" name="Text 0"/>
+          <p:cNvSpPr/>
+          <p:nvPr/>
+        </p:nvSpPr>
+        <p:spPr>
+          <a:xfrm>
+            <a:off x="677098" y="541734"/>
+            <a:ext cx="11051451" cy="236934"/>
+          </a:xfrm>
+          <a:prstGeom prst="rect">
+            <a:avLst/>
+          </a:prstGeom>
+          <a:noFill/>
+          <a:ln/>
+        </p:spPr>
+        <p:txBody>
+          <a:bodyPr wrap="square" lIns="0" tIns="0" rIns="0" bIns="0" rtlCol="0" anchor="t"/>
+          <a:lstStyle/>
+          <a:p>
+            <a:pPr algn="l" indent="0" marL="0">
+              <a:lnSpc>
+                <a:spcPts val="1866"/>
+              </a:lnSpc>
+              <a:buNone/>
+            </a:pPr>
+            <a:r>
+              <a:rPr lang="en-US" sz="1333" b="1" dirty="0">
+                <a:solidFill>
+                  <a:srgbClr val="5C6B7E"/>
+                </a:solidFill>
+                <a:latin typeface="Inter" pitchFamily="34" charset="0"/>
+                <a:ea typeface="Inter" pitchFamily="34" charset="-122"/>
+                <a:cs typeface="Inter" pitchFamily="34" charset="-120"/>
+              </a:rPr>
+              <a:t>DECISIONS</a:t>
+            </a:r>
+            <a:endParaRPr lang="en-US" sz="1333" dirty="0"/>
+          </a:p>
+        </p:txBody>
+      </p:sp>
+      <p:sp>
+        <p:nvSpPr>
+          <p:cNvPr id="3" name="Text 1"/>
+          <p:cNvSpPr/>
+          <p:nvPr/>
+        </p:nvSpPr>
+        <p:spPr>
+          <a:xfrm>
+            <a:off x="677098" y="863203"/>
+            <a:ext cx="9669767" cy="487561"/>
+          </a:xfrm>
+          <a:prstGeom prst="rect">
+            <a:avLst/>
+          </a:prstGeom>
+          <a:noFill/>
+          <a:ln/>
+        </p:spPr>
+        <p:txBody>
+          <a:bodyPr wrap="square" lIns="0" tIns="0" rIns="0" bIns="0" rtlCol="0" anchor="t"/>
+          <a:lstStyle/>
+          <a:p>
+            <a:pPr algn="l" indent="0" marL="0">
+              <a:lnSpc>
+                <a:spcPts val="3840"/>
+              </a:lnSpc>
+              <a:spcBef>
+                <a:spcPts val="667"/>
+              </a:spcBef>
+              <a:buNone/>
+            </a:pPr>
+            <a:r>
+              <a:rPr lang="en-US" sz="3200" b="1" dirty="0">
+                <a:solidFill>
+                  <a:srgbClr val="0A2540"/>
+                </a:solidFill>
+                <a:latin typeface="Inter" pitchFamily="34" charset="0"/>
+                <a:ea typeface="Inter" pitchFamily="34" charset="-122"/>
+                <a:cs typeface="Inter" pitchFamily="34" charset="-120"/>
+              </a:rPr>
+              <a:t>What we need to decide</a:t>
+            </a:r>
+            <a:endParaRPr lang="en-US" sz="3200" dirty="0"/>
+          </a:p>
+        </p:txBody>
+      </p:sp>
+      <p:sp>
+        <p:nvSpPr>
+          <p:cNvPr id="4" name="Text 2"/>
+          <p:cNvSpPr/>
+          <p:nvPr/>
+        </p:nvSpPr>
+        <p:spPr>
+          <a:xfrm>
+            <a:off x="677098" y="1621631"/>
+            <a:ext cx="5767334" cy="1282700"/>
+          </a:xfrm>
+          <a:prstGeom prst="roundRect">
+            <a:avLst>
+              <a:gd name="adj" fmla="val 7920"/>
+            </a:avLst>
+          </a:prstGeom>
+          <a:solidFill>
+            <a:srgbClr val="F6F9FC"/>
+          </a:solidFill>
+          <a:ln/>
+        </p:spPr>
+        <p:txBody>
+          <a:bodyPr wrap="square" rtlCol="0" anchor="ctr"/>
+          <a:lstStyle/>
+          <a:p>
+            <a:pPr indent="0" marL="0">
+              <a:buNone/>
+            </a:pPr>
+            <a:endParaRPr lang="en-US" dirty="0"/>
+          </a:p>
+        </p:txBody>
+      </p:sp>
+      <p:sp>
+        <p:nvSpPr>
+          <p:cNvPr id="5" name="Text 3"/>
+          <p:cNvSpPr/>
+          <p:nvPr/>
+        </p:nvSpPr>
+        <p:spPr>
+          <a:xfrm>
+            <a:off x="931034" y="2093714"/>
+            <a:ext cx="338450" cy="338534"/>
+          </a:xfrm>
+          <a:prstGeom prst="roundRect">
+            <a:avLst>
+              <a:gd name="adj" fmla="val 50026"/>
+            </a:avLst>
+          </a:prstGeom>
+          <a:solidFill>
+            <a:srgbClr val="5A55E0"/>
+          </a:solidFill>
+          <a:ln/>
+        </p:spPr>
+        <p:txBody>
+          <a:bodyPr wrap="square" rtlCol="0" anchor="ctr"/>
+          <a:lstStyle/>
+          <a:p>
+            <a:pPr indent="0" marL="0">
+              <a:buNone/>
+            </a:pPr>
+            <a:endParaRPr lang="en-US" dirty="0"/>
+          </a:p>
+        </p:txBody>
+      </p:sp>
+      <p:sp>
+        <p:nvSpPr>
+          <p:cNvPr id="6" name="Text 4"/>
+          <p:cNvSpPr/>
+          <p:nvPr/>
+        </p:nvSpPr>
+        <p:spPr>
+          <a:xfrm>
+            <a:off x="998685" y="2144514"/>
+            <a:ext cx="207212" cy="236934"/>
+          </a:xfrm>
+          <a:prstGeom prst="rect">
+            <a:avLst/>
+          </a:prstGeom>
+          <a:noFill/>
+          <a:ln/>
+        </p:spPr>
+        <p:txBody>
+          <a:bodyPr wrap="square" lIns="0" tIns="0" rIns="0" bIns="0" rtlCol="0" anchor="t"/>
+          <a:lstStyle/>
+          <a:p>
+            <a:pPr algn="l" indent="0" marL="0">
+              <a:lnSpc>
+                <a:spcPts val="1866"/>
+              </a:lnSpc>
+              <a:buNone/>
+            </a:pPr>
+            <a:r>
+              <a:rPr lang="en-US" sz="1333" b="1" dirty="0">
+                <a:solidFill>
+                  <a:srgbClr val="FFFFFF"/>
+                </a:solidFill>
+                <a:latin typeface="Inter" pitchFamily="34" charset="0"/>
+                <a:ea typeface="Inter" pitchFamily="34" charset="-122"/>
+                <a:cs typeface="Inter" pitchFamily="34" charset="-120"/>
+              </a:rPr>
+              <a:t>Q1</a:t>
+            </a:r>
+            <a:endParaRPr lang="en-US" sz="1333" dirty="0"/>
+          </a:p>
+        </p:txBody>
+      </p:sp>
+      <p:sp>
+        <p:nvSpPr>
+          <p:cNvPr id="7" name="Text 5"/>
+          <p:cNvSpPr/>
+          <p:nvPr/>
+        </p:nvSpPr>
+        <p:spPr>
+          <a:xfrm>
+            <a:off x="1472633" y="1955006"/>
+            <a:ext cx="4812220" cy="615950"/>
+          </a:xfrm>
+          <a:prstGeom prst="rect">
+            <a:avLst/>
+          </a:prstGeom>
+          <a:noFill/>
+          <a:ln/>
+        </p:spPr>
+        <p:txBody>
+          <a:bodyPr wrap="square" lIns="0" tIns="0" rIns="0" bIns="0" rtlCol="0" anchor="t"/>
+          <a:lstStyle/>
+          <a:p>
+            <a:pPr algn="l" indent="0" marL="0">
+              <a:lnSpc>
+                <a:spcPts val="2426"/>
+              </a:lnSpc>
+              <a:buNone/>
+            </a:pPr>
+            <a:r>
+              <a:rPr lang="en-US" sz="1733" b="1" dirty="0">
+                <a:solidFill>
+                  <a:srgbClr val="0A2540"/>
+                </a:solidFill>
+                <a:latin typeface="Inter" pitchFamily="34" charset="0"/>
+                <a:ea typeface="Inter" pitchFamily="34" charset="-122"/>
+                <a:cs typeface="Inter" pitchFamily="34" charset="-120"/>
+              </a:rPr>
+              <a:t>What is our pipeline’s one question — and which stages do not answer it?</a:t>
+            </a:r>
+            <a:endParaRPr lang="en-US" sz="1733" dirty="0"/>
+          </a:p>
+        </p:txBody>
+      </p:sp>
+      <p:sp>
+        <p:nvSpPr>
+          <p:cNvPr id="8" name="Text 6"/>
+          <p:cNvSpPr/>
+          <p:nvPr/>
+        </p:nvSpPr>
+        <p:spPr>
+          <a:xfrm>
+            <a:off x="677098" y="3107531"/>
+            <a:ext cx="5767334" cy="1282700"/>
+          </a:xfrm>
+          <a:prstGeom prst="roundRect">
+            <a:avLst>
+              <a:gd name="adj" fmla="val 7920"/>
+            </a:avLst>
+          </a:prstGeom>
+          <a:solidFill>
+            <a:srgbClr val="F6F9FC"/>
+          </a:solidFill>
+          <a:ln/>
+        </p:spPr>
+        <p:txBody>
+          <a:bodyPr wrap="square" rtlCol="0" anchor="ctr"/>
+          <a:lstStyle/>
+          <a:p>
+            <a:pPr indent="0" marL="0">
+              <a:buNone/>
+            </a:pPr>
+            <a:endParaRPr lang="en-US" dirty="0"/>
+          </a:p>
+        </p:txBody>
+      </p:sp>
+      <p:sp>
+        <p:nvSpPr>
+          <p:cNvPr id="9" name="Text 7"/>
+          <p:cNvSpPr/>
+          <p:nvPr/>
+        </p:nvSpPr>
+        <p:spPr>
+          <a:xfrm>
+            <a:off x="931034" y="3579614"/>
+            <a:ext cx="338450" cy="338534"/>
+          </a:xfrm>
+          <a:prstGeom prst="roundRect">
+            <a:avLst>
+              <a:gd name="adj" fmla="val 50026"/>
+            </a:avLst>
+          </a:prstGeom>
+          <a:solidFill>
+            <a:srgbClr val="5A55E0"/>
+          </a:solidFill>
+          <a:ln/>
+        </p:spPr>
+        <p:txBody>
+          <a:bodyPr wrap="square" rtlCol="0" anchor="ctr"/>
+          <a:lstStyle/>
+          <a:p>
+            <a:pPr indent="0" marL="0">
+              <a:buNone/>
+            </a:pPr>
+            <a:endParaRPr lang="en-US" dirty="0"/>
+          </a:p>
+        </p:txBody>
+      </p:sp>
+      <p:sp>
+        <p:nvSpPr>
+          <p:cNvPr id="10" name="Text 8"/>
+          <p:cNvSpPr/>
+          <p:nvPr/>
+        </p:nvSpPr>
+        <p:spPr>
+          <a:xfrm>
+            <a:off x="985988" y="3630414"/>
+            <a:ext cx="233114" cy="236934"/>
+          </a:xfrm>
+          <a:prstGeom prst="rect">
+            <a:avLst/>
+          </a:prstGeom>
+          <a:noFill/>
+          <a:ln/>
+        </p:spPr>
+        <p:txBody>
+          <a:bodyPr wrap="square" lIns="0" tIns="0" rIns="0" bIns="0" rtlCol="0" anchor="t"/>
+          <a:lstStyle/>
+          <a:p>
+            <a:pPr algn="l" indent="0" marL="0">
+              <a:lnSpc>
+                <a:spcPts val="1866"/>
+              </a:lnSpc>
+              <a:buNone/>
+            </a:pPr>
+            <a:r>
+              <a:rPr lang="en-US" sz="1333" b="1" dirty="0">
+                <a:solidFill>
+                  <a:srgbClr val="FFFFFF"/>
+                </a:solidFill>
+                <a:latin typeface="Inter" pitchFamily="34" charset="0"/>
+                <a:ea typeface="Inter" pitchFamily="34" charset="-122"/>
+                <a:cs typeface="Inter" pitchFamily="34" charset="-120"/>
+              </a:rPr>
+              <a:t>Q2</a:t>
+            </a:r>
+            <a:endParaRPr lang="en-US" sz="1333" dirty="0"/>
+          </a:p>
+        </p:txBody>
+      </p:sp>
+      <p:sp>
+        <p:nvSpPr>
+          <p:cNvPr id="11" name="Text 9"/>
+          <p:cNvSpPr/>
+          <p:nvPr/>
+        </p:nvSpPr>
+        <p:spPr>
+          <a:xfrm>
+            <a:off x="1472633" y="3440906"/>
+            <a:ext cx="4812220" cy="615950"/>
+          </a:xfrm>
+          <a:prstGeom prst="rect">
+            <a:avLst/>
+          </a:prstGeom>
+          <a:noFill/>
+          <a:ln/>
+        </p:spPr>
+        <p:txBody>
+          <a:bodyPr wrap="square" lIns="0" tIns="0" rIns="0" bIns="0" rtlCol="0" anchor="t"/>
+          <a:lstStyle/>
+          <a:p>
+            <a:pPr algn="l" indent="0" marL="0">
+              <a:lnSpc>
+                <a:spcPts val="2426"/>
+              </a:lnSpc>
+              <a:buNone/>
+            </a:pPr>
+            <a:r>
+              <a:rPr lang="en-US" sz="1733" b="1" dirty="0">
+                <a:solidFill>
+                  <a:srgbClr val="0A2540"/>
+                </a:solidFill>
+                <a:latin typeface="Inter" pitchFamily="34" charset="0"/>
+                <a:ea typeface="Inter" pitchFamily="34" charset="-122"/>
+                <a:cs typeface="Inter" pitchFamily="34" charset="-120"/>
+              </a:rPr>
+              <a:t>Who is allowed to quarantine a flaky test, and how fast?</a:t>
+            </a:r>
+            <a:endParaRPr lang="en-US" sz="1733" dirty="0"/>
+          </a:p>
+        </p:txBody>
+      </p:sp>
+      <p:sp>
+        <p:nvSpPr>
+          <p:cNvPr id="12" name="Text 10"/>
+          <p:cNvSpPr/>
+          <p:nvPr/>
+        </p:nvSpPr>
+        <p:spPr>
+          <a:xfrm>
+            <a:off x="677098" y="4593431"/>
+            <a:ext cx="5767334" cy="1282700"/>
+          </a:xfrm>
+          <a:prstGeom prst="roundRect">
+            <a:avLst>
+              <a:gd name="adj" fmla="val 7920"/>
+            </a:avLst>
+          </a:prstGeom>
+          <a:solidFill>
+            <a:srgbClr val="F6F9FC"/>
+          </a:solidFill>
+          <a:ln/>
+        </p:spPr>
+        <p:txBody>
+          <a:bodyPr wrap="square" rtlCol="0" anchor="ctr"/>
+          <a:lstStyle/>
+          <a:p>
+            <a:pPr indent="0" marL="0">
+              <a:buNone/>
+            </a:pPr>
+            <a:endParaRPr lang="en-US" dirty="0"/>
+          </a:p>
+        </p:txBody>
+      </p:sp>
+      <p:sp>
+        <p:nvSpPr>
+          <p:cNvPr id="13" name="Text 11"/>
+          <p:cNvSpPr/>
+          <p:nvPr/>
+        </p:nvSpPr>
+        <p:spPr>
+          <a:xfrm>
+            <a:off x="931034" y="5065514"/>
+            <a:ext cx="338450" cy="338534"/>
+          </a:xfrm>
+          <a:prstGeom prst="roundRect">
+            <a:avLst>
+              <a:gd name="adj" fmla="val 50026"/>
+            </a:avLst>
+          </a:prstGeom>
+          <a:solidFill>
+            <a:srgbClr val="5A55E0"/>
+          </a:solidFill>
+          <a:ln/>
+        </p:spPr>
+        <p:txBody>
+          <a:bodyPr wrap="square" rtlCol="0" anchor="ctr"/>
+          <a:lstStyle/>
+          <a:p>
+            <a:pPr indent="0" marL="0">
+              <a:buNone/>
+            </a:pPr>
+            <a:endParaRPr lang="en-US" dirty="0"/>
+          </a:p>
+        </p:txBody>
+      </p:sp>
+      <p:sp>
+        <p:nvSpPr>
+          <p:cNvPr id="14" name="Text 12"/>
+          <p:cNvSpPr/>
+          <p:nvPr/>
+        </p:nvSpPr>
+        <p:spPr>
+          <a:xfrm>
+            <a:off x="985988" y="5116314"/>
+            <a:ext cx="233114" cy="236934"/>
+          </a:xfrm>
+          <a:prstGeom prst="rect">
+            <a:avLst/>
+          </a:prstGeom>
+          <a:noFill/>
+          <a:ln/>
+        </p:spPr>
+        <p:txBody>
+          <a:bodyPr wrap="square" lIns="0" tIns="0" rIns="0" bIns="0" rtlCol="0" anchor="t"/>
+          <a:lstStyle/>
+          <a:p>
+            <a:pPr algn="l" indent="0" marL="0">
+              <a:lnSpc>
+                <a:spcPts val="1866"/>
+              </a:lnSpc>
+              <a:buNone/>
+            </a:pPr>
+            <a:r>
+              <a:rPr lang="en-US" sz="1333" b="1" dirty="0">
+                <a:solidFill>
+                  <a:srgbClr val="FFFFFF"/>
+                </a:solidFill>
+                <a:latin typeface="Inter" pitchFamily="34" charset="0"/>
+                <a:ea typeface="Inter" pitchFamily="34" charset="-122"/>
+                <a:cs typeface="Inter" pitchFamily="34" charset="-120"/>
+              </a:rPr>
+              <a:t>Q3</a:t>
+            </a:r>
+            <a:endParaRPr lang="en-US" sz="1333" dirty="0"/>
+          </a:p>
+        </p:txBody>
+      </p:sp>
+      <p:sp>
+        <p:nvSpPr>
+          <p:cNvPr id="15" name="Text 13"/>
+          <p:cNvSpPr/>
+          <p:nvPr/>
+        </p:nvSpPr>
+        <p:spPr>
+          <a:xfrm>
+            <a:off x="1472633" y="4926806"/>
+            <a:ext cx="4812220" cy="615950"/>
+          </a:xfrm>
+          <a:prstGeom prst="rect">
+            <a:avLst/>
+          </a:prstGeom>
+          <a:noFill/>
+          <a:ln/>
+        </p:spPr>
+        <p:txBody>
+          <a:bodyPr wrap="square" lIns="0" tIns="0" rIns="0" bIns="0" rtlCol="0" anchor="t"/>
+          <a:lstStyle/>
+          <a:p>
+            <a:pPr algn="l" indent="0" marL="0">
+              <a:lnSpc>
+                <a:spcPts val="2426"/>
+              </a:lnSpc>
+              <a:buNone/>
+            </a:pPr>
+            <a:r>
+              <a:rPr lang="en-US" sz="1733" b="1" dirty="0">
+                <a:solidFill>
+                  <a:srgbClr val="0A2540"/>
+                </a:solidFill>
+                <a:latin typeface="Inter" pitchFamily="34" charset="0"/>
+                <a:ea typeface="Inter" pitchFamily="34" charset="-122"/>
+                <a:cs typeface="Inter" pitchFamily="34" charset="-120"/>
+              </a:rPr>
+              <a:t>What is the longest wait we will defend before a stage leaves the gate?</a:t>
+            </a:r>
+            <a:endParaRPr lang="en-US" sz="1733" dirty="0"/>
+          </a:p>
+        </p:txBody>
+      </p:sp>
+      <p:sp>
+        <p:nvSpPr>
+          <p:cNvPr id="16" name="Text 14"/>
+          <p:cNvSpPr/>
+          <p:nvPr/>
+        </p:nvSpPr>
+        <p:spPr>
+          <a:xfrm>
+            <a:off x="6782882" y="1621631"/>
+            <a:ext cx="4728972" cy="4254500"/>
+          </a:xfrm>
+          <a:prstGeom prst="roundRect">
+            <a:avLst>
+              <a:gd name="adj" fmla="val 2388"/>
+            </a:avLst>
+          </a:prstGeom>
+          <a:solidFill>
+            <a:srgbClr val="F6F9FC"/>
+          </a:solidFill>
+          <a:ln/>
+        </p:spPr>
+        <p:txBody>
+          <a:bodyPr wrap="square" rtlCol="0" anchor="ctr"/>
+          <a:lstStyle/>
+          <a:p>
+            <a:pPr indent="0" marL="0">
+              <a:buNone/>
+            </a:pPr>
+            <a:endParaRPr lang="en-US" dirty="0"/>
+          </a:p>
+        </p:txBody>
+      </p:sp>
+      <p:sp>
+        <p:nvSpPr>
+          <p:cNvPr id="17" name="Text 15"/>
+          <p:cNvSpPr/>
+          <p:nvPr/>
+        </p:nvSpPr>
+        <p:spPr>
+          <a:xfrm>
+            <a:off x="7087606" y="1926431"/>
+            <a:ext cx="4201915" cy="236934"/>
+          </a:xfrm>
+          <a:prstGeom prst="rect">
+            <a:avLst/>
+          </a:prstGeom>
+          <a:noFill/>
+          <a:ln/>
+        </p:spPr>
+        <p:txBody>
+          <a:bodyPr wrap="square" lIns="0" tIns="0" rIns="0" bIns="0" rtlCol="0" anchor="t"/>
+          <a:lstStyle/>
+          <a:p>
+            <a:pPr algn="l" indent="0" marL="0">
+              <a:lnSpc>
+                <a:spcPts val="1866"/>
+              </a:lnSpc>
+              <a:buNone/>
+            </a:pPr>
+            <a:r>
+              <a:rPr lang="en-US" sz="1333" b="1" dirty="0">
+                <a:solidFill>
+                  <a:srgbClr val="5C6B7E"/>
+                </a:solidFill>
+                <a:latin typeface="Inter" pitchFamily="34" charset="0"/>
+                <a:ea typeface="Inter" pitchFamily="34" charset="-122"/>
+                <a:cs typeface="Inter" pitchFamily="34" charset="-120"/>
+              </a:rPr>
+              <a:t>THE POINT</a:t>
+            </a:r>
+            <a:endParaRPr lang="en-US" sz="1333" dirty="0"/>
+          </a:p>
+        </p:txBody>
+      </p:sp>
+      <p:sp>
+        <p:nvSpPr>
+          <p:cNvPr id="18" name="Text 16"/>
+          <p:cNvSpPr/>
+          <p:nvPr/>
+        </p:nvSpPr>
+        <p:spPr>
+          <a:xfrm>
+            <a:off x="7087606" y="2298700"/>
+            <a:ext cx="4201915" cy="1096566"/>
+          </a:xfrm>
+          <a:prstGeom prst="rect">
+            <a:avLst/>
+          </a:prstGeom>
+          <a:noFill/>
+          <a:ln/>
+        </p:spPr>
+        <p:txBody>
+          <a:bodyPr wrap="square" lIns="0" tIns="0" rIns="0" bIns="0" rtlCol="0" anchor="t"/>
+          <a:lstStyle/>
+          <a:p>
+            <a:pPr algn="l" indent="0" marL="0">
+              <a:lnSpc>
+                <a:spcPts val="2880"/>
+              </a:lnSpc>
+              <a:spcBef>
+                <a:spcPts val="1067"/>
+              </a:spcBef>
+              <a:buNone/>
+            </a:pPr>
+            <a:r>
+              <a:rPr lang="en-US" sz="2133" b="1" dirty="0">
+                <a:solidFill>
+                  <a:srgbClr val="0A2540"/>
+                </a:solidFill>
+                <a:latin typeface="Inter" pitchFamily="34" charset="0"/>
+                <a:ea typeface="Inter" pitchFamily="34" charset="-122"/>
+                <a:cs typeface="Inter" pitchFamily="34" charset="-120"/>
+              </a:rPr>
+              <a:t>None of this is a tuning problem until the boundary is written down.</a:t>
+            </a:r>
+            <a:endParaRPr lang="en-US" sz="2133" dirty="0"/>
+          </a:p>
+        </p:txBody>
+      </p:sp>
+      <p:sp>
+        <p:nvSpPr>
+          <p:cNvPr id="19" name="Text 17"/>
+          <p:cNvSpPr/>
+          <p:nvPr/>
+        </p:nvSpPr>
+        <p:spPr>
+          <a:xfrm>
+            <a:off x="7087606" y="3598466"/>
+            <a:ext cx="4201915" cy="853083"/>
+          </a:xfrm>
+          <a:prstGeom prst="rect">
+            <a:avLst/>
+          </a:prstGeom>
+          <a:noFill/>
+          <a:ln/>
+        </p:spPr>
+        <p:txBody>
+          <a:bodyPr wrap="square" lIns="0" tIns="0" rIns="0" bIns="0" rtlCol="0" anchor="t"/>
+          <a:lstStyle/>
+          <a:p>
+            <a:pPr algn="l" indent="0" marL="0">
+              <a:lnSpc>
+                <a:spcPts val="2240"/>
+              </a:lnSpc>
+              <a:spcBef>
+                <a:spcPts val="1600"/>
+              </a:spcBef>
+              <a:buNone/>
+            </a:pPr>
+            <a:r>
+              <a:rPr lang="en-US" sz="1600" dirty="0">
+                <a:solidFill>
+                  <a:srgbClr val="5C6B7E"/>
+                </a:solidFill>
+                <a:latin typeface="Inter" pitchFamily="34" charset="0"/>
+                <a:ea typeface="Inter" pitchFamily="34" charset="-122"/>
+                <a:cs typeface="Inter" pitchFamily="34" charset="-120"/>
+              </a:rPr>
+              <a:t>The pipeline is slow because nothing says what belongs in it. Decide that first; the rest really is tuning.</a:t>
+            </a:r>
+            <a:endParaRPr lang="en-US" sz="1600" dirty="0"/>
+          </a:p>
+        </p:txBody>
+      </p:sp>
+      <p:sp>
+        <p:nvSpPr>
+          <p:cNvPr id="20" name="Text 18"/>
+          <p:cNvSpPr/>
+          <p:nvPr/>
+        </p:nvSpPr>
+        <p:spPr>
+          <a:xfrm>
+            <a:off x="7087606" y="4952802"/>
+            <a:ext cx="4201915" cy="236934"/>
+          </a:xfrm>
+          <a:prstGeom prst="rect">
+            <a:avLst/>
+          </a:prstGeom>
+          <a:noFill/>
+          <a:ln/>
+        </p:spPr>
+        <p:txBody>
+          <a:bodyPr wrap="square" lIns="0" tIns="0" rIns="0" bIns="0" rtlCol="0" anchor="t"/>
+          <a:lstStyle/>
+          <a:p>
+            <a:pPr algn="l" indent="0" marL="0">
+              <a:lnSpc>
+                <a:spcPts val="1866"/>
+              </a:lnSpc>
+              <a:buNone/>
+            </a:pPr>
+            <a:r>
+              <a:rPr lang="en-US" sz="1333" b="1" dirty="0">
+                <a:solidFill>
+                  <a:srgbClr val="5C6B7E"/>
+                </a:solidFill>
+                <a:latin typeface="Inter" pitchFamily="34" charset="0"/>
+                <a:ea typeface="Inter" pitchFamily="34" charset="-122"/>
+                <a:cs typeface="Inter" pitchFamily="34" charset="-120"/>
+              </a:rPr>
+              <a:t>PRESENTED BY</a:t>
+            </a:r>
+            <a:endParaRPr lang="en-US" sz="1333" dirty="0"/>
+          </a:p>
+        </p:txBody>
+      </p:sp>
+      <p:sp>
+        <p:nvSpPr>
+          <p:cNvPr id="21" name="Text 19"/>
+          <p:cNvSpPr/>
+          <p:nvPr/>
+        </p:nvSpPr>
+        <p:spPr>
+          <a:xfrm>
+            <a:off x="7087606" y="5274270"/>
+            <a:ext cx="4201915" cy="297061"/>
+          </a:xfrm>
+          <a:prstGeom prst="rect">
+            <a:avLst/>
+          </a:prstGeom>
+          <a:noFill/>
+          <a:ln/>
+        </p:spPr>
+        <p:txBody>
+          <a:bodyPr wrap="square" lIns="0" tIns="0" rIns="0" bIns="0" rtlCol="0" anchor="t"/>
+          <a:lstStyle/>
+          <a:p>
+            <a:pPr algn="l" indent="0" marL="0">
+              <a:lnSpc>
+                <a:spcPts val="2340"/>
+              </a:lnSpc>
+              <a:spcBef>
+                <a:spcPts val="667"/>
+              </a:spcBef>
+              <a:buNone/>
+            </a:pPr>
+            <a:r>
+              <a:rPr lang="en-US" sz="1733" b="1" dirty="0">
+                <a:solidFill>
+                  <a:srgbClr val="0A2540"/>
+                </a:solidFill>
+                <a:latin typeface="Inter" pitchFamily="34" charset="0"/>
+                <a:ea typeface="Inter" pitchFamily="34" charset="-122"/>
+                <a:cs typeface="Inter" pitchFamily="34" charset="-120"/>
+              </a:rPr>
+              <a:t>PRESENTER · TEAM</a:t>
+            </a:r>
+            <a:endParaRPr lang="en-US" sz="1733" dirty="0"/>
+          </a:p>
+        </p:txBody>
+      </p:sp>
+      <p:sp>
+        <p:nvSpPr>
+          <p:cNvPr id="22" name="Text 20"/>
+          <p:cNvSpPr/>
+          <p:nvPr/>
+        </p:nvSpPr>
+        <p:spPr>
+          <a:xfrm>
+            <a:off x="5977626" y="6113066"/>
+            <a:ext cx="5644913" cy="236934"/>
+          </a:xfrm>
+          <a:prstGeom prst="rect">
+            <a:avLst/>
+          </a:prstGeom>
+          <a:noFill/>
+          <a:ln/>
+        </p:spPr>
+        <p:txBody>
+          <a:bodyPr wrap="square" lIns="0" tIns="0" rIns="0" bIns="0" rtlCol="0" anchor="t"/>
+          <a:lstStyle/>
+          <a:p>
+            <a:pPr algn="l" indent="0" marL="0">
+              <a:lnSpc>
+                <a:spcPts val="1866"/>
+              </a:lnSpc>
+              <a:buNone/>
+            </a:pPr>
+            <a:r>
+              <a:rPr lang="en-US" sz="1333" dirty="0">
+                <a:solidFill>
+                  <a:srgbClr val="5C6B7E"/>
+                </a:solidFill>
+                <a:latin typeface="Inter" pitchFamily="34" charset="0"/>
+                <a:ea typeface="Inter" pitchFamily="34" charset="-122"/>
+                <a:cs typeface="Inter" pitchFamily="34" charset="-120"/>
+              </a:rPr>
+              <a:t>CI PIPELINE · SHEET 06 / 06 · NO CHART, NO EXTERNAL DATA</a:t>
+            </a:r>
+            <a:endParaRPr lang="en-US" sz="1333" dirty="0"/>
+          </a:p>
+        </p:txBody>
+      </p:sp>
     </p:spTree>
   </p:cSld>
   <p:clrMapOvr>

--- a/decks/ci-pipeline/ci-pipeline.pptx
+++ b/decks/ci-pipeline/ci-pipeline.pptx
@@ -1368,7 +1368,7 @@
           <a:ln/>
         </p:spPr>
         <p:txBody>
-          <a:bodyPr wrap="square" lIns="0" tIns="0" rIns="0" bIns="0" rtlCol="0" anchor="t"/>
+          <a:bodyPr wrap="none" lIns="0" tIns="0" rIns="0" bIns="0" rtlCol="0" anchor="t"/>
           <a:lstStyle/>
           <a:p>
             <a:pPr algn="l" indent="0" marL="0">
@@ -1410,7 +1410,9 @@
           <a:ln/>
         </p:spPr>
         <p:txBody>
-          <a:bodyPr wrap="square" lIns="0" tIns="0" rIns="0" bIns="0" rtlCol="0" anchor="t"/>
+          <a:bodyPr wrap="square" lIns="0" tIns="0" rIns="0" bIns="0" rtlCol="0" anchor="t">
+            <a:normAutofit/>
+          </a:bodyPr>
           <a:lstStyle/>
           <a:p>
             <a:pPr algn="l" indent="0" marL="0">
@@ -1478,7 +1480,9 @@
           <a:ln/>
         </p:spPr>
         <p:txBody>
-          <a:bodyPr wrap="square" lIns="0" tIns="0" rIns="0" bIns="0" rtlCol="0" anchor="t"/>
+          <a:bodyPr wrap="square" lIns="0" tIns="0" rIns="0" bIns="0" rtlCol="0" anchor="t">
+            <a:normAutofit/>
+          </a:bodyPr>
           <a:lstStyle/>
           <a:p>
             <a:pPr algn="l" indent="0" marL="0">
@@ -1578,7 +1582,7 @@
           <a:ln/>
         </p:spPr>
         <p:txBody>
-          <a:bodyPr wrap="square" lIns="0" tIns="0" rIns="0" bIns="0" rtlCol="0" anchor="t"/>
+          <a:bodyPr wrap="none" lIns="0" tIns="0" rIns="0" bIns="0" rtlCol="0" anchor="t"/>
           <a:lstStyle/>
           <a:p>
             <a:pPr algn="l" indent="0" marL="0">
@@ -1623,7 +1627,7 @@
           <a:ln/>
         </p:spPr>
         <p:txBody>
-          <a:bodyPr wrap="square" lIns="0" tIns="0" rIns="0" bIns="0" rtlCol="0" anchor="t"/>
+          <a:bodyPr wrap="none" lIns="0" tIns="0" rIns="0" bIns="0" rtlCol="0" anchor="t"/>
           <a:lstStyle/>
           <a:p>
             <a:pPr algn="l" indent="0" marL="0">
@@ -1665,7 +1669,7 @@
           <a:ln/>
         </p:spPr>
         <p:txBody>
-          <a:bodyPr wrap="square" lIns="0" tIns="0" rIns="0" bIns="0" rtlCol="0" anchor="t"/>
+          <a:bodyPr wrap="none" lIns="0" tIns="0" rIns="0" bIns="0" rtlCol="0" anchor="t"/>
           <a:lstStyle/>
           <a:p>
             <a:pPr algn="l" indent="0" marL="0">
@@ -1710,7 +1714,7 @@
           <a:ln/>
         </p:spPr>
         <p:txBody>
-          <a:bodyPr wrap="square" lIns="0" tIns="0" rIns="0" bIns="0" rtlCol="0" anchor="t"/>
+          <a:bodyPr wrap="none" lIns="0" tIns="0" rIns="0" bIns="0" rtlCol="0" anchor="t"/>
           <a:lstStyle/>
           <a:p>
             <a:pPr algn="l" indent="0" marL="0">
@@ -1752,7 +1756,7 @@
           <a:ln/>
         </p:spPr>
         <p:txBody>
-          <a:bodyPr wrap="square" lIns="0" tIns="0" rIns="0" bIns="0" rtlCol="0" anchor="t"/>
+          <a:bodyPr wrap="none" lIns="0" tIns="0" rIns="0" bIns="0" rtlCol="0" anchor="t"/>
           <a:lstStyle/>
           <a:p>
             <a:pPr algn="l" indent="0" marL="0">
@@ -1826,7 +1830,7 @@
           <a:ln/>
         </p:spPr>
         <p:txBody>
-          <a:bodyPr wrap="square" lIns="0" tIns="0" rIns="0" bIns="0" rtlCol="0" anchor="t"/>
+          <a:bodyPr wrap="none" lIns="0" tIns="0" rIns="0" bIns="0" rtlCol="0" anchor="t"/>
           <a:lstStyle/>
           <a:p>
             <a:pPr algn="l" indent="0" marL="0">
@@ -1868,7 +1872,7 @@
           <a:ln/>
         </p:spPr>
         <p:txBody>
-          <a:bodyPr wrap="square" lIns="0" tIns="0" rIns="0" bIns="0" rtlCol="0" anchor="t"/>
+          <a:bodyPr wrap="none" lIns="0" tIns="0" rIns="0" bIns="0" rtlCol="0" anchor="t"/>
           <a:lstStyle/>
           <a:p>
             <a:pPr algn="l" indent="0" marL="0">
@@ -1945,7 +1949,9 @@
           <a:ln/>
         </p:spPr>
         <p:txBody>
-          <a:bodyPr wrap="square" lIns="0" tIns="0" rIns="0" bIns="0" rtlCol="0" anchor="t"/>
+          <a:bodyPr wrap="square" lIns="0" tIns="0" rIns="0" bIns="0" rtlCol="0" anchor="t">
+            <a:normAutofit/>
+          </a:bodyPr>
           <a:lstStyle/>
           <a:p>
             <a:pPr algn="l" indent="0" marL="0">
@@ -1987,7 +1993,9 @@
           <a:ln/>
         </p:spPr>
         <p:txBody>
-          <a:bodyPr wrap="square" lIns="0" tIns="0" rIns="0" bIns="0" rtlCol="0" anchor="t"/>
+          <a:bodyPr wrap="square" lIns="0" tIns="0" rIns="0" bIns="0" rtlCol="0" anchor="t">
+            <a:normAutofit/>
+          </a:bodyPr>
           <a:lstStyle/>
           <a:p>
             <a:pPr algn="l" indent="0" marL="0">
@@ -2032,7 +2040,9 @@
           <a:ln/>
         </p:spPr>
         <p:txBody>
-          <a:bodyPr wrap="square" lIns="0" tIns="0" rIns="0" bIns="0" rtlCol="0" anchor="t"/>
+          <a:bodyPr wrap="square" lIns="0" tIns="0" rIns="0" bIns="0" rtlCol="0" anchor="t">
+            <a:normAutofit/>
+          </a:bodyPr>
           <a:lstStyle/>
           <a:p>
             <a:pPr algn="l" indent="0" marL="0">
@@ -2077,7 +2087,7 @@
           <a:ln/>
         </p:spPr>
         <p:txBody>
-          <a:bodyPr wrap="square" lIns="0" tIns="0" rIns="0" bIns="0" rtlCol="0" anchor="t"/>
+          <a:bodyPr wrap="none" lIns="0" tIns="0" rIns="0" bIns="0" rtlCol="0" anchor="t"/>
           <a:lstStyle/>
           <a:p>
             <a:pPr algn="l" indent="0" marL="0">
@@ -2154,7 +2164,7 @@
           <a:ln/>
         </p:spPr>
         <p:txBody>
-          <a:bodyPr wrap="square" lIns="0" tIns="0" rIns="0" bIns="0" rtlCol="0" anchor="t"/>
+          <a:bodyPr wrap="none" lIns="0" tIns="0" rIns="0" bIns="0" rtlCol="0" anchor="t"/>
           <a:lstStyle/>
           <a:p>
             <a:pPr algn="l" indent="0" marL="0">
@@ -2196,7 +2206,7 @@
           <a:ln/>
         </p:spPr>
         <p:txBody>
-          <a:bodyPr wrap="square" lIns="0" tIns="0" rIns="0" bIns="0" rtlCol="0" anchor="t"/>
+          <a:bodyPr wrap="none" lIns="0" tIns="0" rIns="0" bIns="0" rtlCol="0" anchor="t"/>
           <a:lstStyle/>
           <a:p>
             <a:pPr algn="l" indent="0" marL="0">
@@ -2273,7 +2283,7 @@
           <a:ln/>
         </p:spPr>
         <p:txBody>
-          <a:bodyPr wrap="square" lIns="0" tIns="0" rIns="0" bIns="0" rtlCol="0" anchor="t"/>
+          <a:bodyPr wrap="none" lIns="0" tIns="0" rIns="0" bIns="0" rtlCol="0" anchor="t"/>
           <a:lstStyle/>
           <a:p>
             <a:pPr algn="l" indent="0" marL="0">
@@ -2315,7 +2325,9 @@
           <a:ln/>
         </p:spPr>
         <p:txBody>
-          <a:bodyPr wrap="square" lIns="0" tIns="0" rIns="0" bIns="0" rtlCol="0" anchor="t"/>
+          <a:bodyPr wrap="square" lIns="0" tIns="0" rIns="0" bIns="0" rtlCol="0" anchor="t">
+            <a:normAutofit/>
+          </a:bodyPr>
           <a:lstStyle/>
           <a:p>
             <a:pPr algn="l" indent="0" marL="0">
@@ -2392,7 +2404,7 @@
           <a:ln/>
         </p:spPr>
         <p:txBody>
-          <a:bodyPr wrap="square" lIns="0" tIns="0" rIns="0" bIns="0" rtlCol="0" anchor="t"/>
+          <a:bodyPr wrap="none" lIns="0" tIns="0" rIns="0" bIns="0" rtlCol="0" anchor="t"/>
           <a:lstStyle/>
           <a:p>
             <a:pPr algn="l" indent="0" marL="0">
@@ -2434,7 +2446,7 @@
           <a:ln/>
         </p:spPr>
         <p:txBody>
-          <a:bodyPr wrap="square" lIns="0" tIns="0" rIns="0" bIns="0" rtlCol="0" anchor="t"/>
+          <a:bodyPr wrap="none" lIns="0" tIns="0" rIns="0" bIns="0" rtlCol="0" anchor="t"/>
           <a:lstStyle/>
           <a:p>
             <a:pPr algn="l" indent="0" marL="0">
@@ -2479,7 +2491,7 @@
           <a:ln/>
         </p:spPr>
         <p:txBody>
-          <a:bodyPr wrap="square" lIns="0" tIns="0" rIns="0" bIns="0" rtlCol="0" anchor="t"/>
+          <a:bodyPr wrap="none" lIns="0" tIns="0" rIns="0" bIns="0" rtlCol="0" anchor="t"/>
           <a:lstStyle/>
           <a:p>
             <a:pPr algn="l" indent="0" marL="0">
@@ -2553,7 +2565,7 @@
           <a:ln/>
         </p:spPr>
         <p:txBody>
-          <a:bodyPr wrap="square" lIns="0" tIns="0" rIns="0" bIns="0" rtlCol="0" anchor="t"/>
+          <a:bodyPr wrap="none" lIns="0" tIns="0" rIns="0" bIns="0" rtlCol="0" anchor="t"/>
           <a:lstStyle/>
           <a:p>
             <a:pPr algn="l" indent="0" marL="0">
@@ -2595,7 +2607,7 @@
           <a:ln/>
         </p:spPr>
         <p:txBody>
-          <a:bodyPr wrap="square" lIns="0" tIns="0" rIns="0" bIns="0" rtlCol="0" anchor="t"/>
+          <a:bodyPr wrap="none" lIns="0" tIns="0" rIns="0" bIns="0" rtlCol="0" anchor="t"/>
           <a:lstStyle/>
           <a:p>
             <a:pPr algn="l" indent="0" marL="0">
@@ -2670,7 +2682,7 @@
           <a:ln/>
         </p:spPr>
         <p:txBody>
-          <a:bodyPr wrap="square" lIns="0" tIns="0" rIns="0" bIns="0" rtlCol="0" anchor="t"/>
+          <a:bodyPr wrap="none" lIns="0" tIns="0" rIns="0" bIns="0" rtlCol="0" anchor="t"/>
           <a:lstStyle/>
           <a:p>
             <a:pPr algn="l" indent="0" marL="0">
@@ -2742,7 +2754,9 @@
           <a:ln/>
         </p:spPr>
         <p:txBody>
-          <a:bodyPr wrap="square" lIns="0" tIns="0" rIns="0" bIns="0" rtlCol="0" anchor="t"/>
+          <a:bodyPr wrap="square" lIns="0" tIns="0" rIns="0" bIns="0" rtlCol="0" anchor="t">
+            <a:normAutofit/>
+          </a:bodyPr>
           <a:lstStyle/>
           <a:p>
             <a:pPr algn="l" indent="0" marL="0">
@@ -2899,7 +2913,7 @@
           <a:ln/>
         </p:spPr>
         <p:txBody>
-          <a:bodyPr wrap="square" lIns="0" tIns="0" rIns="0" bIns="0" rtlCol="0" anchor="t"/>
+          <a:bodyPr wrap="none" lIns="0" tIns="0" rIns="0" bIns="0" rtlCol="0" anchor="t"/>
           <a:lstStyle/>
           <a:p>
             <a:pPr algn="l" indent="0" marL="0">
@@ -2971,7 +2985,9 @@
           <a:ln/>
         </p:spPr>
         <p:txBody>
-          <a:bodyPr wrap="square" lIns="0" tIns="0" rIns="0" bIns="0" rtlCol="0" anchor="t"/>
+          <a:bodyPr wrap="square" lIns="0" tIns="0" rIns="0" bIns="0" rtlCol="0" anchor="t">
+            <a:normAutofit/>
+          </a:bodyPr>
           <a:lstStyle/>
           <a:p>
             <a:pPr algn="l" indent="0" marL="0">
@@ -3128,7 +3144,7 @@
           <a:ln/>
         </p:spPr>
         <p:txBody>
-          <a:bodyPr wrap="square" lIns="0" tIns="0" rIns="0" bIns="0" rtlCol="0" anchor="t"/>
+          <a:bodyPr wrap="none" lIns="0" tIns="0" rIns="0" bIns="0" rtlCol="0" anchor="t"/>
           <a:lstStyle/>
           <a:p>
             <a:pPr algn="l" indent="0" marL="0">
@@ -3200,7 +3216,9 @@
           <a:ln/>
         </p:spPr>
         <p:txBody>
-          <a:bodyPr wrap="square" lIns="0" tIns="0" rIns="0" bIns="0" rtlCol="0" anchor="t"/>
+          <a:bodyPr wrap="square" lIns="0" tIns="0" rIns="0" bIns="0" rtlCol="0" anchor="t">
+            <a:normAutofit/>
+          </a:bodyPr>
           <a:lstStyle/>
           <a:p>
             <a:pPr algn="l" indent="0" marL="0">
@@ -3391,7 +3409,9 @@
           <a:ln/>
         </p:spPr>
         <p:txBody>
-          <a:bodyPr wrap="square" lIns="0" tIns="0" rIns="0" bIns="0" rtlCol="0" anchor="t"/>
+          <a:bodyPr wrap="square" lIns="0" tIns="0" rIns="0" bIns="0" rtlCol="0" anchor="t">
+            <a:normAutofit/>
+          </a:bodyPr>
           <a:lstStyle/>
           <a:p>
             <a:pPr algn="l" indent="0" marL="0">
@@ -3433,7 +3453,7 @@
           <a:ln/>
         </p:spPr>
         <p:txBody>
-          <a:bodyPr wrap="square" lIns="0" tIns="0" rIns="0" bIns="0" rtlCol="0" anchor="t"/>
+          <a:bodyPr wrap="none" lIns="0" tIns="0" rIns="0" bIns="0" rtlCol="0" anchor="t"/>
           <a:lstStyle/>
           <a:p>
             <a:pPr algn="l" indent="0" marL="0">
@@ -3507,7 +3527,7 @@
           <a:ln/>
         </p:spPr>
         <p:txBody>
-          <a:bodyPr wrap="square" lIns="0" tIns="0" rIns="0" bIns="0" rtlCol="0" anchor="t"/>
+          <a:bodyPr wrap="none" lIns="0" tIns="0" rIns="0" bIns="0" rtlCol="0" anchor="t"/>
           <a:lstStyle/>
           <a:p>
             <a:pPr algn="l" indent="0" marL="0">
@@ -3549,7 +3569,7 @@
           <a:ln/>
         </p:spPr>
         <p:txBody>
-          <a:bodyPr wrap="square" lIns="0" tIns="0" rIns="0" bIns="0" rtlCol="0" anchor="t"/>
+          <a:bodyPr wrap="none" lIns="0" tIns="0" rIns="0" bIns="0" rtlCol="0" anchor="t"/>
           <a:lstStyle/>
           <a:p>
             <a:pPr algn="l" indent="0" marL="0">
@@ -3626,7 +3646,7 @@
           <a:ln/>
         </p:spPr>
         <p:txBody>
-          <a:bodyPr wrap="square" lIns="0" tIns="0" rIns="0" bIns="0" rtlCol="0" anchor="t"/>
+          <a:bodyPr wrap="none" lIns="0" tIns="0" rIns="0" bIns="0" rtlCol="0" anchor="t"/>
           <a:lstStyle/>
           <a:p>
             <a:pPr algn="l" indent="0" marL="0">
@@ -3668,7 +3688,9 @@
           <a:ln/>
         </p:spPr>
         <p:txBody>
-          <a:bodyPr wrap="square" lIns="0" tIns="0" rIns="0" bIns="0" rtlCol="0" anchor="t"/>
+          <a:bodyPr wrap="square" lIns="0" tIns="0" rIns="0" bIns="0" rtlCol="0" anchor="t">
+            <a:normAutofit/>
+          </a:bodyPr>
           <a:lstStyle/>
           <a:p>
             <a:pPr algn="l" indent="0" marL="0">
@@ -3713,7 +3735,9 @@
           <a:ln/>
         </p:spPr>
         <p:txBody>
-          <a:bodyPr wrap="square" lIns="0" tIns="0" rIns="0" bIns="0" rtlCol="0" anchor="t"/>
+          <a:bodyPr wrap="square" lIns="0" tIns="0" rIns="0" bIns="0" rtlCol="0" anchor="t">
+            <a:normAutofit/>
+          </a:bodyPr>
           <a:lstStyle/>
           <a:p>
             <a:pPr algn="l" indent="0" marL="0">
@@ -3822,7 +3846,7 @@
           <a:ln/>
         </p:spPr>
         <p:txBody>
-          <a:bodyPr wrap="square" lIns="0" tIns="0" rIns="0" bIns="0" rtlCol="0" anchor="t"/>
+          <a:bodyPr wrap="none" lIns="0" tIns="0" rIns="0" bIns="0" rtlCol="0" anchor="t"/>
           <a:lstStyle/>
           <a:p>
             <a:pPr algn="l" indent="0" marL="0">
@@ -3864,7 +3888,7 @@
           <a:ln/>
         </p:spPr>
         <p:txBody>
-          <a:bodyPr wrap="square" lIns="0" tIns="0" rIns="0" bIns="0" rtlCol="0" anchor="t"/>
+          <a:bodyPr wrap="none" lIns="0" tIns="0" rIns="0" bIns="0" rtlCol="0" anchor="t"/>
           <a:lstStyle/>
           <a:p>
             <a:pPr algn="l" indent="0" marL="0">
@@ -3906,7 +3930,9 @@
           <a:ln/>
         </p:spPr>
         <p:txBody>
-          <a:bodyPr wrap="square" lIns="0" tIns="0" rIns="0" bIns="0" rtlCol="0" anchor="t"/>
+          <a:bodyPr wrap="square" lIns="0" tIns="0" rIns="0" bIns="0" rtlCol="0" anchor="t">
+            <a:normAutofit/>
+          </a:bodyPr>
           <a:lstStyle/>
           <a:p>
             <a:pPr algn="l" indent="0" marL="0">
@@ -4015,7 +4041,7 @@
           <a:ln/>
         </p:spPr>
         <p:txBody>
-          <a:bodyPr wrap="square" lIns="0" tIns="0" rIns="0" bIns="0" rtlCol="0" anchor="t"/>
+          <a:bodyPr wrap="none" lIns="0" tIns="0" rIns="0" bIns="0" rtlCol="0" anchor="t"/>
           <a:lstStyle/>
           <a:p>
             <a:pPr algn="l" indent="0" marL="0">
@@ -4057,7 +4083,7 @@
           <a:ln/>
         </p:spPr>
         <p:txBody>
-          <a:bodyPr wrap="square" lIns="0" tIns="0" rIns="0" bIns="0" rtlCol="0" anchor="t"/>
+          <a:bodyPr wrap="none" lIns="0" tIns="0" rIns="0" bIns="0" rtlCol="0" anchor="t"/>
           <a:lstStyle/>
           <a:p>
             <a:pPr algn="l" indent="0" marL="0">
@@ -4099,7 +4125,9 @@
           <a:ln/>
         </p:spPr>
         <p:txBody>
-          <a:bodyPr wrap="square" lIns="0" tIns="0" rIns="0" bIns="0" rtlCol="0" anchor="t"/>
+          <a:bodyPr wrap="square" lIns="0" tIns="0" rIns="0" bIns="0" rtlCol="0" anchor="t">
+            <a:normAutofit/>
+          </a:bodyPr>
           <a:lstStyle/>
           <a:p>
             <a:pPr algn="l" indent="0" marL="0">
@@ -4144,7 +4172,7 @@
           <a:ln/>
         </p:spPr>
         <p:txBody>
-          <a:bodyPr wrap="square" lIns="0" tIns="0" rIns="0" bIns="0" rtlCol="0" anchor="t"/>
+          <a:bodyPr wrap="none" lIns="0" tIns="0" rIns="0" bIns="0" rtlCol="0" anchor="t"/>
           <a:lstStyle/>
           <a:p>
             <a:pPr algn="l" indent="0" marL="0">
@@ -4218,7 +4246,7 @@
           <a:ln/>
         </p:spPr>
         <p:txBody>
-          <a:bodyPr wrap="square" lIns="0" tIns="0" rIns="0" bIns="0" rtlCol="0" anchor="t"/>
+          <a:bodyPr wrap="none" lIns="0" tIns="0" rIns="0" bIns="0" rtlCol="0" anchor="t"/>
           <a:lstStyle/>
           <a:p>
             <a:pPr algn="l" indent="0" marL="0">
@@ -4260,7 +4288,7 @@
           <a:ln/>
         </p:spPr>
         <p:txBody>
-          <a:bodyPr wrap="square" lIns="0" tIns="0" rIns="0" bIns="0" rtlCol="0" anchor="t"/>
+          <a:bodyPr wrap="none" lIns="0" tIns="0" rIns="0" bIns="0" rtlCol="0" anchor="t"/>
           <a:lstStyle/>
           <a:p>
             <a:pPr algn="l" indent="0" marL="0">
@@ -4305,7 +4333,7 @@
           <a:ln/>
         </p:spPr>
         <p:txBody>
-          <a:bodyPr wrap="square" lIns="0" tIns="0" rIns="0" bIns="0" rtlCol="0" anchor="t"/>
+          <a:bodyPr wrap="none" lIns="0" tIns="0" rIns="0" bIns="0" rtlCol="0" anchor="t"/>
           <a:lstStyle/>
           <a:p>
             <a:pPr algn="l" indent="0" marL="0">
@@ -4411,7 +4439,7 @@
           <a:ln/>
         </p:spPr>
         <p:txBody>
-          <a:bodyPr wrap="square" lIns="0" tIns="0" rIns="0" bIns="0" rtlCol="0" anchor="t"/>
+          <a:bodyPr wrap="none" lIns="0" tIns="0" rIns="0" bIns="0" rtlCol="0" anchor="t"/>
           <a:lstStyle/>
           <a:p>
             <a:pPr algn="l" indent="0" marL="0">
@@ -4495,7 +4523,9 @@
           <a:ln/>
         </p:spPr>
         <p:txBody>
-          <a:bodyPr wrap="square" lIns="0" tIns="0" rIns="0" bIns="0" rtlCol="0" anchor="t"/>
+          <a:bodyPr wrap="square" lIns="0" tIns="0" rIns="0" bIns="0" rtlCol="0" anchor="t">
+            <a:normAutofit/>
+          </a:bodyPr>
           <a:lstStyle/>
           <a:p>
             <a:pPr algn="l" indent="0" marL="0">
@@ -4634,7 +4664,7 @@
           <a:ln/>
         </p:spPr>
         <p:txBody>
-          <a:bodyPr wrap="square" lIns="0" tIns="0" rIns="0" bIns="0" rtlCol="0" anchor="t"/>
+          <a:bodyPr wrap="none" lIns="0" tIns="0" rIns="0" bIns="0" rtlCol="0" anchor="t"/>
           <a:lstStyle/>
           <a:p>
             <a:pPr algn="l" indent="0" marL="0">
@@ -4676,7 +4706,9 @@
           <a:ln/>
         </p:spPr>
         <p:txBody>
-          <a:bodyPr wrap="square" lIns="0" tIns="0" rIns="0" bIns="0" rtlCol="0" anchor="t"/>
+          <a:bodyPr wrap="square" lIns="0" tIns="0" rIns="0" bIns="0" rtlCol="0" anchor="t">
+            <a:normAutofit/>
+          </a:bodyPr>
           <a:lstStyle/>
           <a:p>
             <a:pPr algn="l" indent="0" marL="0">
@@ -4857,7 +4889,7 @@
           <a:ln/>
         </p:spPr>
         <p:txBody>
-          <a:bodyPr wrap="square" lIns="0" tIns="0" rIns="0" bIns="0" rtlCol="0" anchor="t"/>
+          <a:bodyPr wrap="none" lIns="0" tIns="0" rIns="0" bIns="0" rtlCol="0" anchor="t"/>
           <a:lstStyle/>
           <a:p>
             <a:pPr algn="l" indent="0" marL="0">
@@ -4941,7 +4973,9 @@
           <a:ln/>
         </p:spPr>
         <p:txBody>
-          <a:bodyPr wrap="square" lIns="0" tIns="0" rIns="0" bIns="0" rtlCol="0" anchor="t"/>
+          <a:bodyPr wrap="square" lIns="0" tIns="0" rIns="0" bIns="0" rtlCol="0" anchor="t">
+            <a:normAutofit/>
+          </a:bodyPr>
           <a:lstStyle/>
           <a:p>
             <a:pPr algn="l" indent="0" marL="0">
@@ -5080,7 +5114,7 @@
           <a:ln/>
         </p:spPr>
         <p:txBody>
-          <a:bodyPr wrap="square" lIns="0" tIns="0" rIns="0" bIns="0" rtlCol="0" anchor="t"/>
+          <a:bodyPr wrap="none" lIns="0" tIns="0" rIns="0" bIns="0" rtlCol="0" anchor="t"/>
           <a:lstStyle/>
           <a:p>
             <a:pPr algn="l" indent="0" marL="0">
@@ -5122,7 +5156,9 @@
           <a:ln/>
         </p:spPr>
         <p:txBody>
-          <a:bodyPr wrap="square" lIns="0" tIns="0" rIns="0" bIns="0" rtlCol="0" anchor="t"/>
+          <a:bodyPr wrap="square" lIns="0" tIns="0" rIns="0" bIns="0" rtlCol="0" anchor="t">
+            <a:normAutofit/>
+          </a:bodyPr>
           <a:lstStyle/>
           <a:p>
             <a:pPr algn="l" indent="0" marL="0">
@@ -5164,7 +5200,9 @@
           <a:ln/>
         </p:spPr>
         <p:txBody>
-          <a:bodyPr wrap="square" lIns="0" tIns="0" rIns="0" bIns="0" rtlCol="0" anchor="t"/>
+          <a:bodyPr wrap="square" lIns="0" tIns="0" rIns="0" bIns="0" rtlCol="0" anchor="t">
+            <a:normAutofit/>
+          </a:bodyPr>
           <a:lstStyle/>
           <a:p>
             <a:pPr algn="l" indent="0" marL="0">
@@ -5273,7 +5311,7 @@
           <a:ln/>
         </p:spPr>
         <p:txBody>
-          <a:bodyPr wrap="square" lIns="0" tIns="0" rIns="0" bIns="0" rtlCol="0" anchor="t"/>
+          <a:bodyPr wrap="none" lIns="0" tIns="0" rIns="0" bIns="0" rtlCol="0" anchor="t"/>
           <a:lstStyle/>
           <a:p>
             <a:pPr algn="l" indent="0" marL="0">
@@ -5315,7 +5353,7 @@
           <a:ln/>
         </p:spPr>
         <p:txBody>
-          <a:bodyPr wrap="square" lIns="0" tIns="0" rIns="0" bIns="0" rtlCol="0" anchor="t"/>
+          <a:bodyPr wrap="none" lIns="0" tIns="0" rIns="0" bIns="0" rtlCol="0" anchor="t"/>
           <a:lstStyle/>
           <a:p>
             <a:pPr algn="l" indent="0" marL="0">
@@ -5389,7 +5427,7 @@
           <a:ln/>
         </p:spPr>
         <p:txBody>
-          <a:bodyPr wrap="square" lIns="0" tIns="0" rIns="0" bIns="0" rtlCol="0" anchor="t"/>
+          <a:bodyPr wrap="none" lIns="0" tIns="0" rIns="0" bIns="0" rtlCol="0" anchor="t"/>
           <a:lstStyle/>
           <a:p>
             <a:pPr algn="l" indent="0" marL="0">
@@ -5431,7 +5469,7 @@
           <a:ln/>
         </p:spPr>
         <p:txBody>
-          <a:bodyPr wrap="square" lIns="0" tIns="0" rIns="0" bIns="0" rtlCol="0" anchor="t"/>
+          <a:bodyPr wrap="none" lIns="0" tIns="0" rIns="0" bIns="0" rtlCol="0" anchor="t"/>
           <a:lstStyle/>
           <a:p>
             <a:pPr algn="l" indent="0" marL="0">
@@ -5540,7 +5578,7 @@
           <a:ln/>
         </p:spPr>
         <p:txBody>
-          <a:bodyPr wrap="square" lIns="0" tIns="0" rIns="0" bIns="0" rtlCol="0" anchor="t"/>
+          <a:bodyPr wrap="none" lIns="0" tIns="0" rIns="0" bIns="0" rtlCol="0" anchor="t"/>
           <a:lstStyle/>
           <a:p>
             <a:pPr algn="l" indent="0" marL="0">
@@ -5582,7 +5620,9 @@
           <a:ln/>
         </p:spPr>
         <p:txBody>
-          <a:bodyPr wrap="square" lIns="0" tIns="0" rIns="0" bIns="0" rtlCol="0" anchor="t"/>
+          <a:bodyPr wrap="square" lIns="0" tIns="0" rIns="0" bIns="0" rtlCol="0" anchor="t">
+            <a:normAutofit/>
+          </a:bodyPr>
           <a:lstStyle/>
           <a:p>
             <a:pPr algn="l" indent="0" marL="0">
@@ -5688,7 +5728,7 @@
           <a:ln/>
         </p:spPr>
         <p:txBody>
-          <a:bodyPr wrap="square" lIns="0" tIns="0" rIns="0" bIns="0" rtlCol="0" anchor="t"/>
+          <a:bodyPr wrap="none" lIns="0" tIns="0" rIns="0" bIns="0" rtlCol="0" anchor="t"/>
           <a:lstStyle/>
           <a:p>
             <a:pPr algn="l" indent="0" marL="0">
@@ -5730,7 +5770,9 @@
           <a:ln/>
         </p:spPr>
         <p:txBody>
-          <a:bodyPr wrap="square" lIns="0" tIns="0" rIns="0" bIns="0" rtlCol="0" anchor="t"/>
+          <a:bodyPr wrap="square" lIns="0" tIns="0" rIns="0" bIns="0" rtlCol="0" anchor="t">
+            <a:normAutofit/>
+          </a:bodyPr>
           <a:lstStyle/>
           <a:p>
             <a:pPr algn="l" indent="0" marL="0">
@@ -5836,7 +5878,7 @@
           <a:ln/>
         </p:spPr>
         <p:txBody>
-          <a:bodyPr wrap="square" lIns="0" tIns="0" rIns="0" bIns="0" rtlCol="0" anchor="t"/>
+          <a:bodyPr wrap="none" lIns="0" tIns="0" rIns="0" bIns="0" rtlCol="0" anchor="t"/>
           <a:lstStyle/>
           <a:p>
             <a:pPr algn="l" indent="0" marL="0">
@@ -5878,7 +5920,9 @@
           <a:ln/>
         </p:spPr>
         <p:txBody>
-          <a:bodyPr wrap="square" lIns="0" tIns="0" rIns="0" bIns="0" rtlCol="0" anchor="t"/>
+          <a:bodyPr wrap="square" lIns="0" tIns="0" rIns="0" bIns="0" rtlCol="0" anchor="t">
+            <a:normAutofit/>
+          </a:bodyPr>
           <a:lstStyle/>
           <a:p>
             <a:pPr algn="l" indent="0" marL="0">
@@ -5952,7 +5996,7 @@
           <a:ln/>
         </p:spPr>
         <p:txBody>
-          <a:bodyPr wrap="square" lIns="0" tIns="0" rIns="0" bIns="0" rtlCol="0" anchor="t"/>
+          <a:bodyPr wrap="none" lIns="0" tIns="0" rIns="0" bIns="0" rtlCol="0" anchor="t"/>
           <a:lstStyle/>
           <a:p>
             <a:pPr algn="l" indent="0" marL="0">
@@ -5994,7 +6038,9 @@
           <a:ln/>
         </p:spPr>
         <p:txBody>
-          <a:bodyPr wrap="square" lIns="0" tIns="0" rIns="0" bIns="0" rtlCol="0" anchor="t"/>
+          <a:bodyPr wrap="square" lIns="0" tIns="0" rIns="0" bIns="0" rtlCol="0" anchor="t">
+            <a:normAutofit/>
+          </a:bodyPr>
           <a:lstStyle/>
           <a:p>
             <a:pPr algn="l" indent="0" marL="0">
@@ -6039,7 +6085,9 @@
           <a:ln/>
         </p:spPr>
         <p:txBody>
-          <a:bodyPr wrap="square" lIns="0" tIns="0" rIns="0" bIns="0" rtlCol="0" anchor="t"/>
+          <a:bodyPr wrap="square" lIns="0" tIns="0" rIns="0" bIns="0" rtlCol="0" anchor="t">
+            <a:normAutofit/>
+          </a:bodyPr>
           <a:lstStyle/>
           <a:p>
             <a:pPr algn="l" indent="0" marL="0">
@@ -6084,7 +6132,7 @@
           <a:ln/>
         </p:spPr>
         <p:txBody>
-          <a:bodyPr wrap="square" lIns="0" tIns="0" rIns="0" bIns="0" rtlCol="0" anchor="t"/>
+          <a:bodyPr wrap="none" lIns="0" tIns="0" rIns="0" bIns="0" rtlCol="0" anchor="t"/>
           <a:lstStyle/>
           <a:p>
             <a:pPr algn="l" indent="0" marL="0">
@@ -6126,7 +6174,7 @@
           <a:ln/>
         </p:spPr>
         <p:txBody>
-          <a:bodyPr wrap="square" lIns="0" tIns="0" rIns="0" bIns="0" rtlCol="0" anchor="t"/>
+          <a:bodyPr wrap="none" lIns="0" tIns="0" rIns="0" bIns="0" rtlCol="0" anchor="t"/>
           <a:lstStyle/>
           <a:p>
             <a:pPr algn="l" indent="0" marL="0">
@@ -6171,7 +6219,7 @@
           <a:ln/>
         </p:spPr>
         <p:txBody>
-          <a:bodyPr wrap="square" lIns="0" tIns="0" rIns="0" bIns="0" rtlCol="0" anchor="t"/>
+          <a:bodyPr wrap="none" lIns="0" tIns="0" rIns="0" bIns="0" rtlCol="0" anchor="t"/>
           <a:lstStyle/>
           <a:p>
             <a:pPr algn="l" indent="0" marL="0">

--- a/decks/ci-pipeline/ci-pipeline.pptx
+++ b/decks/ci-pipeline/ci-pipeline.pptx
@@ -1410,9 +1410,7 @@
           <a:ln/>
         </p:spPr>
         <p:txBody>
-          <a:bodyPr wrap="square" lIns="0" tIns="0" rIns="0" bIns="0" rtlCol="0" anchor="t">
-            <a:normAutofit/>
-          </a:bodyPr>
+          <a:bodyPr wrap="none" lIns="0" tIns="0" rIns="0" bIns="0" rtlCol="0" anchor="t"/>
           <a:lstStyle/>
           <a:p>
             <a:pPr algn="l" indent="0" marL="0">
@@ -1480,9 +1478,7 @@
           <a:ln/>
         </p:spPr>
         <p:txBody>
-          <a:bodyPr wrap="square" lIns="0" tIns="0" rIns="0" bIns="0" rtlCol="0" anchor="t">
-            <a:normAutofit/>
-          </a:bodyPr>
+          <a:bodyPr wrap="none" lIns="0" tIns="0" rIns="0" bIns="0" rtlCol="0" anchor="t"/>
           <a:lstStyle/>
           <a:p>
             <a:pPr algn="l" indent="0" marL="0">
